--- a/docs/investor/BP-Ittica-Pitch-Deck.pptx
+++ b/docs/investor/BP-Ittica-Pitch-Deck.pptx
@@ -513,7 +513,7 @@
           <a:p>
             <a:r>
               <a:rPr lang="en-US" dirty="0"/>
-              <a:t>We don't sell AI — we sell an outcome: your company never gets surprised by a violation or a freeze. AI is how we deliver that at a price an SME can afford.</a:t>
+              <a:t>نحن لا نبيع ذكاءً اصطناعيًا — نبيع نتيجة: منشأتك لا تُفاجأ بمخالفة ولا تتجمّد. الذكاء الاصطناعي هو ما يجعل هذه النتيجة ممكنة بسعرٍ في متناول أصغر منشأة.</a:t>
             </a:r>
             <a:endParaRPr lang="en-US" dirty="0"/>
           </a:p>
@@ -601,7 +601,7 @@
           <a:p>
             <a:r>
               <a:rPr lang="en-US" dirty="0"/>
-              <a:t>Prices are hypotheses we test in the pilot — we won't lock them before we know the true cost-to-serve per client. The fixed logic: far cheaper than the alternatives, recurring, and it grows with headcount and platforms.</a:t>
+              <a:t>الأسعار فرضيات نختبرها في المرحلة التجريبية، ولن نثبّتها قبل أن نعرف التكلفة الفعلية لخدمة العميل الواحد. المنطق الثابت: أرخص بكثير من بدائله، ومتكرر، وينمو مع عدد الموظفين والمنصات.</a:t>
             </a:r>
             <a:endParaRPr lang="en-US" dirty="0"/>
           </a:p>
@@ -689,7 +689,7 @@
           <a:p>
             <a:r>
               <a:rPr lang="en-US" dirty="0"/>
-              <a:t>Our success criterion in the program is narrow and measurable: one focused agent running reliably for dozens of real establishments — not twenty half-ready agents. Then we expand into the full compliance layer.</a:t>
+              <a:t>معيار نجاحنا في البرنامج ضيق وقابل للقياس: وكيل واحد مركّز يعمل بموثوقية لعشرات المنشآت الحقيقية — لا عشرون وكيلًا نصف جاهز. بعد الإثبات نتوسع إلى طبقة الامتثال الكاملة.</a:t>
             </a:r>
             <a:endParaRPr lang="en-US" dirty="0"/>
           </a:p>
@@ -777,7 +777,7 @@
           <a:p>
             <a:r>
               <a:rPr lang="en-US" dirty="0"/>
-              <a:t>We're not asking for money today — we're asking for the environment that makes the evidence conclusive. If we prove the wedge in 90 days, everything after — funding, expansion, integrations — becomes a numbers conversation, not a promises conversation.</a:t>
+              <a:t>لا نطلب المال اليوم — نطلب البيئة التي تجعل الأدلة قاطعة. إن أثبتنا نطاق الانطلاق خلال 90 يومًا، صار كل ما بعده — التمويل والتوسع والتكاملات — حديثَ أرقام، لا وعود.</a:t>
             </a:r>
             <a:endParaRPr lang="en-US" dirty="0"/>
           </a:p>
@@ -865,7 +865,7 @@
           <a:p>
             <a:r>
               <a:rPr lang="en-US" dirty="0"/>
-              <a:t>This is not a scare scenario — these are cases Baher fixed with his own hands for years. The platforms don't talk to each other and don't forgive. The owner usually discovers the problem only after the screen locks him out.</a:t>
+              <a:t>هذه حالات عالجتها بيدي لسنوات. كل منصة تعمل بمعزل عن الأخرى — ولا مكان فيها للنسيان. وأقسى ما في النطاق الأحمر أن عمالتك نفسها يحق لها تركك دون موافقتك، فيتسارع الانهيار. صاحب المنشأة يكتشف المشكلة عادةً بعد أن تُقفل الشاشة في وجهه.</a:t>
             </a:r>
             <a:endParaRPr lang="en-US" dirty="0"/>
           </a:p>
@@ -953,7 +953,7 @@
           <a:p>
             <a:r>
               <a:rPr lang="en-US" dirty="0"/>
-              <a:t>The question isn't whether compliance matters — everyone knows. The question is why it's still managed by scattered people and reaction. Because no alternative existed — until now.</a:t>
+              <a:t>السؤال ليس «هل الامتثال مهم؟» — الجميع يعرف أنه مهم. السؤال: لماذا ما زال يُدار بأشخاص متفرقين وردود أفعال؟ لأنه لم يوجد بديل — حتى الآن.</a:t>
             </a:r>
             <a:endParaRPr lang="en-US" dirty="0"/>
           </a:p>
@@ -1041,7 +1041,7 @@
           <a:p>
             <a:r>
               <a:rPr lang="en-US" dirty="0"/>
-              <a:t>We are not a tech team learning compliance to build software — we are encoding the thing we already sell as a service today. Our edge over any competitor: we know where these workflows break, because we broke in them.</a:t>
+              <a:t>لسنا فريقًا تقنيًا يتعلم الامتثال ليبني منتجًا — نحن نحوّل خدمةً نبيعها فعلًا اليوم إلى منتج. نعرف مواضع كسر هذه الإجراءات لأننا اكتوينا بها بأنفسنا قبل عملائنا.</a:t>
             </a:r>
             <a:endParaRPr lang="en-US" dirty="0"/>
           </a:p>
@@ -1129,7 +1129,7 @@
           <a:p>
             <a:r>
               <a:rPr lang="en-US" dirty="0"/>
-              <a:t>The key preposition: the agent executes WITH the owner's approval, never instead of his will. We never ask for or store passwords or OTPs. Full automation comes later through official integrations — which is part of what we're asking the program for.</a:t>
+              <a:t>الكلمة المفصلية هنا: باعتماد المالك — لا بالنيابة عنه. لا نطلب ولا نخزّن بيانات دخول، والأتمتة الكاملة تأتي لاحقًا عبر التكاملات الرسمية — وهي جزء من طلبنا من البرنامج.</a:t>
             </a:r>
             <a:endParaRPr lang="en-US" dirty="0"/>
           </a:p>
@@ -1217,7 +1217,7 @@
           <a:p>
             <a:r>
               <a:rPr lang="en-US" dirty="0"/>
-              <a:t>This is literally what Baher does manually for clients today — the agent does it for every client at the same moment, three weeks before the problem instead of three days after it.</a:t>
+              <a:t>هذا بالضبط ما أفعله اليوم يدويًا لعملائي — والوكيل يفعله لكل العملاء في اللحظة نفسها. ولاحظوا دقة الخيارات: خروج الوافد يرفع النسبة لأنه يُنقص المقام، والدوام الجزئي يُحتسب نصف عامل — هذه التفاصيل هي الفرق بين وكيلٍ يعرف الأنظمة وروبوت محادثة عام.</a:t>
             </a:r>
             <a:endParaRPr lang="en-US" dirty="0"/>
           </a:p>
@@ -1305,7 +1305,7 @@
           <a:p>
             <a:r>
               <a:rPr lang="en-US" dirty="0"/>
-              <a:t>Regulators push the market toward us every quarter: every ratio raise or new control means more establishments needing continuous monitoring they don't have.</a:t>
+              <a:t>الجهات التنظيمية تدفع السوق نحونا كل ربع سنة: كل رفعٍ لنسبة توطين أو اشتراطٍ تنظيمي جديد يعني منشآت أكثر تحتاج متابعةً مستمرة لا تتوفر لها اليوم.</a:t>
             </a:r>
             <a:endParaRPr lang="en-US" dirty="0"/>
           </a:p>
@@ -1393,7 +1393,7 @@
           <a:p>
             <a:r>
               <a:rPr lang="en-US" dirty="0"/>
-              <a:t>No inflated SOM: year-one success is measured in dozens of paying, satisfied customers — everything scales from there.</a:t>
+              <a:t>لن أعرض حصة سوقية مستهدفة مبالغًا فيها. نجاح السنة الأولى يقاس بعشرات العملاء المدفوعين الراضين — ومن هناك يتوسع كل شيء.</a:t>
             </a:r>
             <a:endParaRPr lang="en-US" dirty="0"/>
           </a:p>
@@ -1481,7 +1481,7 @@
           <a:p>
             <a:r>
               <a:rPr lang="en-US" dirty="0"/>
-              <a:t>We complement HRMS/payroll rather than replace them — and they can become a channel later. The compounding advantage: knowledge + execution workflows + a case log that grows with every client.</a:t>
+              <a:t>ميزتنا المركّبة: الخبرة المضمّنة في المنتج + مسارات التنفيذ + سجل الحالات الذي يتراكم مع كل عميل — وهذا ما لا يشتريه منافس متأخر بسرعة.</a:t>
             </a:r>
             <a:endParaRPr lang="en-US" dirty="0"/>
           </a:p>
@@ -1921,7 +1921,7 @@
         </p:nvSpPr>
         <p:spPr>
           <a:xfrm>
-            <a:off x="548640" y="1691640"/>
+            <a:off x="548640" y="1645920"/>
             <a:ext cx="11091672" cy="868680"/>
           </a:xfrm>
           <a:prstGeom prst="rect">
@@ -1938,7 +1938,7 @@
               <a:buNone/>
             </a:pPr>
             <a:r>
-              <a:rPr lang="en-US" sz="4800" b="1" dirty="0">
+              <a:rPr lang="en-US" sz="4600" b="1" dirty="0">
                 <a:solidFill>
                   <a:srgbClr val="FFFFFF"/>
                 </a:solidFill>
@@ -1946,9 +1946,9 @@
                 <a:ea typeface="Arial" pitchFamily="34" charset="-122"/>
                 <a:cs typeface="Arial" pitchFamily="34" charset="-120"/>
               </a:rPr>
-              <a:t>وكلاء الامتثال الذكية</a:t>
-            </a:r>
-            <a:endParaRPr lang="en-US" sz="4800" dirty="0"/>
+              <a:t>وكلاء الامتثال الأذكياء</a:t>
+            </a:r>
+            <a:endParaRPr lang="en-US" sz="4600" dirty="0"/>
           </a:p>
         </p:txBody>
       </p:sp>
@@ -1960,7 +1960,7 @@
         </p:nvSpPr>
         <p:spPr>
           <a:xfrm>
-            <a:off x="548640" y="2606040"/>
+            <a:off x="548640" y="2560320"/>
             <a:ext cx="11091672" cy="457200"/>
           </a:xfrm>
           <a:prstGeom prst="rect">
@@ -1977,7 +1977,7 @@
               <a:buNone/>
             </a:pPr>
             <a:r>
-              <a:rPr lang="en-US" sz="2200" b="1" dirty="0">
+              <a:rPr lang="en-US" sz="2100" b="1" dirty="0">
                 <a:solidFill>
                   <a:srgbClr val="10B981"/>
                 </a:solidFill>
@@ -1987,7 +1987,7 @@
               </a:rPr>
               <a:t>AI Compliance Agents · Business Partner</a:t>
             </a:r>
-            <a:endParaRPr lang="en-US" sz="2200" dirty="0"/>
+            <a:endParaRPr lang="en-US" sz="2100" dirty="0"/>
           </a:p>
         </p:txBody>
       </p:sp>
@@ -1999,7 +1999,7 @@
         </p:nvSpPr>
         <p:spPr>
           <a:xfrm>
-            <a:off x="548640" y="3383280"/>
+            <a:off x="548640" y="3337560"/>
             <a:ext cx="11091672" cy="502920"/>
           </a:xfrm>
           <a:prstGeom prst="rect">
@@ -2027,7 +2027,7 @@
                 <a:ea typeface="Arial" pitchFamily="34" charset="-122"/>
                 <a:cs typeface="Arial" pitchFamily="34" charset="-120"/>
               </a:rPr>
-              <a:t>فريق امتثالك الحكومي… كبرمجيات. يراقب، يجهّز، وينفّذ باعتمادك — عبر واتساب.</a:t>
+              <a:t>فريق امتثال حكومي كامل داخل واتساب: يراقب ويجهّز وينفّذ — بضغطة اعتماد منك.</a:t>
             </a:r>
             <a:endParaRPr lang="en-US" sz="1900" dirty="0"/>
           </a:p>
@@ -2041,7 +2041,7 @@
         </p:nvSpPr>
         <p:spPr>
           <a:xfrm>
-            <a:off x="548640" y="3931920"/>
+            <a:off x="548640" y="3886200"/>
             <a:ext cx="11091672" cy="365760"/>
           </a:xfrm>
           <a:prstGeom prst="rect">
@@ -2058,7 +2058,7 @@
               <a:buNone/>
             </a:pPr>
             <a:r>
-              <a:rPr lang="en-US" sz="1300" i="1" dirty="0">
+              <a:rPr lang="en-US" sz="1250" i="1" dirty="0">
                 <a:solidFill>
                   <a:srgbClr val="AEC0D6"/>
                 </a:solidFill>
@@ -2066,9 +2066,9 @@
                 <a:ea typeface="Arial" pitchFamily="34" charset="-122"/>
                 <a:cs typeface="Arial" pitchFamily="34" charset="-120"/>
               </a:rPr>
-              <a:t>Your government-compliance team, as software — over WhatsApp.</a:t>
-            </a:r>
-            <a:endParaRPr lang="en-US" sz="1300" dirty="0"/>
+              <a:t>A complete government-compliance team inside WhatsApp — on your approval.</a:t>
+            </a:r>
+            <a:endParaRPr lang="en-US" sz="1250" dirty="0"/>
           </a:p>
         </p:txBody>
       </p:sp>
@@ -2081,7 +2081,7 @@
         <p:spPr>
           <a:xfrm>
             <a:off x="548640" y="4754880"/>
-            <a:ext cx="1664208" cy="548640"/>
+            <a:ext cx="1417320" cy="548640"/>
           </a:xfrm>
           <a:prstGeom prst="roundRect">
             <a:avLst>
@@ -2108,7 +2108,7 @@
         <p:spPr>
           <a:xfrm>
             <a:off x="548640" y="4754880"/>
-            <a:ext cx="1664208" cy="548640"/>
+            <a:ext cx="1417320" cy="548640"/>
           </a:xfrm>
           <a:prstGeom prst="rect">
             <a:avLst/>
@@ -2124,7 +2124,7 @@
               <a:buNone/>
             </a:pPr>
             <a:r>
-              <a:rPr lang="en-US" sz="1400" b="1" dirty="0">
+              <a:rPr lang="en-US" sz="1300" b="1" dirty="0">
                 <a:solidFill>
                   <a:srgbClr val="D5DEEA"/>
                 </a:solidFill>
@@ -2134,7 +2134,7 @@
               </a:rPr>
               <a:t>قوى</a:t>
             </a:r>
-            <a:endParaRPr lang="en-US" sz="1400" dirty="0"/>
+            <a:endParaRPr lang="en-US" sz="1300" dirty="0"/>
           </a:p>
         </p:txBody>
       </p:sp>
@@ -2146,8 +2146,8 @@
         </p:nvSpPr>
         <p:spPr>
           <a:xfrm>
-            <a:off x="2377440" y="4754880"/>
-            <a:ext cx="1664208" cy="548640"/>
+            <a:off x="2130552" y="4754880"/>
+            <a:ext cx="1417320" cy="548640"/>
           </a:xfrm>
           <a:prstGeom prst="roundRect">
             <a:avLst>
@@ -2173,8 +2173,8 @@
         </p:nvSpPr>
         <p:spPr>
           <a:xfrm>
-            <a:off x="2377440" y="4754880"/>
-            <a:ext cx="1664208" cy="548640"/>
+            <a:off x="2130552" y="4754880"/>
+            <a:ext cx="1417320" cy="548640"/>
           </a:xfrm>
           <a:prstGeom prst="rect">
             <a:avLst/>
@@ -2190,7 +2190,7 @@
               <a:buNone/>
             </a:pPr>
             <a:r>
-              <a:rPr lang="en-US" sz="1400" b="1" dirty="0">
+              <a:rPr lang="en-US" sz="1300" b="1" dirty="0">
                 <a:solidFill>
                   <a:srgbClr val="D5DEEA"/>
                 </a:solidFill>
@@ -2200,7 +2200,7 @@
               </a:rPr>
               <a:t>مقيم</a:t>
             </a:r>
-            <a:endParaRPr lang="en-US" sz="1400" dirty="0"/>
+            <a:endParaRPr lang="en-US" sz="1300" dirty="0"/>
           </a:p>
         </p:txBody>
       </p:sp>
@@ -2212,8 +2212,8 @@
         </p:nvSpPr>
         <p:spPr>
           <a:xfrm>
-            <a:off x="4206240" y="4754880"/>
-            <a:ext cx="1664208" cy="548640"/>
+            <a:off x="3712464" y="4754880"/>
+            <a:ext cx="2377440" cy="548640"/>
           </a:xfrm>
           <a:prstGeom prst="roundRect">
             <a:avLst>
@@ -2239,8 +2239,8 @@
         </p:nvSpPr>
         <p:spPr>
           <a:xfrm>
-            <a:off x="4206240" y="4754880"/>
-            <a:ext cx="1664208" cy="548640"/>
+            <a:off x="3712464" y="4754880"/>
+            <a:ext cx="2377440" cy="548640"/>
           </a:xfrm>
           <a:prstGeom prst="rect">
             <a:avLst/>
@@ -2256,7 +2256,7 @@
               <a:buNone/>
             </a:pPr>
             <a:r>
-              <a:rPr lang="en-US" sz="1400" b="1" dirty="0">
+              <a:rPr lang="en-US" sz="1300" b="1" dirty="0">
                 <a:solidFill>
                   <a:srgbClr val="D5DEEA"/>
                 </a:solidFill>
@@ -2264,9 +2264,9 @@
                 <a:ea typeface="Arial" pitchFamily="34" charset="-122"/>
                 <a:cs typeface="Arial" pitchFamily="34" charset="-120"/>
               </a:rPr>
-              <a:t>التأمينات</a:t>
-            </a:r>
-            <a:endParaRPr lang="en-US" sz="1400" dirty="0"/>
+              <a:t>التأمينات الاجتماعية</a:t>
+            </a:r>
+            <a:endParaRPr lang="en-US" sz="1300" dirty="0"/>
           </a:p>
         </p:txBody>
       </p:sp>
@@ -2278,8 +2278,8 @@
         </p:nvSpPr>
         <p:spPr>
           <a:xfrm>
-            <a:off x="6035040" y="4754880"/>
-            <a:ext cx="1664208" cy="548640"/>
+            <a:off x="6254496" y="4754880"/>
+            <a:ext cx="1417320" cy="548640"/>
           </a:xfrm>
           <a:prstGeom prst="roundRect">
             <a:avLst>
@@ -2305,8 +2305,8 @@
         </p:nvSpPr>
         <p:spPr>
           <a:xfrm>
-            <a:off x="6035040" y="4754880"/>
-            <a:ext cx="1664208" cy="548640"/>
+            <a:off x="6254496" y="4754880"/>
+            <a:ext cx="1417320" cy="548640"/>
           </a:xfrm>
           <a:prstGeom prst="rect">
             <a:avLst/>
@@ -2322,7 +2322,7 @@
               <a:buNone/>
             </a:pPr>
             <a:r>
-              <a:rPr lang="en-US" sz="1400" b="1" dirty="0">
+              <a:rPr lang="en-US" sz="1300" b="1" dirty="0">
                 <a:solidFill>
                   <a:srgbClr val="D5DEEA"/>
                 </a:solidFill>
@@ -2332,7 +2332,7 @@
               </a:rPr>
               <a:t>مدد</a:t>
             </a:r>
-            <a:endParaRPr lang="en-US" sz="1400" dirty="0"/>
+            <a:endParaRPr lang="en-US" sz="1300" dirty="0"/>
           </a:p>
         </p:txBody>
       </p:sp>
@@ -2344,8 +2344,8 @@
         </p:nvSpPr>
         <p:spPr>
           <a:xfrm>
-            <a:off x="7863840" y="4754880"/>
-            <a:ext cx="1664208" cy="548640"/>
+            <a:off x="7836408" y="4754880"/>
+            <a:ext cx="1417320" cy="548640"/>
           </a:xfrm>
           <a:prstGeom prst="roundRect">
             <a:avLst>
@@ -2371,8 +2371,8 @@
         </p:nvSpPr>
         <p:spPr>
           <a:xfrm>
-            <a:off x="7863840" y="4754880"/>
-            <a:ext cx="1664208" cy="548640"/>
+            <a:off x="7836408" y="4754880"/>
+            <a:ext cx="1417320" cy="548640"/>
           </a:xfrm>
           <a:prstGeom prst="rect">
             <a:avLst/>
@@ -2388,7 +2388,7 @@
               <a:buNone/>
             </a:pPr>
             <a:r>
-              <a:rPr lang="en-US" sz="1400" b="1" dirty="0">
+              <a:rPr lang="en-US" sz="1300" b="1" dirty="0">
                 <a:solidFill>
                   <a:srgbClr val="D5DEEA"/>
                 </a:solidFill>
@@ -2398,7 +2398,7 @@
               </a:rPr>
               <a:t>أجير</a:t>
             </a:r>
-            <a:endParaRPr lang="en-US" sz="1400" dirty="0"/>
+            <a:endParaRPr lang="en-US" sz="1300" dirty="0"/>
           </a:p>
         </p:txBody>
       </p:sp>
@@ -2410,8 +2410,8 @@
         </p:nvSpPr>
         <p:spPr>
           <a:xfrm>
-            <a:off x="9692640" y="4754880"/>
-            <a:ext cx="1664208" cy="548640"/>
+            <a:off x="9418320" y="4754880"/>
+            <a:ext cx="1554480" cy="548640"/>
           </a:xfrm>
           <a:prstGeom prst="roundRect">
             <a:avLst>
@@ -2437,8 +2437,8 @@
         </p:nvSpPr>
         <p:spPr>
           <a:xfrm>
-            <a:off x="9692640" y="4754880"/>
-            <a:ext cx="1664208" cy="548640"/>
+            <a:off x="9418320" y="4754880"/>
+            <a:ext cx="1554480" cy="548640"/>
           </a:xfrm>
           <a:prstGeom prst="rect">
             <a:avLst/>
@@ -2454,7 +2454,7 @@
               <a:buNone/>
             </a:pPr>
             <a:r>
-              <a:rPr lang="en-US" sz="1400" b="1" dirty="0">
+              <a:rPr lang="en-US" sz="1300" b="1" dirty="0">
                 <a:solidFill>
                   <a:srgbClr val="D5DEEA"/>
                 </a:solidFill>
@@ -2464,7 +2464,7 @@
               </a:rPr>
               <a:t>نطاقات</a:t>
             </a:r>
-            <a:endParaRPr lang="en-US" sz="1400" dirty="0"/>
+            <a:endParaRPr lang="en-US" sz="1300" dirty="0"/>
           </a:p>
         </p:txBody>
       </p:sp>
@@ -2623,7 +2623,7 @@
               <a:buNone/>
             </a:pPr>
             <a:r>
-              <a:rPr lang="en-US" sz="3000" b="1" dirty="0">
+              <a:rPr lang="en-US" sz="2900" b="1" dirty="0">
                 <a:solidFill>
                   <a:srgbClr val="1E293B"/>
                 </a:solidFill>
@@ -2631,9 +2631,9 @@
                 <a:ea typeface="Arial" pitchFamily="34" charset="-122"/>
                 <a:cs typeface="Arial" pitchFamily="34" charset="-120"/>
               </a:rPr>
-              <a:t>اشتراك شهري — بجزءٍ من كلفة موظف واحد</a:t>
-            </a:r>
-            <a:endParaRPr lang="en-US" sz="3000" dirty="0"/>
+              <a:t>اشتراك شهري بعُشر كلفة موظف امتثال واحد</a:t>
+            </a:r>
+            <a:endParaRPr lang="en-US" sz="2900" dirty="0"/>
           </a:p>
         </p:txBody>
       </p:sp>
@@ -2662,7 +2662,7 @@
               <a:buNone/>
             </a:pPr>
             <a:r>
-              <a:rPr lang="en-US" sz="1400" dirty="0">
+              <a:rPr lang="en-US" sz="1350" dirty="0">
                 <a:solidFill>
                   <a:srgbClr val="64748B"/>
                 </a:solidFill>
@@ -2670,9 +2670,9 @@
                 <a:ea typeface="Arial" pitchFamily="34" charset="-122"/>
                 <a:cs typeface="Arial" pitchFamily="34" charset="-120"/>
               </a:rPr>
-              <a:t>A monthly subscription, at a fraction of one hire</a:t>
-            </a:r>
-            <a:endParaRPr lang="en-US" sz="1400" dirty="0"/>
+              <a:t>A monthly subscription at one-tenth the cost of a single hire</a:t>
+            </a:r>
+            <a:endParaRPr lang="en-US" sz="1350" dirty="0"/>
           </a:p>
         </p:txBody>
       </p:sp>
@@ -2685,11 +2685,11 @@
         <p:spPr>
           <a:xfrm>
             <a:off x="548640" y="2286000"/>
-            <a:ext cx="2560320" cy="2148840"/>
+            <a:ext cx="2560320" cy="2194560"/>
           </a:xfrm>
           <a:prstGeom prst="roundRect">
             <a:avLst>
-              <a:gd name="adj" fmla="val 3830"/>
+              <a:gd name="adj" fmla="val 3750"/>
             </a:avLst>
           </a:prstGeom>
           <a:solidFill>
@@ -2718,7 +2718,7 @@
         </p:nvSpPr>
         <p:spPr>
           <a:xfrm>
-            <a:off x="731520" y="2468880"/>
+            <a:off x="731520" y="2450592"/>
             <a:ext cx="2194560" cy="502920"/>
           </a:xfrm>
           <a:prstGeom prst="rect">
@@ -2731,11 +2731,11 @@
           <a:bodyPr wrap="square" lIns="0" tIns="0" rIns="0" bIns="0" rtlCol="0" anchor="ctr"/>
           <a:lstStyle/>
           <a:p>
-            <a:pPr algn="l" indent="0" marL="0">
-              <a:buNone/>
-            </a:pPr>
-            <a:r>
-              <a:rPr lang="en-US" sz="2600" b="1" dirty="0">
+            <a:pPr rtl="1" algn="l" indent="0" marL="0">
+              <a:buNone/>
+            </a:pPr>
+            <a:r>
+              <a:rPr lang="en-US" sz="2300" b="1" dirty="0">
                 <a:solidFill>
                   <a:srgbClr val="0066CC"/>
                 </a:solidFill>
@@ -2743,9 +2743,9 @@
                 <a:ea typeface="Arial" pitchFamily="34" charset="-122"/>
                 <a:cs typeface="Arial" pitchFamily="34" charset="-120"/>
               </a:rPr>
-              <a:t>249 ﷼</a:t>
-            </a:r>
-            <a:endParaRPr lang="en-US" sz="2600" dirty="0"/>
+              <a:t>249 ريالًا</a:t>
+            </a:r>
+            <a:endParaRPr lang="en-US" sz="2300" dirty="0"/>
           </a:p>
         </p:txBody>
       </p:sp>
@@ -2757,7 +2757,7 @@
         </p:nvSpPr>
         <p:spPr>
           <a:xfrm>
-            <a:off x="731520" y="3035808"/>
+            <a:off x="731520" y="2999232"/>
             <a:ext cx="2194560" cy="365760"/>
           </a:xfrm>
           <a:prstGeom prst="rect">
@@ -2777,7 +2777,7 @@
               <a:buNone/>
             </a:pPr>
             <a:r>
-              <a:rPr lang="en-US" sz="1350" b="1" dirty="0">
+              <a:rPr lang="en-US" sz="1300" b="1" dirty="0">
                 <a:solidFill>
                   <a:srgbClr val="1E293B"/>
                 </a:solidFill>
@@ -2787,7 +2787,7 @@
               </a:rPr>
               <a:t>حتى 5 موظفين</a:t>
             </a:r>
-            <a:endParaRPr lang="en-US" sz="1350" dirty="0"/>
+            <a:endParaRPr lang="en-US" sz="1300" dirty="0"/>
           </a:p>
         </p:txBody>
       </p:sp>
@@ -2799,8 +2799,8 @@
         </p:nvSpPr>
         <p:spPr>
           <a:xfrm>
-            <a:off x="731520" y="3456432"/>
-            <a:ext cx="2194560" cy="868680"/>
+            <a:off x="731520" y="3401568"/>
+            <a:ext cx="2194560" cy="914400"/>
           </a:xfrm>
           <a:prstGeom prst="rect">
             <a:avLst/>
@@ -2827,7 +2827,7 @@
                 <a:ea typeface="Arial" pitchFamily="34" charset="-122"/>
                 <a:cs typeface="Arial" pitchFamily="34" charset="-120"/>
               </a:rPr>
-              <a:t>مراقبة + تنبيهات</a:t>
+              <a:t>مراقبة وتنبيهات.</a:t>
             </a:r>
             <a:endParaRPr lang="en-US" sz="1150" dirty="0"/>
           </a:p>
@@ -2842,11 +2842,11 @@
         <p:spPr>
           <a:xfrm>
             <a:off x="3291840" y="2286000"/>
-            <a:ext cx="2560320" cy="2148840"/>
+            <a:ext cx="2560320" cy="2194560"/>
           </a:xfrm>
           <a:prstGeom prst="roundRect">
             <a:avLst>
-              <a:gd name="adj" fmla="val 3830"/>
+              <a:gd name="adj" fmla="val 3750"/>
             </a:avLst>
           </a:prstGeom>
           <a:solidFill>
@@ -2875,7 +2875,7 @@
         </p:nvSpPr>
         <p:spPr>
           <a:xfrm>
-            <a:off x="3474720" y="2468880"/>
+            <a:off x="3474720" y="2450592"/>
             <a:ext cx="2194560" cy="502920"/>
           </a:xfrm>
           <a:prstGeom prst="rect">
@@ -2888,11 +2888,11 @@
           <a:bodyPr wrap="square" lIns="0" tIns="0" rIns="0" bIns="0" rtlCol="0" anchor="ctr"/>
           <a:lstStyle/>
           <a:p>
-            <a:pPr algn="l" indent="0" marL="0">
-              <a:buNone/>
-            </a:pPr>
-            <a:r>
-              <a:rPr lang="en-US" sz="2600" b="1" dirty="0">
+            <a:pPr rtl="1" algn="l" indent="0" marL="0">
+              <a:buNone/>
+            </a:pPr>
+            <a:r>
+              <a:rPr lang="en-US" sz="2300" b="1" dirty="0">
                 <a:solidFill>
                   <a:srgbClr val="0066CC"/>
                 </a:solidFill>
@@ -2900,9 +2900,9 @@
                 <a:ea typeface="Arial" pitchFamily="34" charset="-122"/>
                 <a:cs typeface="Arial" pitchFamily="34" charset="-120"/>
               </a:rPr>
-              <a:t>599 ﷼</a:t>
-            </a:r>
-            <a:endParaRPr lang="en-US" sz="2600" dirty="0"/>
+              <a:t>599 ريالًا</a:t>
+            </a:r>
+            <a:endParaRPr lang="en-US" sz="2300" dirty="0"/>
           </a:p>
         </p:txBody>
       </p:sp>
@@ -2914,7 +2914,7 @@
         </p:nvSpPr>
         <p:spPr>
           <a:xfrm>
-            <a:off x="3474720" y="3035808"/>
+            <a:off x="3474720" y="2999232"/>
             <a:ext cx="2194560" cy="365760"/>
           </a:xfrm>
           <a:prstGeom prst="rect">
@@ -2934,7 +2934,7 @@
               <a:buNone/>
             </a:pPr>
             <a:r>
-              <a:rPr lang="en-US" sz="1350" b="1" dirty="0">
+              <a:rPr lang="en-US" sz="1300" b="1" dirty="0">
                 <a:solidFill>
                   <a:srgbClr val="1E293B"/>
                 </a:solidFill>
@@ -2942,9 +2942,9 @@
                 <a:ea typeface="Arial" pitchFamily="34" charset="-122"/>
                 <a:cs typeface="Arial" pitchFamily="34" charset="-120"/>
               </a:rPr>
-              <a:t>6–49 موظفًا</a:t>
-            </a:r>
-            <a:endParaRPr lang="en-US" sz="1350" dirty="0"/>
+              <a:t>من 6 إلى 49 موظفًا</a:t>
+            </a:r>
+            <a:endParaRPr lang="en-US" sz="1300" dirty="0"/>
           </a:p>
         </p:txBody>
       </p:sp>
@@ -2956,8 +2956,8 @@
         </p:nvSpPr>
         <p:spPr>
           <a:xfrm>
-            <a:off x="3474720" y="3456432"/>
-            <a:ext cx="2194560" cy="868680"/>
+            <a:off x="3474720" y="3401568"/>
+            <a:ext cx="2194560" cy="914400"/>
           </a:xfrm>
           <a:prstGeom prst="rect">
             <a:avLst/>
@@ -2984,7 +2984,7 @@
                 <a:ea typeface="Arial" pitchFamily="34" charset="-122"/>
                 <a:cs typeface="Arial" pitchFamily="34" charset="-120"/>
               </a:rPr>
-              <a:t>+ تجهيز الإجراءات + تقرير شهري</a:t>
+              <a:t>مع تجهيز الإجراءات وتقرير شهري.</a:t>
             </a:r>
             <a:endParaRPr lang="en-US" sz="1150" dirty="0"/>
           </a:p>
@@ -2999,11 +2999,11 @@
         <p:spPr>
           <a:xfrm>
             <a:off x="6035040" y="2286000"/>
-            <a:ext cx="2560320" cy="2148840"/>
+            <a:ext cx="2560320" cy="2194560"/>
           </a:xfrm>
           <a:prstGeom prst="roundRect">
             <a:avLst>
-              <a:gd name="adj" fmla="val 3830"/>
+              <a:gd name="adj" fmla="val 3750"/>
             </a:avLst>
           </a:prstGeom>
           <a:solidFill>
@@ -3032,7 +3032,7 @@
         </p:nvSpPr>
         <p:spPr>
           <a:xfrm>
-            <a:off x="6217920" y="2468880"/>
+            <a:off x="6217920" y="2450592"/>
             <a:ext cx="2194560" cy="502920"/>
           </a:xfrm>
           <a:prstGeom prst="rect">
@@ -3045,11 +3045,11 @@
           <a:bodyPr wrap="square" lIns="0" tIns="0" rIns="0" bIns="0" rtlCol="0" anchor="ctr"/>
           <a:lstStyle/>
           <a:p>
-            <a:pPr algn="l" indent="0" marL="0">
-              <a:buNone/>
-            </a:pPr>
-            <a:r>
-              <a:rPr lang="en-US" sz="2600" b="1" dirty="0">
+            <a:pPr rtl="1" algn="l" indent="0" marL="0">
+              <a:buNone/>
+            </a:pPr>
+            <a:r>
+              <a:rPr lang="en-US" sz="2300" b="1" dirty="0">
                 <a:solidFill>
                   <a:srgbClr val="10B981"/>
                 </a:solidFill>
@@ -3057,9 +3057,9 @@
                 <a:ea typeface="Arial" pitchFamily="34" charset="-122"/>
                 <a:cs typeface="Arial" pitchFamily="34" charset="-120"/>
               </a:rPr>
-              <a:t>1,499 ﷼</a:t>
-            </a:r>
-            <a:endParaRPr lang="en-US" sz="2600" dirty="0"/>
+              <a:t>1,499 ريالًا</a:t>
+            </a:r>
+            <a:endParaRPr lang="en-US" sz="2300" dirty="0"/>
           </a:p>
         </p:txBody>
       </p:sp>
@@ -3071,7 +3071,7 @@
         </p:nvSpPr>
         <p:spPr>
           <a:xfrm>
-            <a:off x="6217920" y="3035808"/>
+            <a:off x="6217920" y="2999232"/>
             <a:ext cx="2194560" cy="365760"/>
           </a:xfrm>
           <a:prstGeom prst="rect">
@@ -3091,7 +3091,7 @@
               <a:buNone/>
             </a:pPr>
             <a:r>
-              <a:rPr lang="en-US" sz="1350" b="1" dirty="0">
+              <a:rPr lang="en-US" sz="1300" b="1" dirty="0">
                 <a:solidFill>
                   <a:srgbClr val="FFFFFF"/>
                 </a:solidFill>
@@ -3099,9 +3099,9 @@
                 <a:ea typeface="Arial" pitchFamily="34" charset="-122"/>
                 <a:cs typeface="Arial" pitchFamily="34" charset="-120"/>
               </a:rPr>
-              <a:t>50–249 موظفًا</a:t>
-            </a:r>
-            <a:endParaRPr lang="en-US" sz="1350" dirty="0"/>
+              <a:t>من 50 إلى 249 موظفًا</a:t>
+            </a:r>
+            <a:endParaRPr lang="en-US" sz="1300" dirty="0"/>
           </a:p>
         </p:txBody>
       </p:sp>
@@ -3113,8 +3113,8 @@
         </p:nvSpPr>
         <p:spPr>
           <a:xfrm>
-            <a:off x="6217920" y="3456432"/>
-            <a:ext cx="2194560" cy="868680"/>
+            <a:off x="6217920" y="3401568"/>
+            <a:ext cx="2194560" cy="914400"/>
           </a:xfrm>
           <a:prstGeom prst="rect">
             <a:avLst/>
@@ -3141,7 +3141,7 @@
                 <a:ea typeface="Arial" pitchFamily="34" charset="-122"/>
                 <a:cs typeface="Arial" pitchFamily="34" charset="-120"/>
               </a:rPr>
-              <a:t>+ توطين متعدد المهن + أولوية تنفيذ</a:t>
+              <a:t>مع متابعة التوطين متعدد المهن وأولوية التنفيذ.</a:t>
             </a:r>
             <a:endParaRPr lang="en-US" sz="1150" dirty="0"/>
           </a:p>
@@ -3156,11 +3156,11 @@
         <p:spPr>
           <a:xfrm>
             <a:off x="8961120" y="2286000"/>
-            <a:ext cx="2679192" cy="2148840"/>
+            <a:ext cx="2679192" cy="2194560"/>
           </a:xfrm>
           <a:prstGeom prst="roundRect">
             <a:avLst>
-              <a:gd name="adj" fmla="val 3830"/>
+              <a:gd name="adj" fmla="val 3750"/>
             </a:avLst>
           </a:prstGeom>
           <a:solidFill>
@@ -3189,8 +3189,8 @@
         </p:nvSpPr>
         <p:spPr>
           <a:xfrm>
-            <a:off x="9144000" y="2423160"/>
-            <a:ext cx="2286000" cy="365760"/>
+            <a:off x="9125712" y="2423160"/>
+            <a:ext cx="2377440" cy="365760"/>
           </a:xfrm>
           <a:prstGeom prst="rect">
             <a:avLst/>
@@ -3231,12 +3231,12 @@
         </p:nvSpPr>
         <p:spPr>
           <a:xfrm>
-            <a:off x="9235440" y="3977640"/>
-            <a:ext cx="777240" cy="292608"/>
+            <a:off x="9235440" y="4041648"/>
+            <a:ext cx="777240" cy="274320"/>
           </a:xfrm>
           <a:prstGeom prst="roundRect">
             <a:avLst>
-              <a:gd name="adj" fmla="val 15625"/>
+              <a:gd name="adj" fmla="val 16667"/>
             </a:avLst>
           </a:prstGeom>
           <a:solidFill>
@@ -3253,7 +3253,7 @@
         </p:nvSpPr>
         <p:spPr>
           <a:xfrm>
-            <a:off x="10241280" y="2880360"/>
+            <a:off x="10241280" y="2926080"/>
             <a:ext cx="777240" cy="1389888"/>
           </a:xfrm>
           <a:prstGeom prst="roundRect">
@@ -3275,7 +3275,7 @@
         </p:nvSpPr>
         <p:spPr>
           <a:xfrm>
-            <a:off x="9235440" y="3657600"/>
+            <a:off x="9235440" y="3730752"/>
             <a:ext cx="822960" cy="274320"/>
           </a:xfrm>
           <a:prstGeom prst="rect">
@@ -3314,7 +3314,7 @@
         </p:nvSpPr>
         <p:spPr>
           <a:xfrm>
-            <a:off x="10195560" y="2606040"/>
+            <a:off x="10195560" y="2651760"/>
             <a:ext cx="914400" cy="274320"/>
           </a:xfrm>
           <a:prstGeom prst="rect">
@@ -3353,8 +3353,8 @@
         </p:nvSpPr>
         <p:spPr>
           <a:xfrm>
-            <a:off x="9144000" y="4315968"/>
-            <a:ext cx="2286000" cy="320040"/>
+            <a:off x="9125712" y="4370832"/>
+            <a:ext cx="2377440" cy="320040"/>
           </a:xfrm>
           <a:prstGeom prst="rect">
             <a:avLst/>
@@ -3373,17 +3373,17 @@
               <a:buNone/>
             </a:pPr>
             <a:r>
-              <a:rPr lang="en-US" sz="1100" b="1" dirty="0">
-                <a:solidFill>
-                  <a:srgbClr val="10B981"/>
-                </a:solidFill>
-                <a:latin typeface="Arial" pitchFamily="34" charset="0"/>
-                <a:ea typeface="Arial" pitchFamily="34" charset="-122"/>
-                <a:cs typeface="Arial" pitchFamily="34" charset="-120"/>
-              </a:rPr>
-              <a:t>≈ عُشر الكلفة</a:t>
-            </a:r>
-            <a:endParaRPr lang="en-US" sz="1100" dirty="0"/>
+              <a:rPr lang="en-US" sz="1150" b="1" dirty="0">
+                <a:solidFill>
+                  <a:srgbClr val="065F46"/>
+                </a:solidFill>
+                <a:latin typeface="Arial" pitchFamily="34" charset="0"/>
+                <a:ea typeface="Arial" pitchFamily="34" charset="-122"/>
+                <a:cs typeface="Arial" pitchFamily="34" charset="-120"/>
+              </a:rPr>
+              <a:t>≈ العُشر</a:t>
+            </a:r>
+            <a:endParaRPr lang="en-US" sz="1150" dirty="0"/>
           </a:p>
         </p:txBody>
       </p:sp>
@@ -3395,7 +3395,7 @@
         </p:nvSpPr>
         <p:spPr>
           <a:xfrm>
-            <a:off x="548640" y="4709160"/>
+            <a:off x="548640" y="4754880"/>
             <a:ext cx="11091672" cy="1051560"/>
           </a:xfrm>
           <a:prstGeom prst="roundRect">
@@ -3429,7 +3429,7 @@
         </p:nvSpPr>
         <p:spPr>
           <a:xfrm>
-            <a:off x="868680" y="4864608"/>
+            <a:off x="868680" y="4892040"/>
             <a:ext cx="10424160" cy="411480"/>
           </a:xfrm>
           <a:prstGeom prst="rect">
@@ -3449,7 +3449,7 @@
               <a:buNone/>
             </a:pPr>
             <a:r>
-              <a:rPr lang="en-US" sz="1300" dirty="0">
+              <a:rPr lang="en-US" sz="1200" dirty="0">
                 <a:solidFill>
                   <a:srgbClr val="334155"/>
                 </a:solidFill>
@@ -3457,9 +3457,9 @@
                 <a:ea typeface="Arial" pitchFamily="34" charset="-122"/>
                 <a:cs typeface="Arial" pitchFamily="34" charset="-120"/>
               </a:rPr>
-              <a:t>+ رسوم تهيئة لمرة واحدة · تنفيذ مُدار للمعاملات الكبيرة · التوسع = منصات إضافية لنفس العميل.</a:t>
-            </a:r>
-            <a:endParaRPr lang="en-US" sz="1300" dirty="0"/>
+              <a:t>+ رسوم تهيئة لمرة واحدة · تنفيذ مُدار للمعاملات الكبيرة · باقة مؤسسية بعلامة الشريك التجارية (White Label) لمكاتب الخدمات والمجموعات.</a:t>
+            </a:r>
+            <a:endParaRPr lang="en-US" sz="1200" dirty="0"/>
           </a:p>
         </p:txBody>
       </p:sp>
@@ -3471,7 +3471,7 @@
         </p:nvSpPr>
         <p:spPr>
           <a:xfrm>
-            <a:off x="868680" y="5285232"/>
+            <a:off x="868680" y="5349240"/>
             <a:ext cx="10424160" cy="365760"/>
           </a:xfrm>
           <a:prstGeom prst="rect">
@@ -3499,7 +3499,7 @@
                 <a:ea typeface="Arial" pitchFamily="34" charset="-122"/>
                 <a:cs typeface="Arial" pitchFamily="34" charset="-120"/>
               </a:rPr>
-              <a:t>⚠ الأسعار فرضيات اختبار — تُقفل بعد قياس تكلفة خدمة العميل في الـ Pilot.</a:t>
+              <a:t>الأسعار تجريبية — تُثبَّت بعد قياس التكلفة الفعلية لخدمة العميل في المرحلة التجريبية.</a:t>
             </a:r>
             <a:endParaRPr lang="en-US" sz="1150" dirty="0"/>
           </a:p>
@@ -3668,7 +3668,7 @@
                 <a:ea typeface="Arial" pitchFamily="34" charset="-122"/>
                 <a:cs typeface="Arial" pitchFamily="34" charset="-120"/>
               </a:rPr>
-              <a:t>TRACTION &amp; VALIDATION · الإنجاز وخطة التحقق</a:t>
+              <a:t>TRACTION &amp; VALIDATION · الإنجاز وخطة الإثبات</a:t>
             </a:r>
             <a:endParaRPr lang="en-US" sz="1100" dirty="0"/>
           </a:p>
@@ -3699,7 +3699,7 @@
               <a:buNone/>
             </a:pPr>
             <a:r>
-              <a:rPr lang="en-US" sz="3000" b="1" dirty="0">
+              <a:rPr lang="en-US" sz="2900" b="1" dirty="0">
                 <a:solidFill>
                   <a:srgbClr val="1E293B"/>
                 </a:solidFill>
@@ -3707,9 +3707,9 @@
                 <a:ea typeface="Arial" pitchFamily="34" charset="-122"/>
                 <a:cs typeface="Arial" pitchFamily="34" charset="-120"/>
               </a:rPr>
-              <a:t>نظامٌ يعمل — والحاضنة تثبت موثوقيته</a:t>
-            </a:r>
-            <a:endParaRPr lang="en-US" sz="3000" dirty="0"/>
+              <a:t>بنينا نظامًا يعمل — وفي Ittica نثبت موثوقيته على منشآت حقيقية</a:t>
+            </a:r>
+            <a:endParaRPr lang="en-US" sz="2900" dirty="0"/>
           </a:p>
         </p:txBody>
       </p:sp>
@@ -3738,7 +3738,7 @@
               <a:buNone/>
             </a:pPr>
             <a:r>
-              <a:rPr lang="en-US" sz="1400" dirty="0">
+              <a:rPr lang="en-US" sz="1350" dirty="0">
                 <a:solidFill>
                   <a:srgbClr val="64748B"/>
                 </a:solidFill>
@@ -3746,9 +3746,9 @@
                 <a:ea typeface="Arial" pitchFamily="34" charset="-122"/>
                 <a:cs typeface="Arial" pitchFamily="34" charset="-120"/>
               </a:rPr>
-              <a:t>A working system — the incubator proves its reliability</a:t>
-            </a:r>
-            <a:endParaRPr lang="en-US" sz="1400" dirty="0"/>
+              <a:t>We built a working system — in Ittica we prove it on real establishments</a:t>
+            </a:r>
+            <a:endParaRPr lang="en-US" sz="1350" dirty="0"/>
           </a:p>
         </p:txBody>
       </p:sp>
@@ -3760,12 +3760,12 @@
         </p:nvSpPr>
         <p:spPr>
           <a:xfrm>
-            <a:off x="6245352" y="2331720"/>
-            <a:ext cx="5394960" cy="3566160"/>
+            <a:off x="6245352" y="2377440"/>
+            <a:ext cx="5394960" cy="3611880"/>
           </a:xfrm>
           <a:prstGeom prst="roundRect">
             <a:avLst>
-              <a:gd name="adj" fmla="val 2308"/>
+              <a:gd name="adj" fmla="val 2278"/>
             </a:avLst>
           </a:prstGeom>
           <a:solidFill>
@@ -3794,7 +3794,7 @@
         </p:nvSpPr>
         <p:spPr>
           <a:xfrm>
-            <a:off x="6519672" y="2514600"/>
+            <a:off x="6519672" y="2560320"/>
             <a:ext cx="4846320" cy="411480"/>
           </a:xfrm>
           <a:prstGeom prst="rect">
@@ -3814,7 +3814,7 @@
               <a:buNone/>
             </a:pPr>
             <a:r>
-              <a:rPr lang="en-US" sz="1600" b="1" dirty="0">
+              <a:rPr lang="en-US" sz="1550" b="1" dirty="0">
                 <a:solidFill>
                   <a:srgbClr val="065F46"/>
                 </a:solidFill>
@@ -3824,7 +3824,7 @@
               </a:rPr>
               <a:t>مبنيّ اليوم ✓</a:t>
             </a:r>
-            <a:endParaRPr lang="en-US" sz="1600" dirty="0"/>
+            <a:endParaRPr lang="en-US" sz="1550" dirty="0"/>
           </a:p>
         </p:txBody>
       </p:sp>
@@ -3836,7 +3836,7 @@
         </p:nvSpPr>
         <p:spPr>
           <a:xfrm>
-            <a:off x="11183112" y="3090672"/>
+            <a:off x="11183112" y="3136392"/>
             <a:ext cx="118872" cy="118872"/>
           </a:xfrm>
           <a:prstGeom prst="ellipse">
@@ -3856,8 +3856,8 @@
         </p:nvSpPr>
         <p:spPr>
           <a:xfrm>
-            <a:off x="6519672" y="3017520"/>
-            <a:ext cx="4617720" cy="640080"/>
+            <a:off x="6519672" y="3063240"/>
+            <a:ext cx="4617720" cy="685800"/>
           </a:xfrm>
           <a:prstGeom prst="rect">
             <a:avLst/>
@@ -3876,7 +3876,7 @@
               <a:buNone/>
             </a:pPr>
             <a:r>
-              <a:rPr lang="en-US" sz="1250" dirty="0">
+              <a:rPr lang="en-US" sz="1150" dirty="0">
                 <a:solidFill>
                   <a:srgbClr val="064E3B"/>
                 </a:solidFill>
@@ -3884,9 +3884,9 @@
                 <a:ea typeface="Arial" pitchFamily="34" charset="-122"/>
                 <a:cs typeface="Arial" pitchFamily="34" charset="-120"/>
               </a:rPr>
-              <a:t>وكيل مراقبة يومي حيّ (n8n · تقرير 07:00) + وكيل محادثة.</a:t>
-            </a:r>
-            <a:endParaRPr lang="en-US" sz="1250" dirty="0"/>
+              <a:t>وكيل مراقبة يومي قيد التشغيل يصدر تقريره في السابعة صباحًا (على نظام أتمتة سير العمل n8n) + وكيل محادثة.</a:t>
+            </a:r>
+            <a:endParaRPr lang="en-US" sz="1150" dirty="0"/>
           </a:p>
         </p:txBody>
       </p:sp>
@@ -3898,7 +3898,7 @@
         </p:nvSpPr>
         <p:spPr>
           <a:xfrm>
-            <a:off x="11183112" y="3776472"/>
+            <a:off x="11183112" y="3849624"/>
             <a:ext cx="118872" cy="118872"/>
           </a:xfrm>
           <a:prstGeom prst="ellipse">
@@ -3918,8 +3918,8 @@
         </p:nvSpPr>
         <p:spPr>
           <a:xfrm>
-            <a:off x="6519672" y="3703320"/>
-            <a:ext cx="4617720" cy="640080"/>
+            <a:off x="6519672" y="3776472"/>
+            <a:ext cx="4617720" cy="685800"/>
           </a:xfrm>
           <a:prstGeom prst="rect">
             <a:avLst/>
@@ -3938,7 +3938,7 @@
               <a:buNone/>
             </a:pPr>
             <a:r>
-              <a:rPr lang="en-US" sz="1250" dirty="0">
+              <a:rPr lang="en-US" sz="1150" dirty="0">
                 <a:solidFill>
                   <a:srgbClr val="064E3B"/>
                 </a:solidFill>
@@ -3946,9 +3946,9 @@
                 <a:ea typeface="Arial" pitchFamily="34" charset="-122"/>
                 <a:cs typeface="Arial" pitchFamily="34" charset="-120"/>
               </a:rPr>
-              <a:t>سجل امتثال + سجل تدقيق + بوابة موافقات في Notion.</a:t>
-            </a:r>
-            <a:endParaRPr lang="en-US" sz="1250" dirty="0"/>
+              <a:t>سجل امتثال وسجل تدقيق وبوابة موافقات على منصة إدارة العمل (Notion).</a:t>
+            </a:r>
+            <a:endParaRPr lang="en-US" sz="1150" dirty="0"/>
           </a:p>
         </p:txBody>
       </p:sp>
@@ -3960,7 +3960,7 @@
         </p:nvSpPr>
         <p:spPr>
           <a:xfrm>
-            <a:off x="11183112" y="4462272"/>
+            <a:off x="11183112" y="4562856"/>
             <a:ext cx="118872" cy="118872"/>
           </a:xfrm>
           <a:prstGeom prst="ellipse">
@@ -3980,8 +3980,8 @@
         </p:nvSpPr>
         <p:spPr>
           <a:xfrm>
-            <a:off x="6519672" y="4389120"/>
-            <a:ext cx="4617720" cy="640080"/>
+            <a:off x="6519672" y="4489704"/>
+            <a:ext cx="4617720" cy="685800"/>
           </a:xfrm>
           <a:prstGeom prst="rect">
             <a:avLst/>
@@ -4000,7 +4000,7 @@
               <a:buNone/>
             </a:pPr>
             <a:r>
-              <a:rPr lang="en-US" sz="1250" dirty="0">
+              <a:rPr lang="en-US" sz="1150" dirty="0">
                 <a:solidFill>
                   <a:srgbClr val="064E3B"/>
                 </a:solidFill>
@@ -4008,9 +4008,9 @@
                 <a:ea typeface="Arial" pitchFamily="34" charset="-122"/>
                 <a:cs typeface="Arial" pitchFamily="34" charset="-120"/>
               </a:rPr>
-              <a:t>حاسبات نطاقات ورسوم + مكتبة 83 مرجعًا حكوميًا رسميًا.</a:t>
-            </a:r>
-            <a:endParaRPr lang="en-US" sz="1250" dirty="0"/>
+              <a:t>حاسبات آلية لنطاقات والرسوم الحكومية + مكتبة 83 مرجعًا حكوميًا رسميًا.</a:t>
+            </a:r>
+            <a:endParaRPr lang="en-US" sz="1150" dirty="0"/>
           </a:p>
         </p:txBody>
       </p:sp>
@@ -4022,7 +4022,7 @@
         </p:nvSpPr>
         <p:spPr>
           <a:xfrm>
-            <a:off x="11183112" y="5148072"/>
+            <a:off x="11183112" y="5276088"/>
             <a:ext cx="118872" cy="118872"/>
           </a:xfrm>
           <a:prstGeom prst="ellipse">
@@ -4042,8 +4042,8 @@
         </p:nvSpPr>
         <p:spPr>
           <a:xfrm>
-            <a:off x="6519672" y="5074920"/>
-            <a:ext cx="4617720" cy="640080"/>
+            <a:off x="6519672" y="5202936"/>
+            <a:ext cx="4617720" cy="685800"/>
           </a:xfrm>
           <a:prstGeom prst="rect">
             <a:avLst/>
@@ -4062,7 +4062,7 @@
               <a:buNone/>
             </a:pPr>
             <a:r>
-              <a:rPr lang="en-US" sz="1250" dirty="0">
+              <a:rPr lang="en-US" sz="1150" dirty="0">
                 <a:solidFill>
                   <a:srgbClr val="064E3B"/>
                 </a:solidFill>
@@ -4070,9 +4070,9 @@
                 <a:ea typeface="Arial" pitchFamily="34" charset="-122"/>
                 <a:cs typeface="Arial" pitchFamily="34" charset="-120"/>
               </a:rPr>
-              <a:t>محرك واتساب + شركة خدمات قائمة تدرّ دخلًا ومعرفة.</a:t>
-            </a:r>
-            <a:endParaRPr lang="en-US" sz="1250" dirty="0"/>
+              <a:t>قناة واتساب للأعمال مفعّلة + شركة خدمات قائمة تدرّ دخلًا ومعرفة.</a:t>
+            </a:r>
+            <a:endParaRPr lang="en-US" sz="1150" dirty="0"/>
           </a:p>
         </p:txBody>
       </p:sp>
@@ -4084,12 +4084,12 @@
         </p:nvSpPr>
         <p:spPr>
           <a:xfrm>
-            <a:off x="548640" y="2331720"/>
-            <a:ext cx="5394960" cy="3566160"/>
+            <a:off x="548640" y="2377440"/>
+            <a:ext cx="5394960" cy="3611880"/>
           </a:xfrm>
           <a:prstGeom prst="roundRect">
             <a:avLst>
-              <a:gd name="adj" fmla="val 2308"/>
+              <a:gd name="adj" fmla="val 2278"/>
             </a:avLst>
           </a:prstGeom>
           <a:solidFill>
@@ -4118,7 +4118,7 @@
         </p:nvSpPr>
         <p:spPr>
           <a:xfrm>
-            <a:off x="822960" y="2514600"/>
+            <a:off x="822960" y="2560320"/>
             <a:ext cx="4846320" cy="411480"/>
           </a:xfrm>
           <a:prstGeom prst="rect">
@@ -4138,7 +4138,7 @@
               <a:buNone/>
             </a:pPr>
             <a:r>
-              <a:rPr lang="en-US" sz="1600" b="1" dirty="0">
+              <a:rPr lang="en-US" sz="1550" b="1" dirty="0">
                 <a:solidFill>
                   <a:srgbClr val="0066CC"/>
                 </a:solidFill>
@@ -4148,7 +4148,7 @@
               </a:rPr>
               <a:t>نثبته في البرنامج 🎯</a:t>
             </a:r>
-            <a:endParaRPr lang="en-US" sz="1600" dirty="0"/>
+            <a:endParaRPr lang="en-US" sz="1550" dirty="0"/>
           </a:p>
         </p:txBody>
       </p:sp>
@@ -4160,7 +4160,7 @@
         </p:nvSpPr>
         <p:spPr>
           <a:xfrm>
-            <a:off x="5486400" y="3090672"/>
+            <a:off x="5486400" y="3136392"/>
             <a:ext cx="118872" cy="118872"/>
           </a:xfrm>
           <a:prstGeom prst="ellipse">
@@ -4180,8 +4180,8 @@
         </p:nvSpPr>
         <p:spPr>
           <a:xfrm>
-            <a:off x="822960" y="3017520"/>
-            <a:ext cx="4617720" cy="640080"/>
+            <a:off x="822960" y="3063240"/>
+            <a:ext cx="4617720" cy="685800"/>
           </a:xfrm>
           <a:prstGeom prst="rect">
             <a:avLst/>
@@ -4200,7 +4200,7 @@
               <a:buNone/>
             </a:pPr>
             <a:r>
-              <a:rPr lang="en-US" sz="1250" dirty="0">
+              <a:rPr lang="en-US" sz="1150" dirty="0">
                 <a:solidFill>
                   <a:srgbClr val="334155"/>
                 </a:solidFill>
@@ -4208,9 +4208,9 @@
                 <a:ea typeface="Arial" pitchFamily="34" charset="-122"/>
                 <a:cs typeface="Arial" pitchFamily="34" charset="-120"/>
               </a:rPr>
-              <a:t>الإسفين الضيق: مراقبة نطاقات/حماية الأجور تعمل بموثوقية.</a:t>
-            </a:r>
-            <a:endParaRPr lang="en-US" sz="1250" dirty="0"/>
+              <a:t>نطاق الانطلاق: مراقبة نطاقات ونظام حماية الأجور تعمل بموثوقية.</a:t>
+            </a:r>
+            <a:endParaRPr lang="en-US" sz="1150" dirty="0"/>
           </a:p>
         </p:txBody>
       </p:sp>
@@ -4222,7 +4222,7 @@
         </p:nvSpPr>
         <p:spPr>
           <a:xfrm>
-            <a:off x="5486400" y="3776472"/>
+            <a:off x="5486400" y="3849624"/>
             <a:ext cx="118872" cy="118872"/>
           </a:xfrm>
           <a:prstGeom prst="ellipse">
@@ -4242,8 +4242,8 @@
         </p:nvSpPr>
         <p:spPr>
           <a:xfrm>
-            <a:off x="822960" y="3703320"/>
-            <a:ext cx="4617720" cy="640080"/>
+            <a:off x="822960" y="3776472"/>
+            <a:ext cx="4617720" cy="685800"/>
           </a:xfrm>
           <a:prstGeom prst="rect">
             <a:avLst/>
@@ -4262,7 +4262,7 @@
               <a:buNone/>
             </a:pPr>
             <a:r>
-              <a:rPr lang="en-US" sz="1250" dirty="0">
+              <a:rPr lang="en-US" sz="1150" dirty="0">
                 <a:solidFill>
                   <a:srgbClr val="334155"/>
                 </a:solidFill>
@@ -4270,9 +4270,9 @@
                 <a:ea typeface="Arial" pitchFamily="34" charset="-122"/>
                 <a:cs typeface="Arial" pitchFamily="34" charset="-120"/>
               </a:rPr>
-              <a:t>لـ 20–50 منشأة حقيقية خلال 90 يومًا.</a:t>
-            </a:r>
-            <a:endParaRPr lang="en-US" sz="1250" dirty="0"/>
+              <a:t>لدى 20–50 منشأة حقيقية خلال 90 يومًا.</a:t>
+            </a:r>
+            <a:endParaRPr lang="en-US" sz="1150" dirty="0"/>
           </a:p>
         </p:txBody>
       </p:sp>
@@ -4284,7 +4284,7 @@
         </p:nvSpPr>
         <p:spPr>
           <a:xfrm>
-            <a:off x="5486400" y="4462272"/>
+            <a:off x="5486400" y="4562856"/>
             <a:ext cx="118872" cy="118872"/>
           </a:xfrm>
           <a:prstGeom prst="ellipse">
@@ -4304,8 +4304,8 @@
         </p:nvSpPr>
         <p:spPr>
           <a:xfrm>
-            <a:off x="822960" y="4389120"/>
-            <a:ext cx="4617720" cy="640080"/>
+            <a:off x="822960" y="4489704"/>
+            <a:ext cx="4617720" cy="685800"/>
           </a:xfrm>
           <a:prstGeom prst="rect">
             <a:avLst/>
@@ -4324,7 +4324,7 @@
               <a:buNone/>
             </a:pPr>
             <a:r>
-              <a:rPr lang="en-US" sz="1250" dirty="0">
+              <a:rPr lang="en-US" sz="1150" dirty="0">
                 <a:solidFill>
                   <a:srgbClr val="334155"/>
                 </a:solidFill>
@@ -4332,9 +4332,9 @@
                 <a:ea typeface="Arial" pitchFamily="34" charset="-122"/>
                 <a:cs typeface="Arial" pitchFamily="34" charset="-120"/>
               </a:rPr>
-              <a:t>المقاييس: دقة التنبيه · الزمن من التنبيه للإجراء · الاحتفاظ.</a:t>
-            </a:r>
-            <a:endParaRPr lang="en-US" sz="1250" dirty="0"/>
+              <a:t>المقاييس: دقة التنبيهات · الزمن من التنبيه إلى الإجراء · معدل الاحتفاظ بالعملاء.</a:t>
+            </a:r>
+            <a:endParaRPr lang="en-US" sz="1150" dirty="0"/>
           </a:p>
         </p:txBody>
       </p:sp>
@@ -4346,7 +4346,7 @@
         </p:nvSpPr>
         <p:spPr>
           <a:xfrm>
-            <a:off x="5486400" y="5148072"/>
+            <a:off x="5486400" y="5276088"/>
             <a:ext cx="118872" cy="118872"/>
           </a:xfrm>
           <a:prstGeom prst="ellipse">
@@ -4366,8 +4366,8 @@
         </p:nvSpPr>
         <p:spPr>
           <a:xfrm>
-            <a:off x="822960" y="5074920"/>
-            <a:ext cx="4617720" cy="640080"/>
+            <a:off x="822960" y="5202936"/>
+            <a:ext cx="4617720" cy="685800"/>
           </a:xfrm>
           <a:prstGeom prst="rect">
             <a:avLst/>
@@ -4386,7 +4386,7 @@
               <a:buNone/>
             </a:pPr>
             <a:r>
-              <a:rPr lang="en-US" sz="1250" dirty="0">
+              <a:rPr lang="en-US" sz="1150" dirty="0">
                 <a:solidFill>
                   <a:srgbClr val="334155"/>
                 </a:solidFill>
@@ -4394,9 +4394,9 @@
                 <a:ea typeface="Arial" pitchFamily="34" charset="-122"/>
                 <a:cs typeface="Arial" pitchFamily="34" charset="-120"/>
               </a:rPr>
-              <a:t>الاستعداد للدفع + تكلفة خدمة العميل الفعلية.</a:t>
-            </a:r>
-            <a:endParaRPr lang="en-US" sz="1250" dirty="0"/>
+              <a:t>الرغبة الفعلية في الدفع · التكلفة الفعلية لخدمة العميل الواحد.</a:t>
+            </a:r>
+            <a:endParaRPr lang="en-US" sz="1150" dirty="0"/>
           </a:p>
         </p:txBody>
       </p:sp>
@@ -4594,7 +4594,7 @@
               <a:buNone/>
             </a:pPr>
             <a:r>
-              <a:rPr lang="en-US" sz="3000" b="1" dirty="0">
+              <a:rPr lang="en-US" sz="2900" b="1" dirty="0">
                 <a:solidFill>
                   <a:srgbClr val="FFFFFF"/>
                 </a:solidFill>
@@ -4602,9 +4602,9 @@
                 <a:ea typeface="Arial" pitchFamily="34" charset="-122"/>
                 <a:cs typeface="Arial" pitchFamily="34" charset="-120"/>
               </a:rPr>
-              <a:t>ماذا نطلب من Ittica — وماذا سنصنع به</a:t>
-            </a:r>
-            <a:endParaRPr lang="en-US" sz="3000" dirty="0"/>
+              <a:t>ما نطلبه من Ittica — وما سنحققه به في 90 يومًا</a:t>
+            </a:r>
+            <a:endParaRPr lang="en-US" sz="2900" dirty="0"/>
           </a:p>
         </p:txBody>
       </p:sp>
@@ -4633,7 +4633,7 @@
               <a:buNone/>
             </a:pPr>
             <a:r>
-              <a:rPr lang="en-US" sz="1400" dirty="0">
+              <a:rPr lang="en-US" sz="1350" dirty="0">
                 <a:solidFill>
                   <a:srgbClr val="AEC0D6"/>
                 </a:solidFill>
@@ -4641,9 +4641,9 @@
                 <a:ea typeface="Arial" pitchFamily="34" charset="-122"/>
                 <a:cs typeface="Arial" pitchFamily="34" charset="-120"/>
               </a:rPr>
-              <a:t>What we ask — and what we'll build with it</a:t>
-            </a:r>
-            <a:endParaRPr lang="en-US" sz="1400" dirty="0"/>
+              <a:t>What we ask of Ittica — and what we'll deliver in 90 days</a:t>
+            </a:r>
+            <a:endParaRPr lang="en-US" sz="1350" dirty="0"/>
           </a:p>
         </p:txBody>
       </p:sp>
@@ -4656,11 +4656,11 @@
         <p:spPr>
           <a:xfrm>
             <a:off x="548640" y="2286000"/>
-            <a:ext cx="3429000" cy="1600200"/>
+            <a:ext cx="3429000" cy="1645920"/>
           </a:xfrm>
           <a:prstGeom prst="roundRect">
             <a:avLst>
-              <a:gd name="adj" fmla="val 5143"/>
+              <a:gd name="adj" fmla="val 5000"/>
             </a:avLst>
           </a:prstGeom>
           <a:solidFill>
@@ -4768,7 +4768,7 @@
               <a:buNone/>
             </a:pPr>
             <a:r>
-              <a:rPr lang="en-US" sz="1550" b="1" dirty="0">
+              <a:rPr lang="en-US" sz="1500" b="1" dirty="0">
                 <a:solidFill>
                   <a:srgbClr val="FFFFFF"/>
                 </a:solidFill>
@@ -4778,7 +4778,7 @@
               </a:rPr>
               <a:t>احتضان وإرشاد</a:t>
             </a:r>
-            <a:endParaRPr lang="en-US" sz="1550" dirty="0"/>
+            <a:endParaRPr lang="en-US" sz="1500" dirty="0"/>
           </a:p>
         </p:txBody>
       </p:sp>
@@ -4791,7 +4791,7 @@
         <p:spPr>
           <a:xfrm>
             <a:off x="804672" y="3035808"/>
-            <a:ext cx="2926080" cy="731520"/>
+            <a:ext cx="2926080" cy="777240"/>
           </a:xfrm>
           <a:prstGeom prst="rect">
             <a:avLst/>
@@ -4810,7 +4810,7 @@
               <a:buNone/>
             </a:pPr>
             <a:r>
-              <a:rPr lang="en-US" sz="1200" dirty="0">
+              <a:rPr lang="en-US" sz="1150" dirty="0">
                 <a:solidFill>
                   <a:srgbClr val="D5DEEA"/>
                 </a:solidFill>
@@ -4818,9 +4818,9 @@
                 <a:ea typeface="Arial" pitchFamily="34" charset="-122"/>
                 <a:cs typeface="Arial" pitchFamily="34" charset="-120"/>
               </a:rPr>
-              <a:t>منتج · حوكمة · أمن.</a:t>
-            </a:r>
-            <a:endParaRPr lang="en-US" sz="1200" dirty="0"/>
+              <a:t>في المنتج والحوكمة والأمن.</a:t>
+            </a:r>
+            <a:endParaRPr lang="en-US" sz="1150" dirty="0"/>
           </a:p>
         </p:txBody>
       </p:sp>
@@ -4833,11 +4833,11 @@
         <p:spPr>
           <a:xfrm>
             <a:off x="4251960" y="2286000"/>
-            <a:ext cx="3429000" cy="1600200"/>
+            <a:ext cx="3429000" cy="1645920"/>
           </a:xfrm>
           <a:prstGeom prst="roundRect">
             <a:avLst>
-              <a:gd name="adj" fmla="val 5143"/>
+              <a:gd name="adj" fmla="val 5000"/>
             </a:avLst>
           </a:prstGeom>
           <a:solidFill>
@@ -4945,7 +4945,7 @@
               <a:buNone/>
             </a:pPr>
             <a:r>
-              <a:rPr lang="en-US" sz="1550" b="1" dirty="0">
+              <a:rPr lang="en-US" sz="1500" b="1" dirty="0">
                 <a:solidFill>
                   <a:srgbClr val="FFFFFF"/>
                 </a:solidFill>
@@ -4953,9 +4953,9 @@
                 <a:ea typeface="Arial" pitchFamily="34" charset="-122"/>
                 <a:cs typeface="Arial" pitchFamily="34" charset="-120"/>
               </a:rPr>
-              <a:t>20–50 منشأة تجربة</a:t>
-            </a:r>
-            <a:endParaRPr lang="en-US" sz="1550" dirty="0"/>
+              <a:t>من 20 إلى 50 منشأة</a:t>
+            </a:r>
+            <a:endParaRPr lang="en-US" sz="1500" dirty="0"/>
           </a:p>
         </p:txBody>
       </p:sp>
@@ -4968,7 +4968,7 @@
         <p:spPr>
           <a:xfrm>
             <a:off x="4507992" y="3035808"/>
-            <a:ext cx="2926080" cy="731520"/>
+            <a:ext cx="2926080" cy="777240"/>
           </a:xfrm>
           <a:prstGeom prst="rect">
             <a:avLst/>
@@ -4987,7 +4987,7 @@
               <a:buNone/>
             </a:pPr>
             <a:r>
-              <a:rPr lang="en-US" sz="1200" dirty="0">
+              <a:rPr lang="en-US" sz="1150" dirty="0">
                 <a:solidFill>
                   <a:srgbClr val="D5DEEA"/>
                 </a:solidFill>
@@ -4995,9 +4995,9 @@
                 <a:ea typeface="Arial" pitchFamily="34" charset="-122"/>
                 <a:cs typeface="Arial" pitchFamily="34" charset="-120"/>
               </a:rPr>
-              <a:t>تعريفات بشركاء تصميم (Design Partners).</a:t>
-            </a:r>
-            <a:endParaRPr lang="en-US" sz="1200" dirty="0"/>
+              <a:t>شركاء تجربة مبكرون يشاركون في تطوير المنتج.</a:t>
+            </a:r>
+            <a:endParaRPr lang="en-US" sz="1150" dirty="0"/>
           </a:p>
         </p:txBody>
       </p:sp>
@@ -5010,11 +5010,11 @@
         <p:spPr>
           <a:xfrm>
             <a:off x="7955280" y="2286000"/>
-            <a:ext cx="3429000" cy="1600200"/>
+            <a:ext cx="3429000" cy="1645920"/>
           </a:xfrm>
           <a:prstGeom prst="roundRect">
             <a:avLst>
-              <a:gd name="adj" fmla="val 5143"/>
+              <a:gd name="adj" fmla="val 5000"/>
             </a:avLst>
           </a:prstGeom>
           <a:solidFill>
@@ -5122,7 +5122,7 @@
               <a:buNone/>
             </a:pPr>
             <a:r>
-              <a:rPr lang="en-US" sz="1550" b="1" dirty="0">
+              <a:rPr lang="en-US" sz="1500" b="1" dirty="0">
                 <a:solidFill>
                   <a:srgbClr val="FFFFFF"/>
                 </a:solidFill>
@@ -5132,7 +5132,7 @@
               </a:rPr>
               <a:t>مسارات التكامل الرسمية</a:t>
             </a:r>
-            <a:endParaRPr lang="en-US" sz="1550" dirty="0"/>
+            <a:endParaRPr lang="en-US" sz="1500" dirty="0"/>
           </a:p>
         </p:txBody>
       </p:sp>
@@ -5145,7 +5145,7 @@
         <p:spPr>
           <a:xfrm>
             <a:off x="8211312" y="3035808"/>
-            <a:ext cx="2926080" cy="731520"/>
+            <a:ext cx="2926080" cy="777240"/>
           </a:xfrm>
           <a:prstGeom prst="rect">
             <a:avLst/>
@@ -5164,7 +5164,7 @@
               <a:buNone/>
             </a:pPr>
             <a:r>
-              <a:rPr lang="en-US" sz="1200" dirty="0">
+              <a:rPr lang="en-US" sz="1150" dirty="0">
                 <a:solidFill>
                   <a:srgbClr val="D5DEEA"/>
                 </a:solidFill>
@@ -5172,9 +5172,9 @@
                 <a:ea typeface="Arial" pitchFamily="34" charset="-122"/>
                 <a:cs typeface="Arial" pitchFamily="34" charset="-120"/>
               </a:rPr>
-              <a:t>توجيه نحو Sandbox/APIs مع الجهات — مفتاح الأتمتة الكاملة.</a:t>
-            </a:r>
-            <a:endParaRPr lang="en-US" sz="1200" dirty="0"/>
+              <a:t>التوجيه نحو البيئة التجريبية التنظيمية (Sandbox) والواجهات البرمجية المعتمدة لدى الجهات.</a:t>
+            </a:r>
+            <a:endParaRPr lang="en-US" sz="1150" dirty="0"/>
           </a:p>
         </p:txBody>
       </p:sp>
@@ -5186,8 +5186,8 @@
         </p:nvSpPr>
         <p:spPr>
           <a:xfrm>
-            <a:off x="548640" y="4206240"/>
-            <a:ext cx="11091672" cy="457200"/>
+            <a:off x="548640" y="4251960"/>
+            <a:ext cx="11091672" cy="502920"/>
           </a:xfrm>
           <a:prstGeom prst="rect">
             <a:avLst/>
@@ -5201,12 +5201,12 @@
           <a:p>
             <a:pPr rtl="1" algn="r" indent="0" marL="0">
               <a:lnSpc>
-                <a:spcPct val="105000"/>
+                <a:spcPct val="110000"/>
               </a:lnSpc>
               <a:buNone/>
             </a:pPr>
             <a:r>
-              <a:rPr lang="en-US" sz="1350" dirty="0">
+              <a:rPr lang="en-US" sz="1300" dirty="0">
                 <a:solidFill>
                   <a:srgbClr val="AEC0D6"/>
                 </a:solidFill>
@@ -5214,9 +5214,9 @@
                 <a:ea typeface="Arial" pitchFamily="34" charset="-122"/>
                 <a:cs typeface="Arial" pitchFamily="34" charset="-120"/>
               </a:rPr>
-              <a:t>الخطة: إطلاق الإسفين خلال 30 يومًا ← Pilot موثّق بيوم 90 ← نموذج مالي من الأسفل ← جولة مبنية على أدلة لا وعود.</a:t>
-            </a:r>
-            <a:endParaRPr lang="en-US" sz="1350" dirty="0"/>
+              <a:t>الخطة: إطلاق نطاق الانطلاق خلال 30 يومًا ← مرحلة تجريبية موثّقة بحلول اليوم التسعين ← نموذج مالي مبنيّ على الأرقام التشغيلية الفعلية ← جولة استثمارية مبنية على أدلة لا وعود.</a:t>
+            </a:r>
+            <a:endParaRPr lang="en-US" sz="1300" dirty="0"/>
           </a:p>
         </p:txBody>
       </p:sp>
@@ -5228,7 +5228,7 @@
         </p:nvSpPr>
         <p:spPr>
           <a:xfrm>
-            <a:off x="548640" y="4892040"/>
+            <a:off x="548640" y="4983480"/>
             <a:ext cx="11091672" cy="18288"/>
           </a:xfrm>
           <a:prstGeom prst="rect">
@@ -5248,7 +5248,7 @@
         </p:nvSpPr>
         <p:spPr>
           <a:xfrm>
-            <a:off x="548640" y="5120640"/>
+            <a:off x="548640" y="5212080"/>
             <a:ext cx="11091672" cy="548640"/>
           </a:xfrm>
           <a:prstGeom prst="rect">
@@ -5268,7 +5268,7 @@
               <a:buNone/>
             </a:pPr>
             <a:r>
-              <a:rPr lang="en-US" sz="2000" b="1" dirty="0">
+              <a:rPr lang="en-US" sz="1900" b="1" dirty="0">
                 <a:solidFill>
                   <a:srgbClr val="10B981"/>
                 </a:solidFill>
@@ -5276,9 +5276,9 @@
                 <a:ea typeface="Arial" pitchFamily="34" charset="-122"/>
                 <a:cs typeface="Arial" pitchFamily="34" charset="-120"/>
               </a:rPr>
-              <a:t>«عشر سنوات من إصلاح طوارئ الامتثال — نحوّلها إلى وكيلٍ يمنعها.»</a:t>
-            </a:r>
-            <a:endParaRPr lang="en-US" sz="2000" dirty="0"/>
+              <a:t>«عشر سنوات ونحن نطفئ حرائق الامتثال بأيدينا — اليوم نبني الوكيل الذي يمنع اشتعالها.»</a:t>
+            </a:r>
+            <a:endParaRPr lang="en-US" sz="1900" dirty="0"/>
           </a:p>
         </p:txBody>
       </p:sp>
@@ -5290,7 +5290,7 @@
         </p:nvSpPr>
         <p:spPr>
           <a:xfrm>
-            <a:off x="548640" y="5715000"/>
+            <a:off x="548640" y="5806440"/>
             <a:ext cx="11091672" cy="320040"/>
           </a:xfrm>
           <a:prstGeom prst="rect">
@@ -5307,7 +5307,7 @@
               <a:buNone/>
             </a:pPr>
             <a:r>
-              <a:rPr lang="en-US" sz="1200" i="1" dirty="0">
+              <a:rPr lang="en-US" sz="1150" i="1" dirty="0">
                 <a:solidFill>
                   <a:srgbClr val="8CA0B8"/>
                 </a:solidFill>
@@ -5315,9 +5315,9 @@
                 <a:ea typeface="Arial" pitchFamily="34" charset="-122"/>
                 <a:cs typeface="Arial" pitchFamily="34" charset="-120"/>
               </a:rPr>
-              <a:t>Ten years of fixing compliance emergencies — turned into an agent that prevents them.</a:t>
-            </a:r>
-            <a:endParaRPr lang="en-US" sz="1200" dirty="0"/>
+              <a:t>Ten years putting out compliance fires by hand — now we're building the agent that prevents them.</a:t>
+            </a:r>
+            <a:endParaRPr lang="en-US" sz="1150" dirty="0"/>
           </a:p>
         </p:txBody>
       </p:sp>
@@ -5515,7 +5515,7 @@
               <a:buNone/>
             </a:pPr>
             <a:r>
-              <a:rPr lang="en-US" sz="3000" b="1" dirty="0">
+              <a:rPr lang="en-US" sz="2900" b="1" dirty="0">
                 <a:solidFill>
                   <a:srgbClr val="1E293B"/>
                 </a:solidFill>
@@ -5523,9 +5523,9 @@
                 <a:ea typeface="Arial" pitchFamily="34" charset="-122"/>
                 <a:cs typeface="Arial" pitchFamily="34" charset="-120"/>
               </a:rPr>
-              <a:t>خطأ واحد… وتتساقط القطع</a:t>
-            </a:r>
-            <a:endParaRPr lang="en-US" sz="3000" dirty="0"/>
+              <a:t>استقالة موظفٍ واحد… وتتجمّد المنشأة كلها</a:t>
+            </a:r>
+            <a:endParaRPr lang="en-US" sz="2900" dirty="0"/>
           </a:p>
         </p:txBody>
       </p:sp>
@@ -5554,7 +5554,7 @@
               <a:buNone/>
             </a:pPr>
             <a:r>
-              <a:rPr lang="en-US" sz="1400" dirty="0">
+              <a:rPr lang="en-US" sz="1350" dirty="0">
                 <a:solidFill>
                   <a:srgbClr val="64748B"/>
                 </a:solidFill>
@@ -5562,9 +5562,9 @@
                 <a:ea typeface="Arial" pitchFamily="34" charset="-122"/>
                 <a:cs typeface="Arial" pitchFamily="34" charset="-120"/>
               </a:rPr>
-              <a:t>One slip — and the dominoes fall</a:t>
-            </a:r>
-            <a:endParaRPr lang="en-US" sz="1400" dirty="0"/>
+              <a:t>One resignation — and the whole establishment freezes</a:t>
+            </a:r>
+            <a:endParaRPr lang="en-US" sz="1350" dirty="0"/>
           </a:p>
         </p:txBody>
       </p:sp>
@@ -5577,11 +5577,11 @@
         <p:spPr>
           <a:xfrm>
             <a:off x="548640" y="2286000"/>
-            <a:ext cx="3429000" cy="1554480"/>
+            <a:ext cx="3429000" cy="1572768"/>
           </a:xfrm>
           <a:prstGeom prst="roundRect">
             <a:avLst>
-              <a:gd name="adj" fmla="val 5294"/>
+              <a:gd name="adj" fmla="val 5233"/>
             </a:avLst>
           </a:prstGeom>
           <a:solidFill>
@@ -5671,8 +5671,8 @@
         </p:nvSpPr>
         <p:spPr>
           <a:xfrm>
-            <a:off x="777240" y="2468880"/>
-            <a:ext cx="2606040" cy="411480"/>
+            <a:off x="749808" y="2468880"/>
+            <a:ext cx="2651760" cy="384048"/>
           </a:xfrm>
           <a:prstGeom prst="rect">
             <a:avLst/>
@@ -5691,7 +5691,7 @@
               <a:buNone/>
             </a:pPr>
             <a:r>
-              <a:rPr lang="en-US" sz="1350" b="1" dirty="0">
+              <a:rPr lang="en-US" sz="1300" b="1" dirty="0">
                 <a:solidFill>
                   <a:srgbClr val="64748B"/>
                 </a:solidFill>
@@ -5701,7 +5701,7 @@
               </a:rPr>
               <a:t>منشأة لوجستيات · 40 موظفًا</a:t>
             </a:r>
-            <a:endParaRPr lang="en-US" sz="1350" dirty="0"/>
+            <a:endParaRPr lang="en-US" sz="1300" dirty="0"/>
           </a:p>
         </p:txBody>
       </p:sp>
@@ -5713,8 +5713,8 @@
         </p:nvSpPr>
         <p:spPr>
           <a:xfrm>
-            <a:off x="777240" y="2944368"/>
-            <a:ext cx="3017520" cy="777240"/>
+            <a:off x="749808" y="2907792"/>
+            <a:ext cx="3063240" cy="868680"/>
           </a:xfrm>
           <a:prstGeom prst="rect">
             <a:avLst/>
@@ -5733,7 +5733,7 @@
               <a:buNone/>
             </a:pPr>
             <a:r>
-              <a:rPr lang="en-US" sz="1200" dirty="0">
+              <a:rPr lang="en-US" sz="1100" dirty="0">
                 <a:solidFill>
                   <a:srgbClr val="334155"/>
                 </a:solidFill>
@@ -5743,7 +5743,7 @@
               </a:rPr>
               <a:t>يستقيل موظف سعودي واحد.</a:t>
             </a:r>
-            <a:endParaRPr lang="en-US" sz="1200" dirty="0"/>
+            <a:endParaRPr lang="en-US" sz="1100" dirty="0"/>
           </a:p>
         </p:txBody>
       </p:sp>
@@ -5795,11 +5795,11 @@
         <p:spPr>
           <a:xfrm>
             <a:off x="4251960" y="2286000"/>
-            <a:ext cx="3429000" cy="1554480"/>
+            <a:ext cx="3429000" cy="1572768"/>
           </a:xfrm>
           <a:prstGeom prst="roundRect">
             <a:avLst>
-              <a:gd name="adj" fmla="val 5294"/>
+              <a:gd name="adj" fmla="val 5233"/>
             </a:avLst>
           </a:prstGeom>
           <a:solidFill>
@@ -5889,8 +5889,8 @@
         </p:nvSpPr>
         <p:spPr>
           <a:xfrm>
-            <a:off x="4480560" y="2468880"/>
-            <a:ext cx="2606040" cy="411480"/>
+            <a:off x="4453128" y="2468880"/>
+            <a:ext cx="2651760" cy="384048"/>
           </a:xfrm>
           <a:prstGeom prst="rect">
             <a:avLst/>
@@ -5909,7 +5909,7 @@
               <a:buNone/>
             </a:pPr>
             <a:r>
-              <a:rPr lang="en-US" sz="1350" b="1" dirty="0">
+              <a:rPr lang="en-US" sz="1300" b="1" dirty="0">
                 <a:solidFill>
                   <a:srgbClr val="D97706"/>
                 </a:solidFill>
@@ -5917,9 +5917,9 @@
                 <a:ea typeface="Arial" pitchFamily="34" charset="-122"/>
                 <a:cs typeface="Arial" pitchFamily="34" charset="-120"/>
               </a:rPr>
-              <a:t>النسبة تنزلق</a:t>
-            </a:r>
-            <a:endParaRPr lang="en-US" sz="1350" dirty="0"/>
+              <a:t>متوسط النسبة يهبط</a:t>
+            </a:r>
+            <a:endParaRPr lang="en-US" sz="1300" dirty="0"/>
           </a:p>
         </p:txBody>
       </p:sp>
@@ -5931,8 +5931,8 @@
         </p:nvSpPr>
         <p:spPr>
           <a:xfrm>
-            <a:off x="4480560" y="2944368"/>
-            <a:ext cx="3017520" cy="777240"/>
+            <a:off x="4453128" y="2907792"/>
+            <a:ext cx="3063240" cy="868680"/>
           </a:xfrm>
           <a:prstGeom prst="rect">
             <a:avLst/>
@@ -5951,7 +5951,7 @@
               <a:buNone/>
             </a:pPr>
             <a:r>
-              <a:rPr lang="en-US" sz="1200" dirty="0">
+              <a:rPr lang="en-US" sz="1100" dirty="0">
                 <a:solidFill>
                   <a:srgbClr val="334155"/>
                 </a:solidFill>
@@ -5959,9 +5959,9 @@
                 <a:ea typeface="Arial" pitchFamily="34" charset="-122"/>
                 <a:cs typeface="Arial" pitchFamily="34" charset="-120"/>
               </a:rPr>
-              <a:t>المنشأة تدخل النطاق الأحمر في نطاقات.</a:t>
-            </a:r>
-            <a:endParaRPr lang="en-US" sz="1200" dirty="0"/>
+              <a:t>متوسط التوطين (على 26 أسبوعًا) يهبط أسبوعًا بعد أسبوع → النطاق الأحمر.</a:t>
+            </a:r>
+            <a:endParaRPr lang="en-US" sz="1100" dirty="0"/>
           </a:p>
         </p:txBody>
       </p:sp>
@@ -6013,11 +6013,11 @@
         <p:spPr>
           <a:xfrm>
             <a:off x="7955280" y="2286000"/>
-            <a:ext cx="3429000" cy="1554480"/>
+            <a:ext cx="3429000" cy="1572768"/>
           </a:xfrm>
           <a:prstGeom prst="roundRect">
             <a:avLst>
-              <a:gd name="adj" fmla="val 5294"/>
+              <a:gd name="adj" fmla="val 5233"/>
             </a:avLst>
           </a:prstGeom>
           <a:solidFill>
@@ -6107,8 +6107,8 @@
         </p:nvSpPr>
         <p:spPr>
           <a:xfrm>
-            <a:off x="8183880" y="2468880"/>
-            <a:ext cx="2606040" cy="411480"/>
+            <a:off x="8156448" y="2468880"/>
+            <a:ext cx="2651760" cy="384048"/>
           </a:xfrm>
           <a:prstGeom prst="rect">
             <a:avLst/>
@@ -6127,7 +6127,7 @@
               <a:buNone/>
             </a:pPr>
             <a:r>
-              <a:rPr lang="en-US" sz="1350" b="1" dirty="0">
+              <a:rPr lang="en-US" sz="1300" b="1" dirty="0">
                 <a:solidFill>
                   <a:srgbClr val="EA580C"/>
                 </a:solidFill>
@@ -6135,9 +6135,9 @@
                 <a:ea typeface="Arial" pitchFamily="34" charset="-122"/>
                 <a:cs typeface="Arial" pitchFamily="34" charset="-120"/>
               </a:rPr>
-              <a:t>قوى تُقفل</a:t>
-            </a:r>
-            <a:endParaRPr lang="en-US" sz="1350" dirty="0"/>
+              <a:t>قوى توقف فورًا</a:t>
+            </a:r>
+            <a:endParaRPr lang="en-US" sz="1300" dirty="0"/>
           </a:p>
         </p:txBody>
       </p:sp>
@@ -6149,8 +6149,8 @@
         </p:nvSpPr>
         <p:spPr>
           <a:xfrm>
-            <a:off x="8183880" y="2944368"/>
-            <a:ext cx="3017520" cy="777240"/>
+            <a:off x="8156448" y="2907792"/>
+            <a:ext cx="3063240" cy="868680"/>
           </a:xfrm>
           <a:prstGeom prst="rect">
             <a:avLst/>
@@ -6169,7 +6169,7 @@
               <a:buNone/>
             </a:pPr>
             <a:r>
-              <a:rPr lang="en-US" sz="1200" dirty="0">
+              <a:rPr lang="en-US" sz="1100" dirty="0">
                 <a:solidFill>
                   <a:srgbClr val="334155"/>
                 </a:solidFill>
@@ -6177,9 +6177,9 @@
                 <a:ea typeface="Arial" pitchFamily="34" charset="-122"/>
                 <a:cs typeface="Arial" pitchFamily="34" charset="-120"/>
               </a:rPr>
-              <a:t>تتجمّد رخص العمل الجديدة والتجديدات والتأشيرات.</a:t>
-            </a:r>
-            <a:endParaRPr lang="en-US" sz="1200" dirty="0"/>
+              <a:t>رخص العمل والتأشيرات ونقل الخدمات إليها — وعمالتها يحق لها الانتقال عنها دون موافقتها.</a:t>
+            </a:r>
+            <a:endParaRPr lang="en-US" sz="1100" dirty="0"/>
           </a:p>
         </p:txBody>
       </p:sp>
@@ -6192,11 +6192,11 @@
         <p:spPr>
           <a:xfrm>
             <a:off x="548640" y="4069080"/>
-            <a:ext cx="3429000" cy="1554480"/>
+            <a:ext cx="3429000" cy="1572768"/>
           </a:xfrm>
           <a:prstGeom prst="roundRect">
             <a:avLst>
-              <a:gd name="adj" fmla="val 5294"/>
+              <a:gd name="adj" fmla="val 5233"/>
             </a:avLst>
           </a:prstGeom>
           <a:solidFill>
@@ -6286,8 +6286,8 @@
         </p:nvSpPr>
         <p:spPr>
           <a:xfrm>
-            <a:off x="777240" y="4251960"/>
-            <a:ext cx="2606040" cy="411480"/>
+            <a:off x="749808" y="4251960"/>
+            <a:ext cx="2651760" cy="384048"/>
           </a:xfrm>
           <a:prstGeom prst="rect">
             <a:avLst/>
@@ -6306,7 +6306,7 @@
               <a:buNone/>
             </a:pPr>
             <a:r>
-              <a:rPr lang="en-US" sz="1350" b="1" dirty="0">
+              <a:rPr lang="en-US" sz="1300" b="1" dirty="0">
                 <a:solidFill>
                   <a:srgbClr val="E11D48"/>
                 </a:solidFill>
@@ -6314,9 +6314,9 @@
                 <a:ea typeface="Arial" pitchFamily="34" charset="-122"/>
                 <a:cs typeface="Arial" pitchFamily="34" charset="-120"/>
               </a:rPr>
-              <a:t>الخدمات تتعثر</a:t>
-            </a:r>
-            <a:endParaRPr lang="en-US" sz="1350" dirty="0"/>
+              <a:t>هويات مقيم تتعثر</a:t>
+            </a:r>
+            <a:endParaRPr lang="en-US" sz="1300" dirty="0"/>
           </a:p>
         </p:txBody>
       </p:sp>
@@ -6328,8 +6328,8 @@
         </p:nvSpPr>
         <p:spPr>
           <a:xfrm>
-            <a:off x="777240" y="4727448"/>
-            <a:ext cx="3017520" cy="777240"/>
+            <a:off x="749808" y="4690872"/>
+            <a:ext cx="3063240" cy="868680"/>
           </a:xfrm>
           <a:prstGeom prst="rect">
             <a:avLst/>
@@ -6348,7 +6348,7 @@
               <a:buNone/>
             </a:pPr>
             <a:r>
-              <a:rPr lang="en-US" sz="1200" dirty="0">
+              <a:rPr lang="en-US" sz="1100" dirty="0">
                 <a:solidFill>
                   <a:srgbClr val="334155"/>
                 </a:solidFill>
@@ -6356,9 +6356,9 @@
                 <a:ea typeface="Arial" pitchFamily="34" charset="-122"/>
                 <a:cs typeface="Arial" pitchFamily="34" charset="-120"/>
               </a:rPr>
-              <a:t>يتعثر تجديد السجل والخدمات الحكومية.</a:t>
-            </a:r>
-            <a:endParaRPr lang="en-US" sz="1200" dirty="0"/>
+              <a:t>تجديدها مشروط برخصة عمل سارية → غرامات وعمالة غير نظامية.</a:t>
+            </a:r>
+            <a:endParaRPr lang="en-US" sz="1100" dirty="0"/>
           </a:p>
         </p:txBody>
       </p:sp>
@@ -6410,11 +6410,11 @@
         <p:spPr>
           <a:xfrm>
             <a:off x="4251960" y="4069080"/>
-            <a:ext cx="3429000" cy="1554480"/>
+            <a:ext cx="3429000" cy="1572768"/>
           </a:xfrm>
           <a:prstGeom prst="roundRect">
             <a:avLst>
-              <a:gd name="adj" fmla="val 5294"/>
+              <a:gd name="adj" fmla="val 5233"/>
             </a:avLst>
           </a:prstGeom>
           <a:solidFill>
@@ -6504,8 +6504,8 @@
         </p:nvSpPr>
         <p:spPr>
           <a:xfrm>
-            <a:off x="4480560" y="4251960"/>
-            <a:ext cx="2606040" cy="411480"/>
+            <a:off x="4453128" y="4251960"/>
+            <a:ext cx="2651760" cy="384048"/>
           </a:xfrm>
           <a:prstGeom prst="rect">
             <a:avLst/>
@@ -6524,7 +6524,7 @@
               <a:buNone/>
             </a:pPr>
             <a:r>
-              <a:rPr lang="en-US" sz="1350" b="1" dirty="0">
+              <a:rPr lang="en-US" sz="1300" b="1" dirty="0">
                 <a:solidFill>
                   <a:srgbClr val="DC2626"/>
                 </a:solidFill>
@@ -6532,9 +6532,9 @@
                 <a:ea typeface="Arial" pitchFamily="34" charset="-122"/>
                 <a:cs typeface="Arial" pitchFamily="34" charset="-120"/>
               </a:rPr>
-              <a:t>البنك يجمّد</a:t>
-            </a:r>
-            <a:endParaRPr lang="en-US" sz="1350" dirty="0"/>
+              <a:t>البنك يجمّد الحساب</a:t>
+            </a:r>
+            <a:endParaRPr lang="en-US" sz="1300" dirty="0"/>
           </a:p>
         </p:txBody>
       </p:sp>
@@ -6546,8 +6546,8 @@
         </p:nvSpPr>
         <p:spPr>
           <a:xfrm>
-            <a:off x="4480560" y="4727448"/>
-            <a:ext cx="3017520" cy="777240"/>
+            <a:off x="4453128" y="4690872"/>
+            <a:ext cx="3063240" cy="868680"/>
           </a:xfrm>
           <a:prstGeom prst="rect">
             <a:avLst/>
@@ -6566,7 +6566,7 @@
               <a:buNone/>
             </a:pPr>
             <a:r>
-              <a:rPr lang="en-US" sz="1200" dirty="0">
+              <a:rPr lang="en-US" sz="1100" dirty="0">
                 <a:solidFill>
                   <a:srgbClr val="334155"/>
                 </a:solidFill>
@@ -6574,9 +6574,9 @@
                 <a:ea typeface="Arial" pitchFamily="34" charset="-122"/>
                 <a:cs typeface="Arial" pitchFamily="34" charset="-120"/>
               </a:rPr>
-              <a:t>لا يمكن دفع الرواتب عبر مدد.</a:t>
-            </a:r>
-            <a:endParaRPr lang="en-US" sz="1200" dirty="0"/>
+              <a:t>بانتهاء هوية المفوض بالتوقيع أو تعليق السجل → يتعذّر ملف الرواتب في مدد.</a:t>
+            </a:r>
+            <a:endParaRPr lang="en-US" sz="1100" dirty="0"/>
           </a:p>
         </p:txBody>
       </p:sp>
@@ -6628,11 +6628,11 @@
         <p:spPr>
           <a:xfrm>
             <a:off x="7955280" y="4069080"/>
-            <a:ext cx="3429000" cy="1554480"/>
+            <a:ext cx="3429000" cy="1572768"/>
           </a:xfrm>
           <a:prstGeom prst="roundRect">
             <a:avLst>
-              <a:gd name="adj" fmla="val 5294"/>
+              <a:gd name="adj" fmla="val 5233"/>
             </a:avLst>
           </a:prstGeom>
           <a:solidFill>
@@ -6722,8 +6722,8 @@
         </p:nvSpPr>
         <p:spPr>
           <a:xfrm>
-            <a:off x="8183880" y="4251960"/>
-            <a:ext cx="2606040" cy="411480"/>
+            <a:off x="8156448" y="4251960"/>
+            <a:ext cx="2651760" cy="384048"/>
           </a:xfrm>
           <a:prstGeom prst="rect">
             <a:avLst/>
@@ -6742,7 +6742,7 @@
               <a:buNone/>
             </a:pPr>
             <a:r>
-              <a:rPr lang="en-US" sz="1350" b="1" dirty="0">
+              <a:rPr lang="en-US" sz="1300" b="1" dirty="0">
                 <a:solidFill>
                   <a:srgbClr val="B91C1C"/>
                 </a:solidFill>
@@ -6750,9 +6750,9 @@
                 <a:ea typeface="Arial" pitchFamily="34" charset="-122"/>
                 <a:cs typeface="Arial" pitchFamily="34" charset="-120"/>
               </a:rPr>
-              <a:t>مخالفة تولّد مخالفة</a:t>
-            </a:r>
-            <a:endParaRPr lang="en-US" sz="1350" dirty="0"/>
+              <a:t>مخالفة فوق المخالفة</a:t>
+            </a:r>
+            <a:endParaRPr lang="en-US" sz="1300" dirty="0"/>
           </a:p>
         </p:txBody>
       </p:sp>
@@ -6764,8 +6764,8 @@
         </p:nvSpPr>
         <p:spPr>
           <a:xfrm>
-            <a:off x="8183880" y="4727448"/>
-            <a:ext cx="3017520" cy="777240"/>
+            <a:off x="8156448" y="4690872"/>
+            <a:ext cx="3063240" cy="868680"/>
           </a:xfrm>
           <a:prstGeom prst="rect">
             <a:avLst/>
@@ -6784,7 +6784,7 @@
               <a:buNone/>
             </a:pPr>
             <a:r>
-              <a:rPr lang="en-US" sz="1200" dirty="0">
+              <a:rPr lang="en-US" sz="1100" dirty="0">
                 <a:solidFill>
                   <a:srgbClr val="334155"/>
                 </a:solidFill>
@@ -6792,9 +6792,9 @@
                 <a:ea typeface="Arial" pitchFamily="34" charset="-122"/>
                 <a:cs typeface="Arial" pitchFamily="34" charset="-120"/>
               </a:rPr>
-              <a:t>تأخّر الرواتب = مخالفة حماية أجور جديدة فوق الأولى.</a:t>
-            </a:r>
-            <a:endParaRPr lang="en-US" sz="1200" dirty="0"/>
+              <a:t>تأخُّر الأجور = مخالفة جديدة لنظام حماية الأجور.</a:t>
+            </a:r>
+            <a:endParaRPr lang="en-US" sz="1100" dirty="0"/>
           </a:p>
         </p:txBody>
       </p:sp>
@@ -6834,7 +6834,7 @@
                 <a:ea typeface="Arial" pitchFamily="34" charset="-122"/>
                 <a:cs typeface="Arial" pitchFamily="34" charset="-120"/>
               </a:rPr>
-              <a:t>المنصات لا تتحدث لبعضها — ولا تغفر النسيان.</a:t>
+              <a:t>انزلاقٌ واحد يولّد مخالفات متتابعة — وكل منصة تعمل بمعزل عن الأخرى.</a:t>
             </a:r>
             <a:endParaRPr lang="en-US" sz="1300" dirty="0"/>
           </a:p>
@@ -7034,7 +7034,7 @@
               <a:buNone/>
             </a:pPr>
             <a:r>
-              <a:rPr lang="en-US" sz="3000" b="1" dirty="0">
+              <a:rPr lang="en-US" sz="2900" b="1" dirty="0">
                 <a:solidFill>
                   <a:srgbClr val="1E293B"/>
                 </a:solidFill>
@@ -7042,9 +7042,9 @@
                 <a:ea typeface="Arial" pitchFamily="34" charset="-122"/>
                 <a:cs typeface="Arial" pitchFamily="34" charset="-120"/>
               </a:rPr>
-              <a:t>كلفة الخطأ باهظة… ودفاعات اليوم أغلى مما تحمي</a:t>
-            </a:r>
-            <a:endParaRPr lang="en-US" sz="3000" dirty="0"/>
+              <a:t>كلفة الخطأ باهظة… ولا بديل اليوم يمنعه قبل وقوعه</a:t>
+            </a:r>
+            <a:endParaRPr lang="en-US" sz="2900" dirty="0"/>
           </a:p>
         </p:txBody>
       </p:sp>
@@ -7073,7 +7073,7 @@
               <a:buNone/>
             </a:pPr>
             <a:r>
-              <a:rPr lang="en-US" sz="1400" dirty="0">
+              <a:rPr lang="en-US" sz="1350" dirty="0">
                 <a:solidFill>
                   <a:srgbClr val="64748B"/>
                 </a:solidFill>
@@ -7081,9 +7081,9 @@
                 <a:ea typeface="Arial" pitchFamily="34" charset="-122"/>
                 <a:cs typeface="Arial" pitchFamily="34" charset="-120"/>
               </a:rPr>
-              <a:t>Getting it wrong is expensive — today's defenses don't scale</a:t>
-            </a:r>
-            <a:endParaRPr lang="en-US" sz="1400" dirty="0"/>
+              <a:t>Mistakes are expensive — nothing today prevents them in advance</a:t>
+            </a:r>
+            <a:endParaRPr lang="en-US" sz="1350" dirty="0"/>
           </a:p>
         </p:txBody>
       </p:sp>
@@ -7096,11 +7096,11 @@
         <p:spPr>
           <a:xfrm>
             <a:off x="548640" y="2331720"/>
-            <a:ext cx="3429000" cy="2103120"/>
+            <a:ext cx="3429000" cy="2240280"/>
           </a:xfrm>
           <a:prstGeom prst="roundRect">
             <a:avLst>
-              <a:gd name="adj" fmla="val 3913"/>
+              <a:gd name="adj" fmla="val 3673"/>
             </a:avLst>
           </a:prstGeom>
           <a:solidFill>
@@ -7157,7 +7157,7 @@
                 <a:ea typeface="Arial" pitchFamily="34" charset="-122"/>
                 <a:cs typeface="Arial" pitchFamily="34" charset="-120"/>
               </a:rPr>
-              <a:t>كلفة الانزلاق</a:t>
+              <a:t>كلفة المخالفة</a:t>
             </a:r>
             <a:endParaRPr lang="en-US" sz="1600" dirty="0"/>
           </a:p>
@@ -7172,7 +7172,7 @@
         <p:spPr>
           <a:xfrm>
             <a:off x="804672" y="3108960"/>
-            <a:ext cx="2971800" cy="1188720"/>
+            <a:ext cx="2971800" cy="1371600"/>
           </a:xfrm>
           <a:prstGeom prst="rect">
             <a:avLst/>
@@ -7186,12 +7186,12 @@
           <a:p>
             <a:pPr rtl="1" algn="r" indent="0" marL="0">
               <a:lnSpc>
-                <a:spcPct val="115000"/>
+                <a:spcPct val="112000"/>
               </a:lnSpc>
               <a:buNone/>
             </a:pPr>
             <a:r>
-              <a:rPr lang="en-US" sz="1250" dirty="0">
+              <a:rPr lang="en-US" sz="1200" dirty="0">
                 <a:solidFill>
                   <a:srgbClr val="334155"/>
                 </a:solidFill>
@@ -7199,9 +7199,9 @@
                 <a:ea typeface="Arial" pitchFamily="34" charset="-122"/>
                 <a:cs typeface="Arial" pitchFamily="34" charset="-120"/>
               </a:rPr>
-              <a:t>غرامات · تجميد رخص وحسابات · توقف التوظيف والتأشيرات · أثر قانوني على المنشأة والموظف.</a:t>
-            </a:r>
-            <a:endParaRPr lang="en-US" sz="1250" dirty="0"/>
+              <a:t>غرامات · تجميد رخص وحسابات · توقّف التوظيف والتأشيرات · أثر نظامي على المنشأة وعمالتها.</a:t>
+            </a:r>
+            <a:endParaRPr lang="en-US" sz="1200" dirty="0"/>
           </a:p>
         </p:txBody>
       </p:sp>
@@ -7214,11 +7214,11 @@
         <p:spPr>
           <a:xfrm>
             <a:off x="4251960" y="2331720"/>
-            <a:ext cx="3429000" cy="2103120"/>
+            <a:ext cx="3429000" cy="2240280"/>
           </a:xfrm>
           <a:prstGeom prst="roundRect">
             <a:avLst>
-              <a:gd name="adj" fmla="val 3913"/>
+              <a:gd name="adj" fmla="val 3673"/>
             </a:avLst>
           </a:prstGeom>
           <a:solidFill>
@@ -7290,7 +7290,7 @@
         <p:spPr>
           <a:xfrm>
             <a:off x="4507992" y="3108960"/>
-            <a:ext cx="2971800" cy="1188720"/>
+            <a:ext cx="2971800" cy="1371600"/>
           </a:xfrm>
           <a:prstGeom prst="rect">
             <a:avLst/>
@@ -7304,12 +7304,12 @@
           <a:p>
             <a:pPr rtl="1" algn="r" indent="0" marL="0">
               <a:lnSpc>
-                <a:spcPct val="115000"/>
+                <a:spcPct val="112000"/>
               </a:lnSpc>
               <a:buNone/>
             </a:pPr>
             <a:r>
-              <a:rPr lang="en-US" sz="1250" dirty="0">
+              <a:rPr lang="en-US" sz="1200" dirty="0">
                 <a:solidFill>
                   <a:srgbClr val="334155"/>
                 </a:solidFill>
@@ -7317,9 +7317,9 @@
                 <a:ea typeface="Arial" pitchFamily="34" charset="-122"/>
                 <a:cs typeface="Arial" pitchFamily="34" charset="-120"/>
               </a:rPr>
-              <a:t>~8–15 ألف ﷼/شهر محمّلة (افتراض معلن) · يغطي دوامًا لا ساعة الحدث · معرفته تغادر معه.</a:t>
-            </a:r>
-            <a:endParaRPr lang="en-US" sz="1250" dirty="0"/>
+              <a:t>تكلفة إجمالية 8–15 ألف ريال شهريًا (راتب وبدلات وتأمينات — تقدير معلن) · حاضر في ساعات الدوام، غائب لحظة وقوع الحدث · تغادر معرفتُه بمغادرته.</a:t>
+            </a:r>
+            <a:endParaRPr lang="en-US" sz="1200" dirty="0"/>
           </a:p>
         </p:txBody>
       </p:sp>
@@ -7332,11 +7332,11 @@
         <p:spPr>
           <a:xfrm>
             <a:off x="7955280" y="2331720"/>
-            <a:ext cx="3429000" cy="2103120"/>
+            <a:ext cx="3429000" cy="2240280"/>
           </a:xfrm>
           <a:prstGeom prst="roundRect">
             <a:avLst>
-              <a:gd name="adj" fmla="val 3913"/>
+              <a:gd name="adj" fmla="val 3673"/>
             </a:avLst>
           </a:prstGeom>
           <a:solidFill>
@@ -7393,7 +7393,7 @@
                 <a:ea typeface="Arial" pitchFamily="34" charset="-122"/>
                 <a:cs typeface="Arial" pitchFamily="34" charset="-120"/>
               </a:rPr>
-              <a:t>مستشار / محامٍ</a:t>
+              <a:t>مستشار أو مكتب خدمات</a:t>
             </a:r>
             <a:endParaRPr lang="en-US" sz="1600" dirty="0"/>
           </a:p>
@@ -7408,7 +7408,7 @@
         <p:spPr>
           <a:xfrm>
             <a:off x="8211312" y="3108960"/>
-            <a:ext cx="2971800" cy="1188720"/>
+            <a:ext cx="2971800" cy="1371600"/>
           </a:xfrm>
           <a:prstGeom prst="rect">
             <a:avLst/>
@@ -7422,12 +7422,12 @@
           <a:p>
             <a:pPr rtl="1" algn="r" indent="0" marL="0">
               <a:lnSpc>
-                <a:spcPct val="115000"/>
+                <a:spcPct val="112000"/>
               </a:lnSpc>
               <a:buNone/>
             </a:pPr>
             <a:r>
-              <a:rPr lang="en-US" sz="1250" dirty="0">
+              <a:rPr lang="en-US" sz="1200" dirty="0">
                 <a:solidFill>
                   <a:srgbClr val="334155"/>
                 </a:solidFill>
@@ -7435,9 +7435,9 @@
                 <a:ea typeface="Arial" pitchFamily="34" charset="-122"/>
                 <a:cs typeface="Arial" pitchFamily="34" charset="-120"/>
               </a:rPr>
-              <a:t>أتعاب لكل حادثة · يُستدعى بعد وقوع المشكلة · لا متابعة مستمرة.</a:t>
-            </a:r>
-            <a:endParaRPr lang="en-US" sz="1250" dirty="0"/>
+              <a:t>أتعاب لكل معاملة · يُستدعى بعد وقوع المشكلة · بلا متابعة مستمرة.</a:t>
+            </a:r>
+            <a:endParaRPr lang="en-US" sz="1200" dirty="0"/>
           </a:p>
         </p:txBody>
       </p:sp>
@@ -7449,12 +7449,12 @@
         </p:nvSpPr>
         <p:spPr>
           <a:xfrm>
-            <a:off x="548640" y="4709160"/>
-            <a:ext cx="11091672" cy="1005840"/>
+            <a:off x="548640" y="4846320"/>
+            <a:ext cx="11091672" cy="960120"/>
           </a:xfrm>
           <a:prstGeom prst="roundRect">
             <a:avLst>
-              <a:gd name="adj" fmla="val 8182"/>
+              <a:gd name="adj" fmla="val 8571"/>
             </a:avLst>
           </a:prstGeom>
           <a:solidFill>
@@ -7483,7 +7483,7 @@
         </p:nvSpPr>
         <p:spPr>
           <a:xfrm>
-            <a:off x="868680" y="4956048"/>
+            <a:off x="868680" y="5074920"/>
             <a:ext cx="10424160" cy="548640"/>
           </a:xfrm>
           <a:prstGeom prst="rect">
@@ -7511,7 +7511,7 @@
                 <a:ea typeface="Arial" pitchFamily="34" charset="-122"/>
                 <a:cs typeface="Arial" pitchFamily="34" charset="-120"/>
               </a:rPr>
-              <a:t>الفجوة: لا يوجد خيار مستمر، استباقي، وبسعرٍ يناسب المنشآت الصغيرة والمتوسطة — حتى الآن.</a:t>
+              <a:t>الفجوة: لا حلَّ استباقيًّا متواصلًا بسعرٍ تطيقه المنشآت الصغيرة والمتوسطة — حتى الآن.</a:t>
             </a:r>
             <a:endParaRPr lang="en-US" sz="1500" dirty="0"/>
           </a:p>
@@ -7680,7 +7680,7 @@
                 <a:ea typeface="Arial" pitchFamily="34" charset="-122"/>
                 <a:cs typeface="Arial" pitchFamily="34" charset="-120"/>
               </a:rPr>
-              <a:t>FOUNDING STORY · الميزة غير العادلة</a:t>
+              <a:t>FOUNDING STORY · ميزة لا تُنسخ ولا تُشترى</a:t>
             </a:r>
             <a:endParaRPr lang="en-US" sz="1100" dirty="0"/>
           </a:p>
@@ -7711,7 +7711,7 @@
               <a:buNone/>
             </a:pPr>
             <a:r>
-              <a:rPr lang="en-US" sz="3000" b="1" dirty="0">
+              <a:rPr lang="en-US" sz="2900" b="1" dirty="0">
                 <a:solidFill>
                   <a:srgbClr val="FFFFFF"/>
                 </a:solidFill>
@@ -7719,9 +7719,9 @@
                 <a:ea typeface="Arial" pitchFamily="34" charset="-122"/>
                 <a:cs typeface="Arial" pitchFamily="34" charset="-120"/>
               </a:rPr>
-              <a:t>عشنا المشكلة قبل أن نبني الحل</a:t>
-            </a:r>
-            <a:endParaRPr lang="en-US" sz="3000" dirty="0"/>
+              <a:t>عشتُ هذه المشكلة قبل أن أبني حلّها</a:t>
+            </a:r>
+            <a:endParaRPr lang="en-US" sz="2900" dirty="0"/>
           </a:p>
         </p:txBody>
       </p:sp>
@@ -7750,7 +7750,7 @@
               <a:buNone/>
             </a:pPr>
             <a:r>
-              <a:rPr lang="en-US" sz="1400" dirty="0">
+              <a:rPr lang="en-US" sz="1350" dirty="0">
                 <a:solidFill>
                   <a:srgbClr val="AEC0D6"/>
                 </a:solidFill>
@@ -7758,9 +7758,9 @@
                 <a:ea typeface="Arial" pitchFamily="34" charset="-122"/>
                 <a:cs typeface="Arial" pitchFamily="34" charset="-120"/>
               </a:rPr>
-              <a:t>We lived this problem before we built the product</a:t>
-            </a:r>
-            <a:endParaRPr lang="en-US" sz="1400" dirty="0"/>
+              <a:t>I lived this problem before building the product</a:t>
+            </a:r>
+            <a:endParaRPr lang="en-US" sz="1350" dirty="0"/>
           </a:p>
         </p:txBody>
       </p:sp>
@@ -7773,11 +7773,11 @@
         <p:spPr>
           <a:xfrm>
             <a:off x="548640" y="2331720"/>
-            <a:ext cx="2606040" cy="1737360"/>
+            <a:ext cx="2606040" cy="1828800"/>
           </a:xfrm>
           <a:prstGeom prst="roundRect">
             <a:avLst>
-              <a:gd name="adj" fmla="val 4737"/>
+              <a:gd name="adj" fmla="val 4500"/>
             </a:avLst>
           </a:prstGeom>
           <a:solidFill>
@@ -7866,7 +7866,7 @@
         <p:spPr>
           <a:xfrm>
             <a:off x="749808" y="2542032"/>
-            <a:ext cx="1691640" cy="685800"/>
+            <a:ext cx="1691640" cy="731520"/>
           </a:xfrm>
           <a:prstGeom prst="rect">
             <a:avLst/>
@@ -7885,7 +7885,7 @@
               <a:buNone/>
             </a:pPr>
             <a:r>
-              <a:rPr lang="en-US" sz="1350" b="1" dirty="0">
+              <a:rPr lang="en-US" sz="1300" b="1" dirty="0">
                 <a:solidFill>
                   <a:srgbClr val="FFFFFF"/>
                 </a:solidFill>
@@ -7895,7 +7895,7 @@
               </a:rPr>
               <a:t>أعمال العائلة</a:t>
             </a:r>
-            <a:endParaRPr lang="en-US" sz="1350" dirty="0"/>
+            <a:endParaRPr lang="en-US" sz="1300" dirty="0"/>
           </a:p>
         </p:txBody>
       </p:sp>
@@ -7907,8 +7907,8 @@
         </p:nvSpPr>
         <p:spPr>
           <a:xfrm>
-            <a:off x="749808" y="3246120"/>
-            <a:ext cx="2194560" cy="777240"/>
+            <a:off x="749808" y="3291840"/>
+            <a:ext cx="2194560" cy="822960"/>
           </a:xfrm>
           <a:prstGeom prst="rect">
             <a:avLst/>
@@ -7927,7 +7927,7 @@
               <a:buNone/>
             </a:pPr>
             <a:r>
-              <a:rPr lang="en-US" sz="1150" dirty="0">
+              <a:rPr lang="en-US" sz="1100" dirty="0">
                 <a:solidFill>
                   <a:srgbClr val="D5DEEA"/>
                 </a:solidFill>
@@ -7935,9 +7935,9 @@
                 <a:ea typeface="Arial" pitchFamily="34" charset="-122"/>
                 <a:cs typeface="Arial" pitchFamily="34" charset="-120"/>
               </a:rPr>
-              <a:t>علاقات حكومية لسنوات — كل منصة، وكل نمط فشل.</a:t>
-            </a:r>
-            <a:endParaRPr lang="en-US" sz="1150" dirty="0"/>
+              <a:t>سنوات من العلاقات الحكومية على كل منصة — وعرفتُ مواضع العطب واحدًا واحدًا.</a:t>
+            </a:r>
+            <a:endParaRPr lang="en-US" sz="1100" dirty="0"/>
           </a:p>
         </p:txBody>
       </p:sp>
@@ -7949,7 +7949,7 @@
         </p:nvSpPr>
         <p:spPr>
           <a:xfrm>
-            <a:off x="3172968" y="2880360"/>
+            <a:off x="3172968" y="2926080"/>
             <a:ext cx="182880" cy="548640"/>
           </a:xfrm>
           <a:prstGeom prst="rect">
@@ -7989,11 +7989,11 @@
         <p:spPr>
           <a:xfrm>
             <a:off x="3337560" y="2331720"/>
-            <a:ext cx="2606040" cy="1737360"/>
+            <a:ext cx="2606040" cy="1828800"/>
           </a:xfrm>
           <a:prstGeom prst="roundRect">
             <a:avLst>
-              <a:gd name="adj" fmla="val 4737"/>
+              <a:gd name="adj" fmla="val 4500"/>
             </a:avLst>
           </a:prstGeom>
           <a:solidFill>
@@ -8082,7 +8082,7 @@
         <p:spPr>
           <a:xfrm>
             <a:off x="3538728" y="2542032"/>
-            <a:ext cx="1691640" cy="685800"/>
+            <a:ext cx="1691640" cy="731520"/>
           </a:xfrm>
           <a:prstGeom prst="rect">
             <a:avLst/>
@@ -8101,7 +8101,7 @@
               <a:buNone/>
             </a:pPr>
             <a:r>
-              <a:rPr lang="en-US" sz="1350" b="1" dirty="0">
+              <a:rPr lang="en-US" sz="1300" b="1" dirty="0">
                 <a:solidFill>
                   <a:srgbClr val="FFFFFF"/>
                 </a:solidFill>
@@ -8109,9 +8109,9 @@
                 <a:ea typeface="Arial" pitchFamily="34" charset="-122"/>
                 <a:cs typeface="Arial" pitchFamily="34" charset="-120"/>
               </a:rPr>
-              <a:t>مشاريعه الخاصة</a:t>
-            </a:r>
-            <a:endParaRPr lang="en-US" sz="1350" dirty="0"/>
+              <a:t>مشاريعي الخاصة</a:t>
+            </a:r>
+            <a:endParaRPr lang="en-US" sz="1300" dirty="0"/>
           </a:p>
         </p:txBody>
       </p:sp>
@@ -8123,8 +8123,8 @@
         </p:nvSpPr>
         <p:spPr>
           <a:xfrm>
-            <a:off x="3538728" y="3246120"/>
-            <a:ext cx="2194560" cy="777240"/>
+            <a:off x="3538728" y="3291840"/>
+            <a:ext cx="2194560" cy="822960"/>
           </a:xfrm>
           <a:prstGeom prst="rect">
             <a:avLst/>
@@ -8143,7 +8143,7 @@
               <a:buNone/>
             </a:pPr>
             <a:r>
-              <a:rPr lang="en-US" sz="1150" dirty="0">
+              <a:rPr lang="en-US" sz="1100" dirty="0">
                 <a:solidFill>
                   <a:srgbClr val="D5DEEA"/>
                 </a:solidFill>
@@ -8151,9 +8151,9 @@
                 <a:ea typeface="Arial" pitchFamily="34" charset="-122"/>
                 <a:cs typeface="Arial" pitchFamily="34" charset="-120"/>
               </a:rPr>
-              <a:t>شاهد شركات تسقط في الأحمر وتتجمّد على متطلبٍ واحد.</a:t>
-            </a:r>
-            <a:endParaRPr lang="en-US" sz="1150" dirty="0"/>
+              <a:t>رأيتُ شركات تهوي إلى النطاق الأحمر فتتجمّد رخصها وحساباتها بسبب متطلبٍ واحد.</a:t>
+            </a:r>
+            <a:endParaRPr lang="en-US" sz="1100" dirty="0"/>
           </a:p>
         </p:txBody>
       </p:sp>
@@ -8165,7 +8165,7 @@
         </p:nvSpPr>
         <p:spPr>
           <a:xfrm>
-            <a:off x="5961888" y="2880360"/>
+            <a:off x="5961888" y="2926080"/>
             <a:ext cx="182880" cy="548640"/>
           </a:xfrm>
           <a:prstGeom prst="rect">
@@ -8205,11 +8205,11 @@
         <p:spPr>
           <a:xfrm>
             <a:off x="6126480" y="2331720"/>
-            <a:ext cx="2606040" cy="1737360"/>
+            <a:ext cx="2606040" cy="1828800"/>
           </a:xfrm>
           <a:prstGeom prst="roundRect">
             <a:avLst>
-              <a:gd name="adj" fmla="val 4737"/>
+              <a:gd name="adj" fmla="val 4500"/>
             </a:avLst>
           </a:prstGeom>
           <a:solidFill>
@@ -8298,7 +8298,7 @@
         <p:spPr>
           <a:xfrm>
             <a:off x="6327648" y="2542032"/>
-            <a:ext cx="1691640" cy="685800"/>
+            <a:ext cx="1691640" cy="731520"/>
           </a:xfrm>
           <a:prstGeom prst="rect">
             <a:avLst/>
@@ -8317,7 +8317,7 @@
               <a:buNone/>
             </a:pPr>
             <a:r>
-              <a:rPr lang="en-US" sz="1350" b="1" dirty="0">
+              <a:rPr lang="en-US" sz="1300" b="1" dirty="0">
                 <a:solidFill>
                   <a:srgbClr val="FFFFFF"/>
                 </a:solidFill>
@@ -8325,9 +8325,9 @@
                 <a:ea typeface="Arial" pitchFamily="34" charset="-122"/>
                 <a:cs typeface="Arial" pitchFamily="34" charset="-120"/>
               </a:rPr>
-              <a:t>«الرقم الذي يتصلون به»</a:t>
-            </a:r>
-            <a:endParaRPr lang="en-US" sz="1350" dirty="0"/>
+              <a:t>كنتُ الرقم الذي يتصلون به</a:t>
+            </a:r>
+            <a:endParaRPr lang="en-US" sz="1300" dirty="0"/>
           </a:p>
         </p:txBody>
       </p:sp>
@@ -8339,8 +8339,8 @@
         </p:nvSpPr>
         <p:spPr>
           <a:xfrm>
-            <a:off x="6327648" y="3246120"/>
-            <a:ext cx="2194560" cy="777240"/>
+            <a:off x="6327648" y="3291840"/>
+            <a:ext cx="2194560" cy="822960"/>
           </a:xfrm>
           <a:prstGeom prst="rect">
             <a:avLst/>
@@ -8359,7 +8359,7 @@
               <a:buNone/>
             </a:pPr>
             <a:r>
-              <a:rPr lang="en-US" sz="1150" dirty="0">
+              <a:rPr lang="en-US" sz="1100" dirty="0">
                 <a:solidFill>
                   <a:srgbClr val="D5DEEA"/>
                 </a:solidFill>
@@ -8367,9 +8367,9 @@
                 <a:ea typeface="Arial" pitchFamily="34" charset="-122"/>
                 <a:cs typeface="Arial" pitchFamily="34" charset="-120"/>
               </a:rPr>
-              <a:t>رواد أعمال يستدعونه لإصلاح طوارئ الامتثال.</a:t>
-            </a:r>
-            <a:endParaRPr lang="en-US" sz="1150" dirty="0"/>
+              <a:t>رواد أعمال يلجؤون إليّ لإصلاح تعثّرات الامتثال.</a:t>
+            </a:r>
+            <a:endParaRPr lang="en-US" sz="1100" dirty="0"/>
           </a:p>
         </p:txBody>
       </p:sp>
@@ -8381,7 +8381,7 @@
         </p:nvSpPr>
         <p:spPr>
           <a:xfrm>
-            <a:off x="8750808" y="2880360"/>
+            <a:off x="8750808" y="2926080"/>
             <a:ext cx="182880" cy="548640"/>
           </a:xfrm>
           <a:prstGeom prst="rect">
@@ -8421,11 +8421,11 @@
         <p:spPr>
           <a:xfrm>
             <a:off x="8915400" y="2331720"/>
-            <a:ext cx="2606040" cy="1737360"/>
+            <a:ext cx="2606040" cy="1828800"/>
           </a:xfrm>
           <a:prstGeom prst="roundRect">
             <a:avLst>
-              <a:gd name="adj" fmla="val 4737"/>
+              <a:gd name="adj" fmla="val 4500"/>
             </a:avLst>
           </a:prstGeom>
           <a:solidFill>
@@ -8514,7 +8514,7 @@
         <p:spPr>
           <a:xfrm>
             <a:off x="9116568" y="2542032"/>
-            <a:ext cx="1691640" cy="685800"/>
+            <a:ext cx="1691640" cy="731520"/>
           </a:xfrm>
           <a:prstGeom prst="rect">
             <a:avLst/>
@@ -8533,7 +8533,7 @@
               <a:buNone/>
             </a:pPr>
             <a:r>
-              <a:rPr lang="en-US" sz="1350" b="1" dirty="0">
+              <a:rPr lang="en-US" sz="1300" b="1" dirty="0">
                 <a:solidFill>
                   <a:srgbClr val="FFFFFF"/>
                 </a:solidFill>
@@ -8543,7 +8543,7 @@
               </a:rPr>
               <a:t>Business Partner</a:t>
             </a:r>
-            <a:endParaRPr lang="en-US" sz="1350" dirty="0"/>
+            <a:endParaRPr lang="en-US" sz="1300" dirty="0"/>
           </a:p>
         </p:txBody>
       </p:sp>
@@ -8555,8 +8555,8 @@
         </p:nvSpPr>
         <p:spPr>
           <a:xfrm>
-            <a:off x="9116568" y="3246120"/>
-            <a:ext cx="2194560" cy="777240"/>
+            <a:off x="9116568" y="3291840"/>
+            <a:ext cx="2194560" cy="822960"/>
           </a:xfrm>
           <a:prstGeom prst="rect">
             <a:avLst/>
@@ -8575,7 +8575,7 @@
               <a:buNone/>
             </a:pPr>
             <a:r>
-              <a:rPr lang="en-US" sz="1150" dirty="0">
+              <a:rPr lang="en-US" sz="1100" dirty="0">
                 <a:solidFill>
                   <a:srgbClr val="D5DEEA"/>
                 </a:solidFill>
@@ -8583,9 +8583,9 @@
                 <a:ea typeface="Arial" pitchFamily="34" charset="-122"/>
                 <a:cs typeface="Arial" pitchFamily="34" charset="-120"/>
               </a:rPr>
-              <a:t>شركة خدمات قائمة — 92 خدمة حية تدرّ دخلًا ومعرفة.</a:t>
-            </a:r>
-            <a:endParaRPr lang="en-US" sz="1150" dirty="0"/>
+              <a:t>شركة خدمات قائمة: 92 خدمة مفعّلة تُقدَّم للعملاء فعليًا.</a:t>
+            </a:r>
+            <a:endParaRPr lang="en-US" sz="1100" dirty="0"/>
           </a:p>
         </p:txBody>
       </p:sp>
@@ -8597,7 +8597,7 @@
         </p:nvSpPr>
         <p:spPr>
           <a:xfrm>
-            <a:off x="548640" y="4343400"/>
+            <a:off x="548640" y="4434840"/>
             <a:ext cx="11091672" cy="1371600"/>
           </a:xfrm>
           <a:prstGeom prst="roundRect">
@@ -8631,7 +8631,7 @@
         </p:nvSpPr>
         <p:spPr>
           <a:xfrm>
-            <a:off x="868680" y="4526280"/>
+            <a:off x="868680" y="4590288"/>
             <a:ext cx="10424160" cy="457200"/>
           </a:xfrm>
           <a:prstGeom prst="rect">
@@ -8651,7 +8651,7 @@
               <a:buNone/>
             </a:pPr>
             <a:r>
-              <a:rPr lang="en-US" sz="1400" b="1" dirty="0">
+              <a:rPr lang="en-US" sz="1350" b="1" dirty="0">
                 <a:solidFill>
                   <a:srgbClr val="FECACA"/>
                 </a:solidFill>
@@ -8659,9 +8659,9 @@
                 <a:ea typeface="Arial" pitchFamily="34" charset="-122"/>
                 <a:cs typeface="Arial" pitchFamily="34" charset="-120"/>
               </a:rPr>
-              <a:t>ثم اصطدمنا بسقف شركات الخدمات: كل عميل جديد = موظف جديد يعرف المسارات. الإيراد مربوط بعدد الموظفين.</a:t>
-            </a:r>
-            <a:endParaRPr lang="en-US" sz="1400" dirty="0"/>
+              <a:t>ثم اصطدمتُ بحدّ النمو في نموذج الخدمات: كل عميل جديد يحتاج موظفًا جديدًا يتقن الإجراءات — فالإيراد مقيّد بحجم الفريق.</a:t>
+            </a:r>
+            <a:endParaRPr lang="en-US" sz="1350" dirty="0"/>
           </a:p>
         </p:txBody>
       </p:sp>
@@ -8673,7 +8673,7 @@
         </p:nvSpPr>
         <p:spPr>
           <a:xfrm>
-            <a:off x="868680" y="5074920"/>
+            <a:off x="868680" y="5138928"/>
             <a:ext cx="10424160" cy="457200"/>
           </a:xfrm>
           <a:prstGeom prst="rect">
@@ -8693,7 +8693,7 @@
               <a:buNone/>
             </a:pPr>
             <a:r>
-              <a:rPr lang="en-US" sz="1400" b="1" dirty="0">
+              <a:rPr lang="en-US" sz="1350" b="1" dirty="0">
                 <a:solidFill>
                   <a:srgbClr val="10B981"/>
                 </a:solidFill>
@@ -8701,9 +8701,9 @@
                 <a:ea typeface="Arial" pitchFamily="34" charset="-122"/>
                 <a:cs typeface="Arial" pitchFamily="34" charset="-120"/>
               </a:rPr>
-              <a:t>الفكرة: نرمّز هذه الخبرة في وكلاء ذكاء اصطناعي — فيتوسع الدخل بلا سقف التوظيف.</a:t>
-            </a:r>
-            <a:endParaRPr lang="en-US" sz="1400" dirty="0"/>
+              <a:t>الحل: نحوّل هذه الخبرة إلى وكلاء ذكاء اصطناعي — فينمو الإيراد دون أن يقيّده عدد الموظفين.</a:t>
+            </a:r>
+            <a:endParaRPr lang="en-US" sz="1350" dirty="0"/>
           </a:p>
         </p:txBody>
       </p:sp>
@@ -8901,7 +8901,7 @@
               <a:buNone/>
             </a:pPr>
             <a:r>
-              <a:rPr lang="en-US" sz="3000" b="1" dirty="0">
+              <a:rPr lang="en-US" sz="2900" b="1" dirty="0">
                 <a:solidFill>
                   <a:srgbClr val="1E293B"/>
                 </a:solidFill>
@@ -8909,9 +8909,9 @@
                 <a:ea typeface="Arial" pitchFamily="34" charset="-122"/>
                 <a:cs typeface="Arial" pitchFamily="34" charset="-120"/>
               </a:rPr>
-              <a:t>يراقب · ينبّه · يجهّز · تعتمد · ينفّذ</a:t>
-            </a:r>
-            <a:endParaRPr lang="en-US" sz="3000" dirty="0"/>
+              <a:t>يراقب · ينبّه · يجهّز · تعتمد أنت · ينفّذ</a:t>
+            </a:r>
+            <a:endParaRPr lang="en-US" sz="2900" dirty="0"/>
           </a:p>
         </p:txBody>
       </p:sp>
@@ -8940,7 +8940,7 @@
               <a:buNone/>
             </a:pPr>
             <a:r>
-              <a:rPr lang="en-US" sz="1400" dirty="0">
+              <a:rPr lang="en-US" sz="1350" dirty="0">
                 <a:solidFill>
                   <a:srgbClr val="64748B"/>
                 </a:solidFill>
@@ -8948,9 +8948,9 @@
                 <a:ea typeface="Arial" pitchFamily="34" charset="-122"/>
                 <a:cs typeface="Arial" pitchFamily="34" charset="-120"/>
               </a:rPr>
-              <a:t>Monitor · Alert · Prepare · You approve · Execute</a:t>
-            </a:r>
-            <a:endParaRPr lang="en-US" sz="1400" dirty="0"/>
+              <a:t>It monitors · alerts · prepares · you approve · it executes</a:t>
+            </a:r>
+            <a:endParaRPr lang="en-US" sz="1350" dirty="0"/>
           </a:p>
         </p:txBody>
       </p:sp>
@@ -8963,7 +8963,7 @@
         <p:spPr>
           <a:xfrm>
             <a:off x="548640" y="2331720"/>
-            <a:ext cx="1965960" cy="2286000"/>
+            <a:ext cx="1965960" cy="2331720"/>
           </a:xfrm>
           <a:prstGeom prst="roundRect">
             <a:avLst>
@@ -9055,8 +9055,8 @@
         </p:nvSpPr>
         <p:spPr>
           <a:xfrm>
-            <a:off x="658368" y="3200400"/>
-            <a:ext cx="1746504" cy="685800"/>
+            <a:off x="640080" y="3200400"/>
+            <a:ext cx="1783080" cy="658368"/>
           </a:xfrm>
           <a:prstGeom prst="rect">
             <a:avLst/>
@@ -9097,8 +9097,8 @@
         </p:nvSpPr>
         <p:spPr>
           <a:xfrm>
-            <a:off x="676656" y="3886200"/>
-            <a:ext cx="1709928" cy="685800"/>
+            <a:off x="667512" y="3858768"/>
+            <a:ext cx="1728216" cy="777240"/>
           </a:xfrm>
           <a:prstGeom prst="rect">
             <a:avLst/>
@@ -9117,7 +9117,7 @@
               <a:buNone/>
             </a:pPr>
             <a:r>
-              <a:rPr lang="en-US" sz="1100" dirty="0">
+              <a:rPr lang="en-US" sz="1050" dirty="0">
                 <a:solidFill>
                   <a:srgbClr val="334155"/>
                 </a:solidFill>
@@ -9125,9 +9125,9 @@
                 <a:ea typeface="Arial" pitchFamily="34" charset="-122"/>
                 <a:cs typeface="Arial" pitchFamily="34" charset="-120"/>
               </a:rPr>
-              <a:t>حالة منشأتك على المنصات يوميًا.</a:t>
-            </a:r>
-            <a:endParaRPr lang="en-US" sz="1100" dirty="0"/>
+              <a:t>حالة منشأتك يوميًا: نطاقات، توثيق العقود، هويات مقيم، رخص العمل، نظام حماية الأجور.</a:t>
+            </a:r>
+            <a:endParaRPr lang="en-US" sz="1050" dirty="0"/>
           </a:p>
         </p:txBody>
       </p:sp>
@@ -9179,7 +9179,7 @@
         <p:spPr>
           <a:xfrm>
             <a:off x="2807208" y="2331720"/>
-            <a:ext cx="1965960" cy="2286000"/>
+            <a:ext cx="1965960" cy="2331720"/>
           </a:xfrm>
           <a:prstGeom prst="roundRect">
             <a:avLst>
@@ -9271,8 +9271,8 @@
         </p:nvSpPr>
         <p:spPr>
           <a:xfrm>
-            <a:off x="2916936" y="3200400"/>
-            <a:ext cx="1746504" cy="685800"/>
+            <a:off x="2898648" y="3200400"/>
+            <a:ext cx="1783080" cy="658368"/>
           </a:xfrm>
           <a:prstGeom prst="rect">
             <a:avLst/>
@@ -9313,8 +9313,8 @@
         </p:nvSpPr>
         <p:spPr>
           <a:xfrm>
-            <a:off x="2935224" y="3886200"/>
-            <a:ext cx="1709928" cy="685800"/>
+            <a:off x="2926080" y="3858768"/>
+            <a:ext cx="1728216" cy="777240"/>
           </a:xfrm>
           <a:prstGeom prst="rect">
             <a:avLst/>
@@ -9333,7 +9333,7 @@
               <a:buNone/>
             </a:pPr>
             <a:r>
-              <a:rPr lang="en-US" sz="1100" dirty="0">
+              <a:rPr lang="en-US" sz="1050" dirty="0">
                 <a:solidFill>
                   <a:srgbClr val="334155"/>
                 </a:solidFill>
@@ -9341,9 +9341,9 @@
                 <a:ea typeface="Arial" pitchFamily="34" charset="-122"/>
                 <a:cs typeface="Arial" pitchFamily="34" charset="-120"/>
               </a:rPr>
-              <a:t>بالأثر والمهلة — لا مجرد إشعار.</a:t>
-            </a:r>
-            <a:endParaRPr lang="en-US" sz="1100" dirty="0"/>
+              <a:t>بالأثر والمهلة — لا بمجرد إشعار.</a:t>
+            </a:r>
+            <a:endParaRPr lang="en-US" sz="1050" dirty="0"/>
           </a:p>
         </p:txBody>
       </p:sp>
@@ -9395,7 +9395,7 @@
         <p:spPr>
           <a:xfrm>
             <a:off x="5065776" y="2331720"/>
-            <a:ext cx="1965960" cy="2286000"/>
+            <a:ext cx="1965960" cy="2331720"/>
           </a:xfrm>
           <a:prstGeom prst="roundRect">
             <a:avLst>
@@ -9487,8 +9487,8 @@
         </p:nvSpPr>
         <p:spPr>
           <a:xfrm>
-            <a:off x="5175504" y="3200400"/>
-            <a:ext cx="1746504" cy="685800"/>
+            <a:off x="5157216" y="3200400"/>
+            <a:ext cx="1783080" cy="658368"/>
           </a:xfrm>
           <a:prstGeom prst="rect">
             <a:avLst/>
@@ -9529,8 +9529,8 @@
         </p:nvSpPr>
         <p:spPr>
           <a:xfrm>
-            <a:off x="5193792" y="3886200"/>
-            <a:ext cx="1709928" cy="685800"/>
+            <a:off x="5184648" y="3858768"/>
+            <a:ext cx="1728216" cy="777240"/>
           </a:xfrm>
           <a:prstGeom prst="rect">
             <a:avLst/>
@@ -9549,7 +9549,7 @@
               <a:buNone/>
             </a:pPr>
             <a:r>
-              <a:rPr lang="en-US" sz="1100" dirty="0">
+              <a:rPr lang="en-US" sz="1050" dirty="0">
                 <a:solidFill>
                   <a:srgbClr val="334155"/>
                 </a:solidFill>
@@ -9557,9 +9557,9 @@
                 <a:ea typeface="Arial" pitchFamily="34" charset="-122"/>
                 <a:cs typeface="Arial" pitchFamily="34" charset="-120"/>
               </a:rPr>
-              <a:t>مَن، ماذا، الرسوم، النموذج، الخطوات.</a:t>
-            </a:r>
-            <a:endParaRPr lang="en-US" sz="1100" dirty="0"/>
+              <a:t>مَن، وماذا، والرسوم، والنموذج، والخطوات.</a:t>
+            </a:r>
+            <a:endParaRPr lang="en-US" sz="1050" dirty="0"/>
           </a:p>
         </p:txBody>
       </p:sp>
@@ -9611,7 +9611,7 @@
         <p:spPr>
           <a:xfrm>
             <a:off x="7324344" y="2331720"/>
-            <a:ext cx="1965960" cy="2286000"/>
+            <a:ext cx="1965960" cy="2331720"/>
           </a:xfrm>
           <a:prstGeom prst="roundRect">
             <a:avLst>
@@ -9703,8 +9703,8 @@
         </p:nvSpPr>
         <p:spPr>
           <a:xfrm>
-            <a:off x="7434072" y="3200400"/>
-            <a:ext cx="1746504" cy="685800"/>
+            <a:off x="7415784" y="3200400"/>
+            <a:ext cx="1783080" cy="658368"/>
           </a:xfrm>
           <a:prstGeom prst="rect">
             <a:avLst/>
@@ -9731,7 +9731,7 @@
                 <a:ea typeface="Arial" pitchFamily="34" charset="-122"/>
                 <a:cs typeface="Arial" pitchFamily="34" charset="-120"/>
               </a:rPr>
-              <a:t>المالك يعتمد</a:t>
+              <a:t>تعتمد أنت</a:t>
             </a:r>
             <a:endParaRPr lang="en-US" sz="1400" dirty="0"/>
           </a:p>
@@ -9745,8 +9745,8 @@
         </p:nvSpPr>
         <p:spPr>
           <a:xfrm>
-            <a:off x="7452360" y="3886200"/>
-            <a:ext cx="1709928" cy="685800"/>
+            <a:off x="7443216" y="3858768"/>
+            <a:ext cx="1728216" cy="777240"/>
           </a:xfrm>
           <a:prstGeom prst="rect">
             <a:avLst/>
@@ -9765,7 +9765,7 @@
               <a:buNone/>
             </a:pPr>
             <a:r>
-              <a:rPr lang="en-US" sz="1100" dirty="0">
+              <a:rPr lang="en-US" sz="1050" dirty="0">
                 <a:solidFill>
                   <a:srgbClr val="A7F3D0"/>
                 </a:solidFill>
@@ -9773,9 +9773,9 @@
                 <a:ea typeface="Arial" pitchFamily="34" charset="-122"/>
                 <a:cs typeface="Arial" pitchFamily="34" charset="-120"/>
               </a:rPr>
-              <a:t>بضغطة واحدة — القرار دائمًا بيدك.</a:t>
-            </a:r>
-            <a:endParaRPr lang="en-US" sz="1100" dirty="0"/>
+              <a:t>بضغطة واحدة — القرار دائمًا بيد المالك.</a:t>
+            </a:r>
+            <a:endParaRPr lang="en-US" sz="1050" dirty="0"/>
           </a:p>
         </p:txBody>
       </p:sp>
@@ -9827,7 +9827,7 @@
         <p:spPr>
           <a:xfrm>
             <a:off x="9582912" y="2331720"/>
-            <a:ext cx="1965960" cy="2286000"/>
+            <a:ext cx="1965960" cy="2331720"/>
           </a:xfrm>
           <a:prstGeom prst="roundRect">
             <a:avLst>
@@ -9919,8 +9919,8 @@
         </p:nvSpPr>
         <p:spPr>
           <a:xfrm>
-            <a:off x="9692640" y="3200400"/>
-            <a:ext cx="1746504" cy="685800"/>
+            <a:off x="9674352" y="3200400"/>
+            <a:ext cx="1783080" cy="658368"/>
           </a:xfrm>
           <a:prstGeom prst="rect">
             <a:avLst/>
@@ -9947,7 +9947,7 @@
                 <a:ea typeface="Arial" pitchFamily="34" charset="-122"/>
                 <a:cs typeface="Arial" pitchFamily="34" charset="-120"/>
               </a:rPr>
-              <a:t>ينفّذ ويسجّل</a:t>
+              <a:t>ينفّذ ويوثّق</a:t>
             </a:r>
             <a:endParaRPr lang="en-US" sz="1400" dirty="0"/>
           </a:p>
@@ -9961,8 +9961,8 @@
         </p:nvSpPr>
         <p:spPr>
           <a:xfrm>
-            <a:off x="9710928" y="3886200"/>
-            <a:ext cx="1709928" cy="685800"/>
+            <a:off x="9701784" y="3858768"/>
+            <a:ext cx="1728216" cy="777240"/>
           </a:xfrm>
           <a:prstGeom prst="rect">
             <a:avLst/>
@@ -9981,7 +9981,7 @@
               <a:buNone/>
             </a:pPr>
             <a:r>
-              <a:rPr lang="en-US" sz="1100" dirty="0">
+              <a:rPr lang="en-US" sz="1050" dirty="0">
                 <a:solidFill>
                   <a:srgbClr val="334155"/>
                 </a:solidFill>
@@ -9989,9 +9989,9 @@
                 <a:ea typeface="Arial" pitchFamily="34" charset="-122"/>
                 <a:cs typeface="Arial" pitchFamily="34" charset="-120"/>
               </a:rPr>
-              <a:t>كل خطوة في سجل تدقيق: من؟ متى؟ ماذا؟</a:t>
-            </a:r>
-            <a:endParaRPr lang="en-US" sz="1100" dirty="0"/>
+              <a:t>كل خطوة في سجل تدقيق: من؟ ومتى؟ وماذا؟</a:t>
+            </a:r>
+            <a:endParaRPr lang="en-US" sz="1050" dirty="0"/>
           </a:p>
         </p:txBody>
       </p:sp>
@@ -10003,7 +10003,7 @@
         </p:nvSpPr>
         <p:spPr>
           <a:xfrm>
-            <a:off x="548640" y="4983480"/>
+            <a:off x="548640" y="5029200"/>
             <a:ext cx="11091672" cy="868680"/>
           </a:xfrm>
           <a:prstGeom prst="roundRect">
@@ -10037,7 +10037,7 @@
         </p:nvSpPr>
         <p:spPr>
           <a:xfrm>
-            <a:off x="868680" y="5184648"/>
+            <a:off x="868680" y="5230368"/>
             <a:ext cx="10424160" cy="502920"/>
           </a:xfrm>
           <a:prstGeom prst="rect">
@@ -10065,7 +10065,7 @@
                 <a:ea typeface="Arial" pitchFamily="34" charset="-122"/>
                 <a:cs typeface="Arial" pitchFamily="34" charset="-120"/>
               </a:rPr>
-              <a:t>الحوكمة: لا كلمات مرور ولا رموز تحقق (OTP) مخزّنة — التفويض بيد المالك دائمًا.</a:t>
+              <a:t>لا نطلب ولا نخزّن كلمات المرور أو رموز التحقق لمرة واحدة (OTP) — التفويض بيد المالك دائمًا.</a:t>
             </a:r>
             <a:endParaRPr lang="en-US" sz="1400" dirty="0"/>
           </a:p>
@@ -10234,7 +10234,7 @@
                 <a:ea typeface="Arial" pitchFamily="34" charset="-122"/>
                 <a:cs typeface="Arial" pitchFamily="34" charset="-120"/>
               </a:rPr>
-              <a:t>LIVE WALKTHROUGH · الديمو</a:t>
+              <a:t>WALKTHROUGH · العرض التوضيحي</a:t>
             </a:r>
             <a:endParaRPr lang="en-US" sz="1100" dirty="0"/>
           </a:p>
@@ -10265,7 +10265,7 @@
               <a:buNone/>
             </a:pPr>
             <a:r>
-              <a:rPr lang="en-US" sz="3000" b="1" dirty="0">
+              <a:rPr lang="en-US" sz="2900" b="1" dirty="0">
                 <a:solidFill>
                   <a:srgbClr val="1E293B"/>
                 </a:solidFill>
@@ -10273,9 +10273,9 @@
                 <a:ea typeface="Arial" pitchFamily="34" charset="-122"/>
                 <a:cs typeface="Arial" pitchFamily="34" charset="-120"/>
               </a:rPr>
-              <a:t>قصة تنبيه واحد: نطاقات + حماية الأجور</a:t>
-            </a:r>
-            <a:endParaRPr lang="en-US" sz="3000" dirty="0"/>
+              <a:t>تنبيه واحد… من الرصد إلى الإغلاق</a:t>
+            </a:r>
+            <a:endParaRPr lang="en-US" sz="2900" dirty="0"/>
           </a:p>
         </p:txBody>
       </p:sp>
@@ -10304,7 +10304,7 @@
               <a:buNone/>
             </a:pPr>
             <a:r>
-              <a:rPr lang="en-US" sz="1400" dirty="0">
+              <a:rPr lang="en-US" sz="1350" dirty="0">
                 <a:solidFill>
                   <a:srgbClr val="64748B"/>
                 </a:solidFill>
@@ -10312,9 +10312,9 @@
                 <a:ea typeface="Arial" pitchFamily="34" charset="-122"/>
                 <a:cs typeface="Arial" pitchFamily="34" charset="-120"/>
               </a:rPr>
-              <a:t>One alert, end-to-end: Nitaqat + WPS</a:t>
-            </a:r>
-            <a:endParaRPr lang="en-US" sz="1400" dirty="0"/>
+              <a:t>One alert, from detection to closure: Nitaqat &amp; wage protection</a:t>
+            </a:r>
+            <a:endParaRPr lang="en-US" sz="1350" dirty="0"/>
           </a:p>
         </p:txBody>
       </p:sp>
@@ -10326,12 +10326,12 @@
         </p:nvSpPr>
         <p:spPr>
           <a:xfrm>
-            <a:off x="4937760" y="2240280"/>
-            <a:ext cx="6720840" cy="3977640"/>
+            <a:off x="4709160" y="2194560"/>
+            <a:ext cx="6949440" cy="4069080"/>
           </a:xfrm>
           <a:prstGeom prst="roundRect">
             <a:avLst>
-              <a:gd name="adj" fmla="val 2759"/>
+              <a:gd name="adj" fmla="val 2697"/>
             </a:avLst>
           </a:prstGeom>
           <a:solidFill>
@@ -10353,8 +10353,8 @@
         </p:nvSpPr>
         <p:spPr>
           <a:xfrm>
-            <a:off x="4937760" y="2240280"/>
-            <a:ext cx="6720840" cy="457200"/>
+            <a:off x="4709160" y="2194560"/>
+            <a:ext cx="6949440" cy="457200"/>
           </a:xfrm>
           <a:prstGeom prst="roundRect">
             <a:avLst>
@@ -10375,8 +10375,8 @@
         </p:nvSpPr>
         <p:spPr>
           <a:xfrm>
-            <a:off x="5120640" y="2240280"/>
-            <a:ext cx="6355080" cy="457200"/>
+            <a:off x="4892040" y="2194560"/>
+            <a:ext cx="6583680" cy="457200"/>
           </a:xfrm>
           <a:prstGeom prst="rect">
             <a:avLst/>
@@ -10414,12 +10414,12 @@
         </p:nvSpPr>
         <p:spPr>
           <a:xfrm>
-            <a:off x="6309360" y="2834640"/>
-            <a:ext cx="5120640" cy="749808"/>
+            <a:off x="6035040" y="2761488"/>
+            <a:ext cx="5394960" cy="868680"/>
           </a:xfrm>
           <a:prstGeom prst="roundRect">
             <a:avLst>
-              <a:gd name="adj" fmla="val 9756"/>
+              <a:gd name="adj" fmla="val 8421"/>
             </a:avLst>
           </a:prstGeom>
           <a:solidFill>
@@ -10441,8 +10441,8 @@
         </p:nvSpPr>
         <p:spPr>
           <a:xfrm>
-            <a:off x="6446520" y="2880360"/>
-            <a:ext cx="4846320" cy="658368"/>
+            <a:off x="6172200" y="2798064"/>
+            <a:ext cx="5120640" cy="795528"/>
           </a:xfrm>
           <a:prstGeom prst="rect">
             <a:avLst/>
@@ -10456,12 +10456,12 @@
           <a:p>
             <a:pPr rtl="1" algn="r" indent="0" marL="0">
               <a:lnSpc>
-                <a:spcPct val="102000"/>
+                <a:spcPct val="100000"/>
               </a:lnSpc>
               <a:buNone/>
             </a:pPr>
             <a:r>
-              <a:rPr lang="en-US" sz="1050" dirty="0">
+              <a:rPr lang="en-US" sz="1000" dirty="0">
                 <a:solidFill>
                   <a:srgbClr val="1E293B"/>
                 </a:solidFill>
@@ -10469,9 +10469,9 @@
                 <a:ea typeface="Arial" pitchFamily="34" charset="-122"/>
                 <a:cs typeface="Arial" pitchFamily="34" charset="-120"/>
               </a:rPr>
-              <a:t>⚠️ باستقالة أحمد (سعودي) وخروج راجيش النهائي المجدول، ستنزل نسبتك خلال 3 أسابيع إلى أخضر منخفض — سيتوقف إصدار التأشيرات.</a:t>
-            </a:r>
-            <a:endParaRPr lang="en-US" sz="1050" dirty="0"/>
+              <a:t>تنبيه: باستقالة أحمد (سعودي)، بدأ متوسط نسبة التوطين لديكم — المحتسب على آخر 26 أسبوعًا — بالانخفاض. المتوقع دخولكم النطاق الأخضر المنخفض خلال 3 أسابيع، وعندها يتوقف إصدار التأشيرات الجديدة.</a:t>
+            </a:r>
+            <a:endParaRPr lang="en-US" sz="1000" dirty="0"/>
           </a:p>
         </p:txBody>
       </p:sp>
@@ -10483,12 +10483,12 @@
         </p:nvSpPr>
         <p:spPr>
           <a:xfrm>
-            <a:off x="6309360" y="3712464"/>
-            <a:ext cx="5120640" cy="749808"/>
+            <a:off x="6035040" y="3739896"/>
+            <a:ext cx="5394960" cy="868680"/>
           </a:xfrm>
           <a:prstGeom prst="roundRect">
             <a:avLst>
-              <a:gd name="adj" fmla="val 9756"/>
+              <a:gd name="adj" fmla="val 8421"/>
             </a:avLst>
           </a:prstGeom>
           <a:solidFill>
@@ -10510,8 +10510,8 @@
         </p:nvSpPr>
         <p:spPr>
           <a:xfrm>
-            <a:off x="6446520" y="3758184"/>
-            <a:ext cx="4846320" cy="658368"/>
+            <a:off x="6172200" y="3776472"/>
+            <a:ext cx="5120640" cy="795528"/>
           </a:xfrm>
           <a:prstGeom prst="rect">
             <a:avLst/>
@@ -10525,12 +10525,12 @@
           <a:p>
             <a:pPr rtl="1" algn="r" indent="0" marL="0">
               <a:lnSpc>
-                <a:spcPct val="102000"/>
+                <a:spcPct val="100000"/>
               </a:lnSpc>
               <a:buNone/>
             </a:pPr>
             <a:r>
-              <a:rPr lang="en-US" sz="1050" dirty="0">
+              <a:rPr lang="en-US" sz="1000" dirty="0">
                 <a:solidFill>
                   <a:srgbClr val="1E293B"/>
                 </a:solidFill>
@@ -10538,9 +10538,9 @@
                 <a:ea typeface="Arial" pitchFamily="34" charset="-122"/>
                 <a:cs typeface="Arial" pitchFamily="34" charset="-120"/>
               </a:rPr>
-              <a:t>خياراتك: (أ) توظيف سعودي — جهّزت 3 مرشحين وخيار أجير · (ب) تأجيل الخروج شهرًا. أيهما تعتمد؟</a:t>
-            </a:r>
-            <a:endParaRPr lang="en-US" sz="1050" dirty="0"/>
+              <a:t>خياراتكم: (أ) توظيف سعودي بأجر 4,000 ريال فأكثر — يُحتسب عاملًا كاملًا وجهّزتُ 3 مرشحين · (ب) دوام جزئي — يُحتسب نصف عامل · (ج) تقديم موعد الخروج النهائي المجدول — مغادرة الوافد ترفع النسبة فورًا.</a:t>
+            </a:r>
+            <a:endParaRPr lang="en-US" sz="1000" dirty="0"/>
           </a:p>
         </p:txBody>
       </p:sp>
@@ -10552,12 +10552,12 @@
         </p:nvSpPr>
         <p:spPr>
           <a:xfrm>
-            <a:off x="5166360" y="4590288"/>
-            <a:ext cx="2286000" cy="457200"/>
+            <a:off x="4937760" y="4718304"/>
+            <a:ext cx="2103120" cy="411480"/>
           </a:xfrm>
           <a:prstGeom prst="roundRect">
             <a:avLst>
-              <a:gd name="adj" fmla="val 16000"/>
+              <a:gd name="adj" fmla="val 17778"/>
             </a:avLst>
           </a:prstGeom>
           <a:solidFill>
@@ -10579,8 +10579,8 @@
         </p:nvSpPr>
         <p:spPr>
           <a:xfrm>
-            <a:off x="5303520" y="4636008"/>
-            <a:ext cx="2011680" cy="365760"/>
+            <a:off x="5074920" y="4754880"/>
+            <a:ext cx="1828800" cy="338328"/>
           </a:xfrm>
           <a:prstGeom prst="rect">
             <a:avLst/>
@@ -10594,12 +10594,12 @@
           <a:p>
             <a:pPr rtl="1" algn="r" indent="0" marL="0">
               <a:lnSpc>
-                <a:spcPct val="102000"/>
+                <a:spcPct val="100000"/>
               </a:lnSpc>
               <a:buNone/>
             </a:pPr>
             <a:r>
-              <a:rPr lang="en-US" sz="1050" dirty="0">
+              <a:rPr lang="en-US" sz="1000" dirty="0">
                 <a:solidFill>
                   <a:srgbClr val="1E293B"/>
                 </a:solidFill>
@@ -10609,7 +10609,7 @@
               </a:rPr>
               <a:t>الخيار (أ) ✓</a:t>
             </a:r>
-            <a:endParaRPr lang="en-US" sz="1050" dirty="0"/>
+            <a:endParaRPr lang="en-US" sz="1000" dirty="0"/>
           </a:p>
         </p:txBody>
       </p:sp>
@@ -10621,12 +10621,12 @@
         </p:nvSpPr>
         <p:spPr>
           <a:xfrm>
-            <a:off x="6309360" y="5175504"/>
-            <a:ext cx="5120640" cy="749808"/>
+            <a:off x="6035040" y="5239512"/>
+            <a:ext cx="5394960" cy="731520"/>
           </a:xfrm>
           <a:prstGeom prst="roundRect">
             <a:avLst>
-              <a:gd name="adj" fmla="val 9756"/>
+              <a:gd name="adj" fmla="val 10000"/>
             </a:avLst>
           </a:prstGeom>
           <a:solidFill>
@@ -10648,8 +10648,8 @@
         </p:nvSpPr>
         <p:spPr>
           <a:xfrm>
-            <a:off x="6446520" y="5221224"/>
-            <a:ext cx="4846320" cy="658368"/>
+            <a:off x="6172200" y="5276088"/>
+            <a:ext cx="5120640" cy="658368"/>
           </a:xfrm>
           <a:prstGeom prst="rect">
             <a:avLst/>
@@ -10663,12 +10663,12 @@
           <a:p>
             <a:pPr rtl="1" algn="r" indent="0" marL="0">
               <a:lnSpc>
-                <a:spcPct val="102000"/>
+                <a:spcPct val="100000"/>
               </a:lnSpc>
               <a:buNone/>
             </a:pPr>
             <a:r>
-              <a:rPr lang="en-US" sz="1050" dirty="0">
+              <a:rPr lang="en-US" sz="1000" dirty="0">
                 <a:solidFill>
                   <a:srgbClr val="1E293B"/>
                 </a:solidFill>
@@ -10676,9 +10676,9 @@
                 <a:ea typeface="Arial" pitchFamily="34" charset="-122"/>
                 <a:cs typeface="Arial" pitchFamily="34" charset="-120"/>
               </a:rPr>
-              <a:t>تم. جهّزت العرض والعقد للتوثيق في قوى وأرسلته لاعتمادك. أتابع النسبة يوميًا — وسُجّل كل شيء في سجل التدقيق.</a:t>
-            </a:r>
-            <a:endParaRPr lang="en-US" sz="1050" dirty="0"/>
+              <a:t>تم. جهّزتُ عرض العمل والعقد لتوثيقه في قوى وأرسلتهما لاعتمادكم. أتابع المتوسط أسبوعيًا حتى عودتكم إلى النطاق الآمن — وكل خطوة مسجّلة في سجل التدقيق.</a:t>
+            </a:r>
+            <a:endParaRPr lang="en-US" sz="1000" dirty="0"/>
           </a:p>
         </p:txBody>
       </p:sp>
@@ -10690,12 +10690,12 @@
         </p:nvSpPr>
         <p:spPr>
           <a:xfrm>
-            <a:off x="548640" y="2240280"/>
-            <a:ext cx="4069080" cy="3977640"/>
+            <a:off x="548640" y="2194560"/>
+            <a:ext cx="3886200" cy="4069080"/>
           </a:xfrm>
           <a:prstGeom prst="roundRect">
             <a:avLst>
-              <a:gd name="adj" fmla="val 2069"/>
+              <a:gd name="adj" fmla="val 2118"/>
             </a:avLst>
           </a:prstGeom>
           <a:solidFill>
@@ -10724,8 +10724,8 @@
         </p:nvSpPr>
         <p:spPr>
           <a:xfrm>
-            <a:off x="822960" y="2468880"/>
-            <a:ext cx="3566160" cy="411480"/>
+            <a:off x="804672" y="2395728"/>
+            <a:ext cx="3383280" cy="457200"/>
           </a:xfrm>
           <a:prstGeom prst="rect">
             <a:avLst/>
@@ -10744,7 +10744,7 @@
               <a:buNone/>
             </a:pPr>
             <a:r>
-              <a:rPr lang="en-US" sz="1500" b="1" dirty="0">
+              <a:rPr lang="en-US" sz="1400" b="1" dirty="0">
                 <a:solidFill>
                   <a:srgbClr val="1E293B"/>
                 </a:solidFill>
@@ -10752,9 +10752,9 @@
                 <a:ea typeface="Arial" pitchFamily="34" charset="-122"/>
                 <a:cs typeface="Arial" pitchFamily="34" charset="-120"/>
               </a:rPr>
-              <a:t>حالة النطاق — قبل وبعد</a:t>
-            </a:r>
-            <a:endParaRPr lang="en-US" sz="1500" dirty="0"/>
+              <a:t>متوسط نسبة التوطين — قبل وبعد</a:t>
+            </a:r>
+            <a:endParaRPr lang="en-US" sz="1400" dirty="0"/>
           </a:p>
         </p:txBody>
       </p:sp>
@@ -10766,12 +10766,12 @@
         </p:nvSpPr>
         <p:spPr>
           <a:xfrm>
-            <a:off x="822960" y="3063240"/>
-            <a:ext cx="3520440" cy="685800"/>
+            <a:off x="804672" y="3017520"/>
+            <a:ext cx="3364992" cy="713232"/>
           </a:xfrm>
           <a:prstGeom prst="roundRect">
             <a:avLst>
-              <a:gd name="adj" fmla="val 10667"/>
+              <a:gd name="adj" fmla="val 10256"/>
             </a:avLst>
           </a:prstGeom>
           <a:solidFill>
@@ -10793,8 +10793,8 @@
         </p:nvSpPr>
         <p:spPr>
           <a:xfrm>
-            <a:off x="1005840" y="3172968"/>
-            <a:ext cx="3200400" cy="502920"/>
+            <a:off x="960120" y="3108960"/>
+            <a:ext cx="3063240" cy="548640"/>
           </a:xfrm>
           <a:prstGeom prst="rect">
             <a:avLst/>
@@ -10813,17 +10813,17 @@
               <a:buNone/>
             </a:pPr>
             <a:r>
-              <a:rPr lang="en-US" sz="1250" b="1" dirty="0">
-                <a:solidFill>
-                  <a:srgbClr val="DC2626"/>
-                </a:solidFill>
-                <a:latin typeface="Arial" pitchFamily="34" charset="0"/>
-                <a:ea typeface="Arial" pitchFamily="34" charset="-122"/>
-                <a:cs typeface="Arial" pitchFamily="34" charset="-120"/>
-              </a:rPr>
-              <a:t>بدون تدخل: أخضر منخفض ← أحمر</a:t>
-            </a:r>
-            <a:endParaRPr lang="en-US" sz="1250" dirty="0"/>
+              <a:rPr lang="en-US" sz="1150" b="1" dirty="0">
+                <a:solidFill>
+                  <a:srgbClr val="B91C1C"/>
+                </a:solidFill>
+                <a:latin typeface="Arial" pitchFamily="34" charset="0"/>
+                <a:ea typeface="Arial" pitchFamily="34" charset="-122"/>
+                <a:cs typeface="Arial" pitchFamily="34" charset="-120"/>
+              </a:rPr>
+              <a:t>بلا تدخّل: الأخضر المنخفض ثم الأحمر</a:t>
+            </a:r>
+            <a:endParaRPr lang="en-US" sz="1150" dirty="0"/>
           </a:p>
         </p:txBody>
       </p:sp>
@@ -10835,12 +10835,12 @@
         </p:nvSpPr>
         <p:spPr>
           <a:xfrm>
-            <a:off x="822960" y="3977640"/>
-            <a:ext cx="3520440" cy="685800"/>
+            <a:off x="804672" y="3931920"/>
+            <a:ext cx="3364992" cy="713232"/>
           </a:xfrm>
           <a:prstGeom prst="roundRect">
             <a:avLst>
-              <a:gd name="adj" fmla="val 10667"/>
+              <a:gd name="adj" fmla="val 10256"/>
             </a:avLst>
           </a:prstGeom>
           <a:solidFill>
@@ -10862,8 +10862,8 @@
         </p:nvSpPr>
         <p:spPr>
           <a:xfrm>
-            <a:off x="1005840" y="4087368"/>
-            <a:ext cx="3200400" cy="502920"/>
+            <a:off x="960120" y="4023360"/>
+            <a:ext cx="3063240" cy="548640"/>
           </a:xfrm>
           <a:prstGeom prst="rect">
             <a:avLst/>
@@ -10882,17 +10882,17 @@
               <a:buNone/>
             </a:pPr>
             <a:r>
-              <a:rPr lang="en-US" sz="1250" b="1" dirty="0">
-                <a:solidFill>
-                  <a:srgbClr val="10B981"/>
-                </a:solidFill>
-                <a:latin typeface="Arial" pitchFamily="34" charset="0"/>
-                <a:ea typeface="Arial" pitchFamily="34" charset="-122"/>
-                <a:cs typeface="Arial" pitchFamily="34" charset="-120"/>
-              </a:rPr>
-              <a:t>بعد الإجراء: أخضر متوسط ✓</a:t>
-            </a:r>
-            <a:endParaRPr lang="en-US" sz="1250" dirty="0"/>
+              <a:rPr lang="en-US" sz="1150" b="1" dirty="0">
+                <a:solidFill>
+                  <a:srgbClr val="065F46"/>
+                </a:solidFill>
+                <a:latin typeface="Arial" pitchFamily="34" charset="0"/>
+                <a:ea typeface="Arial" pitchFamily="34" charset="-122"/>
+                <a:cs typeface="Arial" pitchFamily="34" charset="-120"/>
+              </a:rPr>
+              <a:t>بعد المعالجة: استقرار في الأخضر المتوسط ✓</a:t>
+            </a:r>
+            <a:endParaRPr lang="en-US" sz="1150" dirty="0"/>
           </a:p>
         </p:txBody>
       </p:sp>
@@ -10904,8 +10904,8 @@
         </p:nvSpPr>
         <p:spPr>
           <a:xfrm>
-            <a:off x="822960" y="5120640"/>
-            <a:ext cx="3566160" cy="822960"/>
+            <a:off x="804672" y="5074920"/>
+            <a:ext cx="3383280" cy="868680"/>
           </a:xfrm>
           <a:prstGeom prst="rect">
             <a:avLst/>
@@ -10924,7 +10924,7 @@
               <a:buNone/>
             </a:pPr>
             <a:r>
-              <a:rPr lang="en-US" sz="1300" b="1" dirty="0">
+              <a:rPr lang="en-US" sz="1250" b="1" dirty="0">
                 <a:solidFill>
                   <a:srgbClr val="0066CC"/>
                 </a:solidFill>
@@ -10932,9 +10932,9 @@
                 <a:ea typeface="Arial" pitchFamily="34" charset="-122"/>
                 <a:cs typeface="Arial" pitchFamily="34" charset="-120"/>
               </a:rPr>
-              <a:t>من ثلاثة أيام بعد المشكلة… إلى ثلاثة أسابيع قبلها.</a:t>
-            </a:r>
-            <a:endParaRPr lang="en-US" sz="1300" dirty="0"/>
+              <a:t>من اكتشافٍ متأخر بعد المخالفة… إلى إنذارٍ مبكر قبلها بأسابيع.</a:t>
+            </a:r>
+            <a:endParaRPr lang="en-US" sz="1250" dirty="0"/>
           </a:p>
         </p:txBody>
       </p:sp>
@@ -11132,7 +11132,7 @@
               <a:buNone/>
             </a:pPr>
             <a:r>
-              <a:rPr lang="en-US" sz="3000" b="1" dirty="0">
+              <a:rPr lang="en-US" sz="2900" b="1" dirty="0">
                 <a:solidFill>
                   <a:srgbClr val="1E293B"/>
                 </a:solidFill>
@@ -11140,9 +11140,9 @@
                 <a:ea typeface="Arial" pitchFamily="34" charset="-122"/>
                 <a:cs typeface="Arial" pitchFamily="34" charset="-120"/>
               </a:rPr>
-              <a:t>ثلاثة أسباب تجعل التوقيت مثاليًا</a:t>
-            </a:r>
-            <a:endParaRPr lang="en-US" sz="3000" dirty="0"/>
+              <a:t>ثلاث قوى تدفع السوق نحونا — الآن</a:t>
+            </a:r>
+            <a:endParaRPr lang="en-US" sz="2900" dirty="0"/>
           </a:p>
         </p:txBody>
       </p:sp>
@@ -11171,7 +11171,7 @@
               <a:buNone/>
             </a:pPr>
             <a:r>
-              <a:rPr lang="en-US" sz="1400" dirty="0">
+              <a:rPr lang="en-US" sz="1350" dirty="0">
                 <a:solidFill>
                   <a:srgbClr val="64748B"/>
                 </a:solidFill>
@@ -11179,9 +11179,9 @@
                 <a:ea typeface="Arial" pitchFamily="34" charset="-122"/>
                 <a:cs typeface="Arial" pitchFamily="34" charset="-120"/>
               </a:rPr>
-              <a:t>Three reasons this is the moment</a:t>
-            </a:r>
-            <a:endParaRPr lang="en-US" sz="1400" dirty="0"/>
+              <a:t>Three forces are pushing the market toward us — now</a:t>
+            </a:r>
+            <a:endParaRPr lang="en-US" sz="1350" dirty="0"/>
           </a:p>
         </p:txBody>
       </p:sp>
@@ -11194,11 +11194,11 @@
         <p:spPr>
           <a:xfrm>
             <a:off x="548640" y="2331720"/>
-            <a:ext cx="3429000" cy="2286000"/>
+            <a:ext cx="3429000" cy="2331720"/>
           </a:xfrm>
           <a:prstGeom prst="roundRect">
             <a:avLst>
-              <a:gd name="adj" fmla="val 3600"/>
+              <a:gd name="adj" fmla="val 3529"/>
             </a:avLst>
           </a:prstGeom>
           <a:solidFill>
@@ -11306,7 +11306,7 @@
               <a:buNone/>
             </a:pPr>
             <a:r>
-              <a:rPr lang="en-US" sz="1550" b="1" dirty="0">
+              <a:rPr lang="en-US" sz="1500" b="1" dirty="0">
                 <a:solidFill>
                   <a:srgbClr val="0066CC"/>
                 </a:solidFill>
@@ -11314,9 +11314,9 @@
                 <a:ea typeface="Arial" pitchFamily="34" charset="-122"/>
                 <a:cs typeface="Arial" pitchFamily="34" charset="-120"/>
               </a:rPr>
-              <a:t>التشديد التنظيمي يتصاعد</a:t>
-            </a:r>
-            <a:endParaRPr lang="en-US" sz="1550" dirty="0"/>
+              <a:t>الأنظمة تشتد عامًا بعد عام</a:t>
+            </a:r>
+            <a:endParaRPr lang="en-US" sz="1500" dirty="0"/>
           </a:p>
         </p:txBody>
       </p:sp>
@@ -11328,8 +11328,8 @@
         </p:nvSpPr>
         <p:spPr>
           <a:xfrm>
-            <a:off x="804672" y="3383280"/>
-            <a:ext cx="2971800" cy="1143000"/>
+            <a:off x="804672" y="3401568"/>
+            <a:ext cx="2971800" cy="1188720"/>
           </a:xfrm>
           <a:prstGeom prst="rect">
             <a:avLst/>
@@ -11348,7 +11348,7 @@
               <a:buNone/>
             </a:pPr>
             <a:r>
-              <a:rPr lang="en-US" sz="1200" dirty="0">
+              <a:rPr lang="en-US" sz="1150" dirty="0">
                 <a:solidFill>
                   <a:srgbClr val="334155"/>
                 </a:solidFill>
@@ -11356,9 +11356,9 @@
                 <a:ea typeface="Arial" pitchFamily="34" charset="-122"/>
                 <a:cs typeface="Arial" pitchFamily="34" charset="-120"/>
               </a:rPr>
-              <a:t>توثيق العقود يرتفع من 85% إلى 90% خلال 2026، وتوسّع مستمر في السعودة وحماية الأجور — كل تشديد يعني منشآت أكثر تحتاجنا.</a:t>
-            </a:r>
-            <a:endParaRPr lang="en-US" sz="1200" dirty="0"/>
+              <a:t>توثيق العقود عبر قوى: 85% بنهاية أبريل ثم 90% بنهاية يونيو 2026 (ساري اليوم)، مع توسّع قرارات التوطين ونظام حماية الأجور.</a:t>
+            </a:r>
+            <a:endParaRPr lang="en-US" sz="1150" dirty="0"/>
           </a:p>
         </p:txBody>
       </p:sp>
@@ -11371,11 +11371,11 @@
         <p:spPr>
           <a:xfrm>
             <a:off x="4251960" y="2331720"/>
-            <a:ext cx="3429000" cy="2286000"/>
+            <a:ext cx="3429000" cy="2331720"/>
           </a:xfrm>
           <a:prstGeom prst="roundRect">
             <a:avLst>
-              <a:gd name="adj" fmla="val 3600"/>
+              <a:gd name="adj" fmla="val 3529"/>
             </a:avLst>
           </a:prstGeom>
           <a:solidFill>
@@ -11483,7 +11483,7 @@
               <a:buNone/>
             </a:pPr>
             <a:r>
-              <a:rPr lang="en-US" sz="1550" b="1" dirty="0">
+              <a:rPr lang="en-US" sz="1500" b="1" dirty="0">
                 <a:solidFill>
                   <a:srgbClr val="0066CC"/>
                 </a:solidFill>
@@ -11491,9 +11491,9 @@
                 <a:ea typeface="Arial" pitchFamily="34" charset="-122"/>
                 <a:cs typeface="Arial" pitchFamily="34" charset="-120"/>
               </a:rPr>
-              <a:t>المنصات نفسها رقمية</a:t>
-            </a:r>
-            <a:endParaRPr lang="en-US" sz="1550" dirty="0"/>
+              <a:t>المنصات جاهزة للأتمتة</a:t>
+            </a:r>
+            <a:endParaRPr lang="en-US" sz="1500" dirty="0"/>
           </a:p>
         </p:txBody>
       </p:sp>
@@ -11505,8 +11505,8 @@
         </p:nvSpPr>
         <p:spPr>
           <a:xfrm>
-            <a:off x="4507992" y="3383280"/>
-            <a:ext cx="2971800" cy="1143000"/>
+            <a:off x="4507992" y="3401568"/>
+            <a:ext cx="2971800" cy="1188720"/>
           </a:xfrm>
           <a:prstGeom prst="rect">
             <a:avLst/>
@@ -11525,7 +11525,7 @@
               <a:buNone/>
             </a:pPr>
             <a:r>
-              <a:rPr lang="en-US" sz="1200" dirty="0">
+              <a:rPr lang="en-US" sz="1150" dirty="0">
                 <a:solidFill>
                   <a:srgbClr val="334155"/>
                 </a:solidFill>
@@ -11533,9 +11533,9 @@
                 <a:ea typeface="Arial" pitchFamily="34" charset="-122"/>
                 <a:cs typeface="Arial" pitchFamily="34" charset="-120"/>
               </a:rPr>
-              <a:t>قوى ومقيم والتأمينات ومدد بنية رقمية/API — وهذا بالضبط ما يجعلها قابلة للأتمتة بالوكلاء.</a:t>
-            </a:r>
-            <a:endParaRPr lang="en-US" sz="1200" dirty="0"/>
+              <a:t>قوى ومقيم والتأمينات الاجتماعية ومدد بنية رقمية بواجهات برمجية (API) — وهو ما يجعل عمل الوكلاء عليها ممكنًا.</a:t>
+            </a:r>
+            <a:endParaRPr lang="en-US" sz="1150" dirty="0"/>
           </a:p>
         </p:txBody>
       </p:sp>
@@ -11548,11 +11548,11 @@
         <p:spPr>
           <a:xfrm>
             <a:off x="7955280" y="2331720"/>
-            <a:ext cx="3429000" cy="2286000"/>
+            <a:ext cx="3429000" cy="2331720"/>
           </a:xfrm>
           <a:prstGeom prst="roundRect">
             <a:avLst>
-              <a:gd name="adj" fmla="val 3600"/>
+              <a:gd name="adj" fmla="val 3529"/>
             </a:avLst>
           </a:prstGeom>
           <a:solidFill>
@@ -11660,7 +11660,7 @@
               <a:buNone/>
             </a:pPr>
             <a:r>
-              <a:rPr lang="en-US" sz="1550" b="1" dirty="0">
+              <a:rPr lang="en-US" sz="1500" b="1" dirty="0">
                 <a:solidFill>
                   <a:srgbClr val="0066CC"/>
                 </a:solidFill>
@@ -11668,9 +11668,9 @@
                 <a:ea typeface="Arial" pitchFamily="34" charset="-122"/>
                 <a:cs typeface="Arial" pitchFamily="34" charset="-120"/>
               </a:rPr>
-              <a:t>لا يوجد لاعب Agent-native</a:t>
-            </a:r>
-            <a:endParaRPr lang="en-US" sz="1550" dirty="0"/>
+              <a:t>الساحة خالية</a:t>
+            </a:r>
+            <a:endParaRPr lang="en-US" sz="1500" dirty="0"/>
           </a:p>
         </p:txBody>
       </p:sp>
@@ -11682,8 +11682,8 @@
         </p:nvSpPr>
         <p:spPr>
           <a:xfrm>
-            <a:off x="8211312" y="3383280"/>
-            <a:ext cx="2971800" cy="1143000"/>
+            <a:off x="8211312" y="3401568"/>
+            <a:ext cx="2971800" cy="1188720"/>
           </a:xfrm>
           <a:prstGeom prst="rect">
             <a:avLst/>
@@ -11702,7 +11702,7 @@
               <a:buNone/>
             </a:pPr>
             <a:r>
-              <a:rPr lang="en-US" sz="1200" dirty="0">
+              <a:rPr lang="en-US" sz="1150" dirty="0">
                 <a:solidFill>
                   <a:srgbClr val="334155"/>
                 </a:solidFill>
@@ -11710,9 +11710,9 @@
                 <a:ea typeface="Arial" pitchFamily="34" charset="-122"/>
                 <a:cs typeface="Arial" pitchFamily="34" charset="-120"/>
               </a:rPr>
-              <a:t>الموجود مكاتب استشارات يدوية أو أدوات نقطية (رواتب/HRMS). المقعد فارغ.</a:t>
-            </a:r>
-            <a:endParaRPr lang="en-US" sz="1200" dirty="0"/>
+              <a:t>لا يوجد حل مبنيّ من أساسه على الوكلاء الأذكياء؛ الموجود مكاتب تعمل يدويًا أو أدوات أحادية الغرض. نحن أول الداخلين.</a:t>
+            </a:r>
+            <a:endParaRPr lang="en-US" sz="1150" dirty="0"/>
           </a:p>
         </p:txBody>
       </p:sp>
@@ -11724,7 +11724,7 @@
         </p:nvSpPr>
         <p:spPr>
           <a:xfrm>
-            <a:off x="548640" y="4892040"/>
+            <a:off x="548640" y="4937760"/>
             <a:ext cx="11091672" cy="960120"/>
           </a:xfrm>
           <a:prstGeom prst="roundRect">
@@ -11758,8 +11758,8 @@
         </p:nvSpPr>
         <p:spPr>
           <a:xfrm>
-            <a:off x="914400" y="5029200"/>
-            <a:ext cx="1554480" cy="502920"/>
+            <a:off x="914400" y="5074920"/>
+            <a:ext cx="1737360" cy="502920"/>
           </a:xfrm>
           <a:prstGeom prst="rect">
             <a:avLst/>
@@ -11775,7 +11775,7 @@
               <a:buNone/>
             </a:pPr>
             <a:r>
-              <a:rPr lang="en-US" sz="2600" b="1" dirty="0">
+              <a:rPr lang="en-US" sz="2400" b="1" dirty="0">
                 <a:solidFill>
                   <a:srgbClr val="10B981"/>
                 </a:solidFill>
@@ -11785,7 +11785,7 @@
               </a:rPr>
               <a:t>90%</a:t>
             </a:r>
-            <a:endParaRPr lang="en-US" sz="2600" dirty="0"/>
+            <a:endParaRPr lang="en-US" sz="2400" dirty="0"/>
           </a:p>
         </p:txBody>
       </p:sp>
@@ -11797,8 +11797,8 @@
         </p:nvSpPr>
         <p:spPr>
           <a:xfrm>
-            <a:off x="2286000" y="5074920"/>
-            <a:ext cx="2103120" cy="502920"/>
+            <a:off x="2468880" y="5120640"/>
+            <a:ext cx="1920240" cy="502920"/>
           </a:xfrm>
           <a:prstGeom prst="rect">
             <a:avLst/>
@@ -11812,12 +11812,12 @@
           <a:p>
             <a:pPr rtl="1" algn="r" indent="0" marL="0">
               <a:lnSpc>
-                <a:spcPct val="105000"/>
+                <a:spcPct val="100000"/>
               </a:lnSpc>
               <a:buNone/>
             </a:pPr>
             <a:r>
-              <a:rPr lang="en-US" sz="1150" dirty="0">
+              <a:rPr lang="en-US" sz="1100" dirty="0">
                 <a:solidFill>
                   <a:srgbClr val="D5DEEA"/>
                 </a:solidFill>
@@ -11825,9 +11825,9 @@
                 <a:ea typeface="Arial" pitchFamily="34" charset="-122"/>
                 <a:cs typeface="Arial" pitchFamily="34" charset="-120"/>
               </a:rPr>
-              <a:t>توثيق العقود بنهاية 2026</a:t>
-            </a:r>
-            <a:endParaRPr lang="en-US" sz="1150" dirty="0"/>
+              <a:t>توثيق العقود — ساري اليوم</a:t>
+            </a:r>
+            <a:endParaRPr lang="en-US" sz="1100" dirty="0"/>
           </a:p>
         </p:txBody>
       </p:sp>
@@ -11839,8 +11839,8 @@
         </p:nvSpPr>
         <p:spPr>
           <a:xfrm>
-            <a:off x="4526280" y="5029200"/>
-            <a:ext cx="1554480" cy="502920"/>
+            <a:off x="4526280" y="5074920"/>
+            <a:ext cx="1737360" cy="502920"/>
           </a:xfrm>
           <a:prstGeom prst="rect">
             <a:avLst/>
@@ -11856,7 +11856,7 @@
               <a:buNone/>
             </a:pPr>
             <a:r>
-              <a:rPr lang="en-US" sz="2600" b="1" dirty="0">
+              <a:rPr lang="en-US" sz="2400" b="1" dirty="0">
                 <a:solidFill>
                   <a:srgbClr val="10B981"/>
                 </a:solidFill>
@@ -11864,9 +11864,9 @@
                 <a:ea typeface="Arial" pitchFamily="34" charset="-122"/>
                 <a:cs typeface="Arial" pitchFamily="34" charset="-120"/>
               </a:rPr>
-              <a:t>2M+</a:t>
-            </a:r>
-            <a:endParaRPr lang="en-US" sz="2600" dirty="0"/>
+              <a:t>+2 مليون</a:t>
+            </a:r>
+            <a:endParaRPr lang="en-US" sz="2400" dirty="0"/>
           </a:p>
         </p:txBody>
       </p:sp>
@@ -11878,8 +11878,8 @@
         </p:nvSpPr>
         <p:spPr>
           <a:xfrm>
-            <a:off x="5897880" y="5074920"/>
-            <a:ext cx="2103120" cy="502920"/>
+            <a:off x="6080760" y="5120640"/>
+            <a:ext cx="1920240" cy="502920"/>
           </a:xfrm>
           <a:prstGeom prst="rect">
             <a:avLst/>
@@ -11893,12 +11893,12 @@
           <a:p>
             <a:pPr rtl="1" algn="r" indent="0" marL="0">
               <a:lnSpc>
-                <a:spcPct val="105000"/>
+                <a:spcPct val="100000"/>
               </a:lnSpc>
               <a:buNone/>
             </a:pPr>
             <a:r>
-              <a:rPr lang="en-US" sz="1150" dirty="0">
+              <a:rPr lang="en-US" sz="1100" dirty="0">
                 <a:solidFill>
                   <a:srgbClr val="D5DEEA"/>
                 </a:solidFill>
@@ -11906,9 +11906,9 @@
                 <a:ea typeface="Arial" pitchFamily="34" charset="-122"/>
                 <a:cs typeface="Arial" pitchFamily="34" charset="-120"/>
               </a:rPr>
-              <a:t>منشأة على قوى</a:t>
-            </a:r>
-            <a:endParaRPr lang="en-US" sz="1150" dirty="0"/>
+              <a:t>منشأة في قوى</a:t>
+            </a:r>
+            <a:endParaRPr lang="en-US" sz="1100" dirty="0"/>
           </a:p>
         </p:txBody>
       </p:sp>
@@ -11920,8 +11920,8 @@
         </p:nvSpPr>
         <p:spPr>
           <a:xfrm>
-            <a:off x="8138160" y="5029200"/>
-            <a:ext cx="1554480" cy="502920"/>
+            <a:off x="8138160" y="5074920"/>
+            <a:ext cx="1737360" cy="502920"/>
           </a:xfrm>
           <a:prstGeom prst="rect">
             <a:avLst/>
@@ -11937,7 +11937,7 @@
               <a:buNone/>
             </a:pPr>
             <a:r>
-              <a:rPr lang="en-US" sz="2600" b="1" dirty="0">
+              <a:rPr lang="en-US" sz="2400" b="1" dirty="0">
                 <a:solidFill>
                   <a:srgbClr val="10B981"/>
                 </a:solidFill>
@@ -11947,7 +11947,7 @@
               </a:rPr>
               <a:t>0</a:t>
             </a:r>
-            <a:endParaRPr lang="en-US" sz="2600" dirty="0"/>
+            <a:endParaRPr lang="en-US" sz="2400" dirty="0"/>
           </a:p>
         </p:txBody>
       </p:sp>
@@ -11959,8 +11959,8 @@
         </p:nvSpPr>
         <p:spPr>
           <a:xfrm>
-            <a:off x="9509760" y="5074920"/>
-            <a:ext cx="2103120" cy="502920"/>
+            <a:off x="9692640" y="5120640"/>
+            <a:ext cx="1920240" cy="502920"/>
           </a:xfrm>
           <a:prstGeom prst="rect">
             <a:avLst/>
@@ -11974,12 +11974,12 @@
           <a:p>
             <a:pPr rtl="1" algn="r" indent="0" marL="0">
               <a:lnSpc>
-                <a:spcPct val="105000"/>
+                <a:spcPct val="100000"/>
               </a:lnSpc>
               <a:buNone/>
             </a:pPr>
             <a:r>
-              <a:rPr lang="en-US" sz="1150" dirty="0">
+              <a:rPr lang="en-US" sz="1100" dirty="0">
                 <a:solidFill>
                   <a:srgbClr val="D5DEEA"/>
                 </a:solidFill>
@@ -11987,9 +11987,9 @@
                 <a:ea typeface="Arial" pitchFamily="34" charset="-122"/>
                 <a:cs typeface="Arial" pitchFamily="34" charset="-120"/>
               </a:rPr>
-              <a:t>منافس Agent-native</a:t>
-            </a:r>
-            <a:endParaRPr lang="en-US" sz="1150" dirty="0"/>
+              <a:t>منافس مماثل</a:t>
+            </a:r>
+            <a:endParaRPr lang="en-US" sz="1100" dirty="0"/>
           </a:p>
         </p:txBody>
       </p:sp>
@@ -12156,7 +12156,7 @@
                 <a:ea typeface="Arial" pitchFamily="34" charset="-122"/>
                 <a:cs typeface="Arial" pitchFamily="34" charset="-120"/>
               </a:rPr>
-              <a:t>MARKET · السوق والشريحة المستهدفة</a:t>
+              <a:t>MARKET · السوق وشريحة الانطلاق</a:t>
             </a:r>
             <a:endParaRPr lang="en-US" sz="1100" dirty="0"/>
           </a:p>
@@ -12187,7 +12187,7 @@
               <a:buNone/>
             </a:pPr>
             <a:r>
-              <a:rPr lang="en-US" sz="3000" b="1" dirty="0">
+              <a:rPr lang="en-US" sz="2900" b="1" dirty="0">
                 <a:solidFill>
                   <a:srgbClr val="1E293B"/>
                 </a:solidFill>
@@ -12195,9 +12195,9 @@
                 <a:ea typeface="Arial" pitchFamily="34" charset="-122"/>
                 <a:cs typeface="Arial" pitchFamily="34" charset="-120"/>
               </a:rPr>
-              <a:t>كل صاحب عمل عميل محتمل — ونبدأ من الأكثر ألمًا</a:t>
-            </a:r>
-            <a:endParaRPr lang="en-US" sz="3000" dirty="0"/>
+              <a:t>أكثر من مليوني منشأة ملزمة بالامتثال — ونبدأ بالأشد تعرضًا للخطر</a:t>
+            </a:r>
+            <a:endParaRPr lang="en-US" sz="2900" dirty="0"/>
           </a:p>
         </p:txBody>
       </p:sp>
@@ -12226,7 +12226,7 @@
               <a:buNone/>
             </a:pPr>
             <a:r>
-              <a:rPr lang="en-US" sz="1400" dirty="0">
+              <a:rPr lang="en-US" sz="1350" dirty="0">
                 <a:solidFill>
                   <a:srgbClr val="64748B"/>
                 </a:solidFill>
@@ -12234,9 +12234,9 @@
                 <a:ea typeface="Arial" pitchFamily="34" charset="-122"/>
                 <a:cs typeface="Arial" pitchFamily="34" charset="-120"/>
               </a:rPr>
-              <a:t>Every employer is a customer — we start where it hurts most</a:t>
-            </a:r>
-            <a:endParaRPr lang="en-US" sz="1400" dirty="0"/>
+              <a:t>Two million establishments must comply — we start with the most exposed</a:t>
+            </a:r>
+            <a:endParaRPr lang="en-US" sz="1350" dirty="0"/>
           </a:p>
         </p:txBody>
       </p:sp>
@@ -12271,7 +12271,7 @@
         <p:spPr>
           <a:xfrm>
             <a:off x="822960" y="2487168"/>
-            <a:ext cx="2011680" cy="640080"/>
+            <a:ext cx="2194560" cy="640080"/>
           </a:xfrm>
           <a:prstGeom prst="rect">
             <a:avLst/>
@@ -12283,11 +12283,11 @@
           <a:bodyPr wrap="square" lIns="0" tIns="0" rIns="0" bIns="0" rtlCol="0" anchor="ctr"/>
           <a:lstStyle/>
           <a:p>
-            <a:pPr algn="l" indent="0" marL="0">
-              <a:buNone/>
-            </a:pPr>
-            <a:r>
-              <a:rPr lang="en-US" sz="2200" b="1" dirty="0">
+            <a:pPr rtl="1" algn="l" indent="0" marL="0">
+              <a:buNone/>
+            </a:pPr>
+            <a:r>
+              <a:rPr lang="en-US" sz="1700" b="1" dirty="0">
                 <a:solidFill>
                   <a:srgbClr val="FFFFFF"/>
                 </a:solidFill>
@@ -12295,9 +12295,9 @@
                 <a:ea typeface="Arial" pitchFamily="34" charset="-122"/>
                 <a:cs typeface="Arial" pitchFamily="34" charset="-120"/>
               </a:rPr>
-              <a:t>2M+</a:t>
-            </a:r>
-            <a:endParaRPr lang="en-US" sz="2200" dirty="0"/>
+              <a:t>+2 مليون</a:t>
+            </a:r>
+            <a:endParaRPr lang="en-US" sz="1700" dirty="0"/>
           </a:p>
         </p:txBody>
       </p:sp>
@@ -12309,8 +12309,8 @@
         </p:nvSpPr>
         <p:spPr>
           <a:xfrm>
-            <a:off x="2651760" y="2487168"/>
-            <a:ext cx="8622792" cy="640080"/>
+            <a:off x="2926080" y="2487168"/>
+            <a:ext cx="8348472" cy="640080"/>
           </a:xfrm>
           <a:prstGeom prst="rect">
             <a:avLst/>
@@ -12324,12 +12324,12 @@
           <a:p>
             <a:pPr rtl="1" algn="r" indent="0" marL="0">
               <a:lnSpc>
-                <a:spcPct val="105000"/>
+                <a:spcPct val="100000"/>
               </a:lnSpc>
               <a:buNone/>
             </a:pPr>
             <a:r>
-              <a:rPr lang="en-US" sz="1250" dirty="0">
+              <a:rPr lang="en-US" sz="1200" dirty="0">
                 <a:solidFill>
                   <a:srgbClr val="FFFFFF"/>
                 </a:solidFill>
@@ -12337,9 +12337,9 @@
                 <a:ea typeface="Arial" pitchFamily="34" charset="-122"/>
                 <a:cs typeface="Arial" pitchFamily="34" charset="-120"/>
               </a:rPr>
-              <a:t>منشأة مسجلة على قوى — السوق الكلي</a:t>
-            </a:r>
-            <a:endParaRPr lang="en-US" sz="1250" dirty="0"/>
+              <a:t>منشأة مسجلة في قوى — السوق الكلي</a:t>
+            </a:r>
+            <a:endParaRPr lang="en-US" sz="1200" dirty="0"/>
           </a:p>
         </p:txBody>
       </p:sp>
@@ -12374,7 +12374,7 @@
         <p:spPr>
           <a:xfrm>
             <a:off x="822960" y="3538728"/>
-            <a:ext cx="2011680" cy="640080"/>
+            <a:ext cx="2194560" cy="640080"/>
           </a:xfrm>
           <a:prstGeom prst="rect">
             <a:avLst/>
@@ -12386,11 +12386,11 @@
           <a:bodyPr wrap="square" lIns="0" tIns="0" rIns="0" bIns="0" rtlCol="0" anchor="ctr"/>
           <a:lstStyle/>
           <a:p>
-            <a:pPr algn="l" indent="0" marL="0">
-              <a:buNone/>
-            </a:pPr>
-            <a:r>
-              <a:rPr lang="en-US" sz="2200" b="1" dirty="0">
+            <a:pPr rtl="1" algn="l" indent="0" marL="0">
+              <a:buNone/>
+            </a:pPr>
+            <a:r>
+              <a:rPr lang="en-US" sz="1700" b="1" dirty="0">
                 <a:solidFill>
                   <a:srgbClr val="FFFFFF"/>
                 </a:solidFill>
@@ -12398,9 +12398,9 @@
                 <a:ea typeface="Arial" pitchFamily="34" charset="-122"/>
                 <a:cs typeface="Arial" pitchFamily="34" charset="-120"/>
               </a:rPr>
-              <a:t>1.68M</a:t>
-            </a:r>
-            <a:endParaRPr lang="en-US" sz="2200" dirty="0"/>
+              <a:t>1.68 مليون</a:t>
+            </a:r>
+            <a:endParaRPr lang="en-US" sz="1700" dirty="0"/>
           </a:p>
         </p:txBody>
       </p:sp>
@@ -12412,8 +12412,8 @@
         </p:nvSpPr>
         <p:spPr>
           <a:xfrm>
-            <a:off x="2651760" y="3538728"/>
-            <a:ext cx="5943600" cy="640080"/>
+            <a:off x="2926080" y="3538728"/>
+            <a:ext cx="5669280" cy="640080"/>
           </a:xfrm>
           <a:prstGeom prst="rect">
             <a:avLst/>
@@ -12427,12 +12427,12 @@
           <a:p>
             <a:pPr rtl="1" algn="r" indent="0" marL="0">
               <a:lnSpc>
-                <a:spcPct val="105000"/>
+                <a:spcPct val="100000"/>
               </a:lnSpc>
               <a:buNone/>
             </a:pPr>
             <a:r>
-              <a:rPr lang="en-US" sz="1250" dirty="0">
+              <a:rPr lang="en-US" sz="1200" dirty="0">
                 <a:solidFill>
                   <a:srgbClr val="FFFFFF"/>
                 </a:solidFill>
@@ -12440,9 +12440,9 @@
                 <a:ea typeface="Arial" pitchFamily="34" charset="-122"/>
                 <a:cs typeface="Arial" pitchFamily="34" charset="-120"/>
               </a:rPr>
-              <a:t>سجل منشأة صغيرة ومتوسطة (Q1 2025) · الرياض 39% (~655 ألفًا)</a:t>
-            </a:r>
-            <a:endParaRPr lang="en-US" sz="1250" dirty="0"/>
+              <a:t>منشأة صغيرة ومتوسطة (الربع الأول 2025) · الرياض 39% (نحو 655 ألفًا)</a:t>
+            </a:r>
+            <a:endParaRPr lang="en-US" sz="1200" dirty="0"/>
           </a:p>
         </p:txBody>
       </p:sp>
@@ -12455,7 +12455,7 @@
         <p:spPr>
           <a:xfrm>
             <a:off x="548640" y="4480560"/>
-            <a:ext cx="5669280" cy="868680"/>
+            <a:ext cx="6035040" cy="868680"/>
           </a:xfrm>
           <a:prstGeom prst="roundRect">
             <a:avLst>
@@ -12477,7 +12477,7 @@
         <p:spPr>
           <a:xfrm>
             <a:off x="822960" y="4590288"/>
-            <a:ext cx="2011680" cy="640080"/>
+            <a:ext cx="2194560" cy="640080"/>
           </a:xfrm>
           <a:prstGeom prst="rect">
             <a:avLst/>
@@ -12489,11 +12489,11 @@
           <a:bodyPr wrap="square" lIns="0" tIns="0" rIns="0" bIns="0" rtlCol="0" anchor="ctr"/>
           <a:lstStyle/>
           <a:p>
-            <a:pPr algn="l" indent="0" marL="0">
-              <a:buNone/>
-            </a:pPr>
-            <a:r>
-              <a:rPr lang="en-US" sz="2200" b="1" dirty="0">
+            <a:pPr rtl="1" algn="l" indent="0" marL="0">
+              <a:buNone/>
+            </a:pPr>
+            <a:r>
+              <a:rPr lang="en-US" sz="1700" b="1" dirty="0">
                 <a:solidFill>
                   <a:srgbClr val="FFFFFF"/>
                 </a:solidFill>
@@ -12501,9 +12501,9 @@
                 <a:ea typeface="Arial" pitchFamily="34" charset="-122"/>
                 <a:cs typeface="Arial" pitchFamily="34" charset="-120"/>
               </a:rPr>
-              <a:t>الإسفين</a:t>
-            </a:r>
-            <a:endParaRPr lang="en-US" sz="2200" dirty="0"/>
+              <a:t>شريحة الانطلاق</a:t>
+            </a:r>
+            <a:endParaRPr lang="en-US" sz="1700" dirty="0"/>
           </a:p>
         </p:txBody>
       </p:sp>
@@ -12515,8 +12515,8 @@
         </p:nvSpPr>
         <p:spPr>
           <a:xfrm>
-            <a:off x="2651760" y="4590288"/>
-            <a:ext cx="3200400" cy="640080"/>
+            <a:off x="2926080" y="4590288"/>
+            <a:ext cx="3291840" cy="640080"/>
           </a:xfrm>
           <a:prstGeom prst="rect">
             <a:avLst/>
@@ -12530,12 +12530,12 @@
           <a:p>
             <a:pPr rtl="1" algn="r" indent="0" marL="0">
               <a:lnSpc>
-                <a:spcPct val="105000"/>
+                <a:spcPct val="100000"/>
               </a:lnSpc>
               <a:buNone/>
             </a:pPr>
             <a:r>
-              <a:rPr lang="en-US" sz="1250" b="1" dirty="0">
+              <a:rPr lang="en-US" sz="1200" b="1" dirty="0">
                 <a:solidFill>
                   <a:srgbClr val="FFFFFF"/>
                 </a:solidFill>
@@ -12543,9 +12543,9 @@
                 <a:ea typeface="Arial" pitchFamily="34" charset="-122"/>
                 <a:cs typeface="Arial" pitchFamily="34" charset="-120"/>
               </a:rPr>
-              <a:t>منشآت 10–250 موظفًا بمزيج سعودي/وافد — خطر نطاقات/أجور حقيقي بلا موظف امتثال</a:t>
-            </a:r>
-            <a:endParaRPr lang="en-US" sz="1250" dirty="0"/>
+              <a:t>منشآت 10–250 موظفًا بمزيج سعودي/وافد — الأشد تعرضًا لمخاطر نطاقات ونظام حماية الأجور</a:t>
+            </a:r>
+            <a:endParaRPr lang="en-US" sz="1200" dirty="0"/>
           </a:p>
         </p:txBody>
       </p:sp>
@@ -12591,8 +12591,8 @@
         </p:nvSpPr>
         <p:spPr>
           <a:xfrm>
-            <a:off x="822960" y="5742432"/>
-            <a:ext cx="10515600" cy="457200"/>
+            <a:off x="822960" y="5733288"/>
+            <a:ext cx="10515600" cy="502920"/>
           </a:xfrm>
           <a:prstGeom prst="rect">
             <a:avLst/>
@@ -12611,7 +12611,7 @@
               <a:buNone/>
             </a:pPr>
             <a:r>
-              <a:rPr lang="en-US" sz="1200" dirty="0">
+              <a:rPr lang="en-US" sz="1150" dirty="0">
                 <a:solidFill>
                   <a:srgbClr val="334155"/>
                 </a:solidFill>
@@ -12619,9 +12619,9 @@
                 <a:ea typeface="Arial" pitchFamily="34" charset="-122"/>
                 <a:cs typeface="Arial" pitchFamily="34" charset="-120"/>
               </a:rPr>
-              <a:t>قطاعات البداية: لوجستيات وتوصيل · مطاعم وضيافة · تجزئة · مقاولات — المصادر: قوى · منشآت · الهيئة العامة للإحصاء.</a:t>
-            </a:r>
-            <a:endParaRPr lang="en-US" sz="1200" dirty="0"/>
+              <a:t>قطاعات البداية: اللوجستيات والتوصيل · المطاعم والضيافة · التجزئة · المقاولات — المصادر: منصة قوى · منشآت · الهيئة العامة للإحصاء.</a:t>
+            </a:r>
+            <a:endParaRPr lang="en-US" sz="1150" dirty="0"/>
           </a:p>
         </p:txBody>
       </p:sp>
@@ -12819,7 +12819,7 @@
               <a:buNone/>
             </a:pPr>
             <a:r>
-              <a:rPr lang="en-US" sz="3000" b="1" dirty="0">
+              <a:rPr lang="en-US" sz="2900" b="1" dirty="0">
                 <a:solidFill>
                   <a:srgbClr val="1E293B"/>
                 </a:solidFill>
@@ -12827,9 +12827,9 @@
                 <a:ea typeface="Arial" pitchFamily="34" charset="-122"/>
                 <a:cs typeface="Arial" pitchFamily="34" charset="-120"/>
               </a:rPr>
-              <a:t>بين مكاتبَ يدوية وأدواتٍ نقطية — الطبقة الوسطى فارغة</a:t>
-            </a:r>
-            <a:endParaRPr lang="en-US" sz="3000" dirty="0"/>
+              <a:t>الخدمة اليدوية بطيئة، والأدوات الجاهزة محدودة — والمساحة بينهما خالية</a:t>
+            </a:r>
+            <a:endParaRPr lang="en-US" sz="2900" dirty="0"/>
           </a:p>
         </p:txBody>
       </p:sp>
@@ -12858,7 +12858,7 @@
               <a:buNone/>
             </a:pPr>
             <a:r>
-              <a:rPr lang="en-US" sz="1400" dirty="0">
+              <a:rPr lang="en-US" sz="1350" dirty="0">
                 <a:solidFill>
                   <a:srgbClr val="64748B"/>
                 </a:solidFill>
@@ -12866,9 +12866,9 @@
                 <a:ea typeface="Arial" pitchFamily="34" charset="-122"/>
                 <a:cs typeface="Arial" pitchFamily="34" charset="-120"/>
               </a:rPr>
-              <a:t>Between manual shops and point tools, the middle layer is empty</a:t>
-            </a:r>
-            <a:endParaRPr lang="en-US" sz="1400" dirty="0"/>
+              <a:t>Manual service is slow, packaged tools are narrow — the space between is empty</a:t>
+            </a:r>
+            <a:endParaRPr lang="en-US" sz="1350" dirty="0"/>
           </a:p>
         </p:txBody>
       </p:sp>
@@ -12895,10 +12895,10 @@
             <a:tbl>
               <a:tblPr/>
               <a:tblGrid>
-                <a:gridCol w="2926080"/>
+                <a:gridCol w="2651760"/>
                 <a:gridCol w="2743200"/>
-                <a:gridCol w="2743200"/>
-                <a:gridCol w="2679192"/>
+                <a:gridCol w="2834640"/>
+                <a:gridCol w="2862072"/>
               </a:tblGrid>
               <a:tr h="566928">
                 <a:tc>
@@ -12910,7 +12910,7 @@
                         <a:buNone/>
                       </a:pPr>
                       <a:r>
-                        <a:rPr lang="en-US" sz="1250" b="1" dirty="0">
+                        <a:rPr lang="en-US" sz="1150" b="1" dirty="0">
                           <a:solidFill>
                             <a:srgbClr val="FFFFFF"/>
                           </a:solidFill>
@@ -12920,7 +12920,7 @@
                         </a:rPr>
                         <a:t>القدرة</a:t>
                       </a:r>
-                      <a:endParaRPr lang="en-US" sz="1250" dirty="0">
+                      <a:endParaRPr lang="en-US" sz="1150" dirty="0">
                         <a:latin typeface="Arial" charset="0"/>
                         <a:ea typeface="Arial" charset="0"/>
                         <a:cs typeface="Arial" charset="0"/>
@@ -12978,7 +12978,7 @@
                         <a:buNone/>
                       </a:pPr>
                       <a:r>
-                        <a:rPr lang="en-US" sz="1250" b="1" dirty="0">
+                        <a:rPr lang="en-US" sz="1150" b="1" dirty="0">
                           <a:solidFill>
                             <a:srgbClr val="FFFFFF"/>
                           </a:solidFill>
@@ -12986,9 +12986,9 @@
                           <a:ea typeface="Arial" pitchFamily="34" charset="-122"/>
                           <a:cs typeface="Arial" pitchFamily="34" charset="-120"/>
                         </a:rPr>
-                        <a:t>مكاتب استشارات/علاقات حكومية</a:t>
+                        <a:t>مكاتب الخدمات والاستشارات (عمل يدوي)</a:t>
                       </a:r>
-                      <a:endParaRPr lang="en-US" sz="1250" dirty="0">
+                      <a:endParaRPr lang="en-US" sz="1150" dirty="0">
                         <a:latin typeface="Arial" charset="0"/>
                         <a:ea typeface="Arial" charset="0"/>
                         <a:cs typeface="Arial" charset="0"/>
@@ -13046,7 +13046,7 @@
                         <a:buNone/>
                       </a:pPr>
                       <a:r>
-                        <a:rPr lang="en-US" sz="1250" b="1" dirty="0">
+                        <a:rPr lang="en-US" sz="1150" b="1" dirty="0">
                           <a:solidFill>
                             <a:srgbClr val="FFFFFF"/>
                           </a:solidFill>
@@ -13054,9 +13054,9 @@
                           <a:ea typeface="Arial" pitchFamily="34" charset="-122"/>
                           <a:cs typeface="Arial" pitchFamily="34" charset="-120"/>
                         </a:rPr>
-                        <a:t>برمجيات نقطية (HRMS/رواتب)</a:t>
+                        <a:t>برمجيات محدودة النطاق (موارد بشرية ورواتب)</a:t>
                       </a:r>
-                      <a:endParaRPr lang="en-US" sz="1250" dirty="0">
+                      <a:endParaRPr lang="en-US" sz="1150" dirty="0">
                         <a:latin typeface="Arial" charset="0"/>
                         <a:ea typeface="Arial" charset="0"/>
                         <a:cs typeface="Arial" charset="0"/>
@@ -13114,7 +13114,7 @@
                         <a:buNone/>
                       </a:pPr>
                       <a:r>
-                        <a:rPr lang="en-US" sz="1250" b="1" dirty="0">
+                        <a:rPr lang="en-US" sz="1150" b="1" dirty="0">
                           <a:solidFill>
                             <a:srgbClr val="FFFFFF"/>
                           </a:solidFill>
@@ -13122,9 +13122,9 @@
                           <a:ea typeface="Arial" pitchFamily="34" charset="-122"/>
                           <a:cs typeface="Arial" pitchFamily="34" charset="-120"/>
                         </a:rPr>
-                        <a:t>وكلاء Business Partner</a:t>
+                        <a:t>وكيل الامتثال من Business Partner</a:t>
                       </a:r>
-                      <a:endParaRPr lang="en-US" sz="1250" dirty="0">
+                      <a:endParaRPr lang="en-US" sz="1150" dirty="0">
                         <a:latin typeface="Arial" charset="0"/>
                         <a:ea typeface="Arial" charset="0"/>
                         <a:cs typeface="Arial" charset="0"/>
@@ -13184,7 +13184,7 @@
                         <a:buNone/>
                       </a:pPr>
                       <a:r>
-                        <a:rPr lang="en-US" sz="1250" b="1" dirty="0">
+                        <a:rPr lang="en-US" sz="1150" b="1" dirty="0">
                           <a:solidFill>
                             <a:srgbClr val="1E293B"/>
                           </a:solidFill>
@@ -13194,7 +13194,7 @@
                         </a:rPr>
                         <a:t>استباقي قبل المخالفة</a:t>
                       </a:r>
-                      <a:endParaRPr lang="en-US" sz="1250" dirty="0">
+                      <a:endParaRPr lang="en-US" sz="1150" dirty="0">
                         <a:latin typeface="Arial" charset="0"/>
                         <a:ea typeface="Arial" charset="0"/>
                         <a:cs typeface="Arial" charset="0"/>
@@ -13252,17 +13252,17 @@
                         <a:buNone/>
                       </a:pPr>
                       <a:r>
-                        <a:rPr lang="en-US" sz="1250" dirty="0">
+                        <a:rPr lang="en-US" sz="1150" dirty="0">
                           <a:solidFill>
-                            <a:srgbClr val="94A3B8"/>
+                            <a:srgbClr val="1E293B"/>
                           </a:solidFill>
                           <a:latin typeface="Arial" pitchFamily="34" charset="0"/>
                           <a:ea typeface="Arial" pitchFamily="34" charset="-122"/>
                           <a:cs typeface="Arial" pitchFamily="34" charset="-120"/>
                         </a:rPr>
-                        <a:t>✗ رد فعل</a:t>
+                        <a:t>رد فعل بعد وقوعها</a:t>
                       </a:r>
-                      <a:endParaRPr lang="en-US" sz="1250" dirty="0">
+                      <a:endParaRPr lang="en-US" sz="1150" dirty="0">
                         <a:latin typeface="Arial" charset="0"/>
                         <a:ea typeface="Arial" charset="0"/>
                         <a:cs typeface="Arial" charset="0"/>
@@ -13320,7 +13320,7 @@
                         <a:buNone/>
                       </a:pPr>
                       <a:r>
-                        <a:rPr lang="en-US" sz="1250" dirty="0">
+                        <a:rPr lang="en-US" sz="1150" dirty="0">
                           <a:solidFill>
                             <a:srgbClr val="1E293B"/>
                           </a:solidFill>
@@ -13328,9 +13328,9 @@
                           <a:ea typeface="Arial" pitchFamily="34" charset="-122"/>
                           <a:cs typeface="Arial" pitchFamily="34" charset="-120"/>
                         </a:rPr>
-                        <a:t>جزئي — إشعارات بيانات</a:t>
+                        <a:t>إشعارات بيانات جزئية</a:t>
                       </a:r>
-                      <a:endParaRPr lang="en-US" sz="1250" dirty="0">
+                      <a:endParaRPr lang="en-US" sz="1150" dirty="0">
                         <a:latin typeface="Arial" charset="0"/>
                         <a:ea typeface="Arial" charset="0"/>
                         <a:cs typeface="Arial" charset="0"/>
@@ -13388,7 +13388,7 @@
                         <a:buNone/>
                       </a:pPr>
                       <a:r>
-                        <a:rPr lang="en-US" sz="1250" b="1" dirty="0">
+                        <a:rPr lang="en-US" sz="1150" b="1" dirty="0">
                           <a:solidFill>
                             <a:srgbClr val="10B981"/>
                           </a:solidFill>
@@ -13396,9 +13396,9 @@
                           <a:ea typeface="Arial" pitchFamily="34" charset="-122"/>
                           <a:cs typeface="Arial" pitchFamily="34" charset="-120"/>
                         </a:rPr>
-                        <a:t>✓ بالأثر والمهلة</a:t>
+                        <a:t>✓ إنذار مبكر بالأثر والمهلة</a:t>
                       </a:r>
-                      <a:endParaRPr lang="en-US" sz="1250" dirty="0">
+                      <a:endParaRPr lang="en-US" sz="1150" dirty="0">
                         <a:latin typeface="Arial" charset="0"/>
                         <a:ea typeface="Arial" charset="0"/>
                         <a:cs typeface="Arial" charset="0"/>
@@ -13458,7 +13458,7 @@
                         <a:buNone/>
                       </a:pPr>
                       <a:r>
-                        <a:rPr lang="en-US" sz="1250" b="1" dirty="0">
+                        <a:rPr lang="en-US" sz="1150" b="1" dirty="0">
                           <a:solidFill>
                             <a:srgbClr val="1E293B"/>
                           </a:solidFill>
@@ -13466,9 +13466,9 @@
                           <a:ea typeface="Arial" pitchFamily="34" charset="-122"/>
                           <a:cs typeface="Arial" pitchFamily="34" charset="-120"/>
                         </a:rPr>
-                        <a:t>يغطي كل المنصات</a:t>
+                        <a:t>تغطية المنصات</a:t>
                       </a:r>
-                      <a:endParaRPr lang="en-US" sz="1250" dirty="0">
+                      <a:endParaRPr lang="en-US" sz="1150" dirty="0">
                         <a:latin typeface="Arial" charset="0"/>
                         <a:ea typeface="Arial" charset="0"/>
                         <a:cs typeface="Arial" charset="0"/>
@@ -13526,17 +13526,17 @@
                         <a:buNone/>
                       </a:pPr>
                       <a:r>
-                        <a:rPr lang="en-US" sz="1250" dirty="0">
+                        <a:rPr lang="en-US" sz="1150" dirty="0">
                           <a:solidFill>
-                            <a:srgbClr val="94A3B8"/>
+                            <a:srgbClr val="1E293B"/>
                           </a:solidFill>
                           <a:latin typeface="Arial" pitchFamily="34" charset="0"/>
                           <a:ea typeface="Arial" pitchFamily="34" charset="-122"/>
                           <a:cs typeface="Arial" pitchFamily="34" charset="-120"/>
                         </a:rPr>
-                        <a:t>✗ شخص لكل منصة</a:t>
+                        <a:t>شخص لكل منصة</a:t>
                       </a:r>
-                      <a:endParaRPr lang="en-US" sz="1250" dirty="0">
+                      <a:endParaRPr lang="en-US" sz="1150" dirty="0">
                         <a:latin typeface="Arial" charset="0"/>
                         <a:ea typeface="Arial" charset="0"/>
                         <a:cs typeface="Arial" charset="0"/>
@@ -13594,17 +13594,17 @@
                         <a:buNone/>
                       </a:pPr>
                       <a:r>
-                        <a:rPr lang="en-US" sz="1250" dirty="0">
+                        <a:rPr lang="en-US" sz="1150" dirty="0">
                           <a:solidFill>
-                            <a:srgbClr val="94A3B8"/>
+                            <a:srgbClr val="1E293B"/>
                           </a:solidFill>
                           <a:latin typeface="Arial" pitchFamily="34" charset="0"/>
                           <a:ea typeface="Arial" pitchFamily="34" charset="-122"/>
                           <a:cs typeface="Arial" pitchFamily="34" charset="-120"/>
                         </a:rPr>
-                        <a:t>✗ منصة/وظيفة واحدة</a:t>
+                        <a:t>منصة أو وظيفة واحدة</a:t>
                       </a:r>
-                      <a:endParaRPr lang="en-US" sz="1250" dirty="0">
+                      <a:endParaRPr lang="en-US" sz="1150" dirty="0">
                         <a:latin typeface="Arial" charset="0"/>
                         <a:ea typeface="Arial" charset="0"/>
                         <a:cs typeface="Arial" charset="0"/>
@@ -13662,7 +13662,7 @@
                         <a:buNone/>
                       </a:pPr>
                       <a:r>
-                        <a:rPr lang="en-US" sz="1250" b="1" dirty="0">
+                        <a:rPr lang="en-US" sz="1150" b="1" dirty="0">
                           <a:solidFill>
                             <a:srgbClr val="10B981"/>
                           </a:solidFill>
@@ -13670,9 +13670,9 @@
                           <a:ea typeface="Arial" pitchFamily="34" charset="-122"/>
                           <a:cs typeface="Arial" pitchFamily="34" charset="-120"/>
                         </a:rPr>
-                        <a:t>✓ طبقة واحدة</a:t>
+                        <a:t>✓ طبقة واحدة لكل المنصات</a:t>
                       </a:r>
-                      <a:endParaRPr lang="en-US" sz="1250" dirty="0">
+                      <a:endParaRPr lang="en-US" sz="1150" dirty="0">
                         <a:latin typeface="Arial" charset="0"/>
                         <a:ea typeface="Arial" charset="0"/>
                         <a:cs typeface="Arial" charset="0"/>
@@ -13732,7 +13732,7 @@
                         <a:buNone/>
                       </a:pPr>
                       <a:r>
-                        <a:rPr lang="en-US" sz="1250" b="1" dirty="0">
+                        <a:rPr lang="en-US" sz="1150" b="1" dirty="0">
                           <a:solidFill>
                             <a:srgbClr val="1E293B"/>
                           </a:solidFill>
@@ -13742,7 +13742,7 @@
                         </a:rPr>
                         <a:t>يجهّز الإجراء وينفّذه</a:t>
                       </a:r>
-                      <a:endParaRPr lang="en-US" sz="1250" dirty="0">
+                      <a:endParaRPr lang="en-US" sz="1150" dirty="0">
                         <a:latin typeface="Arial" charset="0"/>
                         <a:ea typeface="Arial" charset="0"/>
                         <a:cs typeface="Arial" charset="0"/>
@@ -13800,7 +13800,7 @@
                         <a:buNone/>
                       </a:pPr>
                       <a:r>
-                        <a:rPr lang="en-US" sz="1250" dirty="0">
+                        <a:rPr lang="en-US" sz="1150" dirty="0">
                           <a:solidFill>
                             <a:srgbClr val="1E293B"/>
                           </a:solidFill>
@@ -13810,7 +13810,7 @@
                         </a:rPr>
                         <a:t>يدويًا وببطء</a:t>
                       </a:r>
-                      <a:endParaRPr lang="en-US" sz="1250" dirty="0">
+                      <a:endParaRPr lang="en-US" sz="1150" dirty="0">
                         <a:latin typeface="Arial" charset="0"/>
                         <a:ea typeface="Arial" charset="0"/>
                         <a:cs typeface="Arial" charset="0"/>
@@ -13868,7 +13868,7 @@
                         <a:buNone/>
                       </a:pPr>
                       <a:r>
-                        <a:rPr lang="en-US" sz="1250" dirty="0">
+                        <a:rPr lang="en-US" sz="1150" dirty="0">
                           <a:solidFill>
                             <a:srgbClr val="94A3B8"/>
                           </a:solidFill>
@@ -13878,7 +13878,7 @@
                         </a:rPr>
                         <a:t>✗</a:t>
                       </a:r>
-                      <a:endParaRPr lang="en-US" sz="1250" dirty="0">
+                      <a:endParaRPr lang="en-US" sz="1150" dirty="0">
                         <a:latin typeface="Arial" charset="0"/>
                         <a:ea typeface="Arial" charset="0"/>
                         <a:cs typeface="Arial" charset="0"/>
@@ -13936,7 +13936,7 @@
                         <a:buNone/>
                       </a:pPr>
                       <a:r>
-                        <a:rPr lang="en-US" sz="1250" b="1" dirty="0">
+                        <a:rPr lang="en-US" sz="1150" b="1" dirty="0">
                           <a:solidFill>
                             <a:srgbClr val="10B981"/>
                           </a:solidFill>
@@ -13946,7 +13946,7 @@
                         </a:rPr>
                         <a:t>✓ باعتماد المالك</a:t>
                       </a:r>
-                      <a:endParaRPr lang="en-US" sz="1250" dirty="0">
+                      <a:endParaRPr lang="en-US" sz="1150" dirty="0">
                         <a:latin typeface="Arial" charset="0"/>
                         <a:ea typeface="Arial" charset="0"/>
                         <a:cs typeface="Arial" charset="0"/>
@@ -14006,7 +14006,7 @@
                         <a:buNone/>
                       </a:pPr>
                       <a:r>
-                        <a:rPr lang="en-US" sz="1250" b="1" dirty="0">
+                        <a:rPr lang="en-US" sz="1150" b="1" dirty="0">
                           <a:solidFill>
                             <a:srgbClr val="1E293B"/>
                           </a:solidFill>
@@ -14014,9 +14014,9 @@
                           <a:ea typeface="Arial" pitchFamily="34" charset="-122"/>
                           <a:cs typeface="Arial" pitchFamily="34" charset="-120"/>
                         </a:rPr>
-                        <a:t>يتوسع بلا موظفين</a:t>
+                        <a:t>ينمو دون زيادة موظفين</a:t>
                       </a:r>
-                      <a:endParaRPr lang="en-US" sz="1250" dirty="0">
+                      <a:endParaRPr lang="en-US" sz="1150" dirty="0">
                         <a:latin typeface="Arial" charset="0"/>
                         <a:ea typeface="Arial" charset="0"/>
                         <a:cs typeface="Arial" charset="0"/>
@@ -14074,7 +14074,7 @@
                         <a:buNone/>
                       </a:pPr>
                       <a:r>
-                        <a:rPr lang="en-US" sz="1250" dirty="0">
+                        <a:rPr lang="en-US" sz="1150" dirty="0">
                           <a:solidFill>
                             <a:srgbClr val="94A3B8"/>
                           </a:solidFill>
@@ -14084,7 +14084,7 @@
                         </a:rPr>
                         <a:t>✗</a:t>
                       </a:r>
-                      <a:endParaRPr lang="en-US" sz="1250" dirty="0">
+                      <a:endParaRPr lang="en-US" sz="1150" dirty="0">
                         <a:latin typeface="Arial" charset="0"/>
                         <a:ea typeface="Arial" charset="0"/>
                         <a:cs typeface="Arial" charset="0"/>
@@ -14142,7 +14142,7 @@
                         <a:buNone/>
                       </a:pPr>
                       <a:r>
-                        <a:rPr lang="en-US" sz="1250" dirty="0">
+                        <a:rPr lang="en-US" sz="1150" dirty="0">
                           <a:solidFill>
                             <a:srgbClr val="10B981"/>
                           </a:solidFill>
@@ -14152,7 +14152,7 @@
                         </a:rPr>
                         <a:t>✓</a:t>
                       </a:r>
-                      <a:endParaRPr lang="en-US" sz="1250" dirty="0">
+                      <a:endParaRPr lang="en-US" sz="1150" dirty="0">
                         <a:latin typeface="Arial" charset="0"/>
                         <a:ea typeface="Arial" charset="0"/>
                         <a:cs typeface="Arial" charset="0"/>
@@ -14210,7 +14210,7 @@
                         <a:buNone/>
                       </a:pPr>
                       <a:r>
-                        <a:rPr lang="en-US" sz="1250" b="1" dirty="0">
+                        <a:rPr lang="en-US" sz="1150" b="1" dirty="0">
                           <a:solidFill>
                             <a:srgbClr val="10B981"/>
                           </a:solidFill>
@@ -14220,7 +14220,7 @@
                         </a:rPr>
                         <a:t>✓</a:t>
                       </a:r>
-                      <a:endParaRPr lang="en-US" sz="1250" dirty="0">
+                      <a:endParaRPr lang="en-US" sz="1150" dirty="0">
                         <a:latin typeface="Arial" charset="0"/>
                         <a:ea typeface="Arial" charset="0"/>
                         <a:cs typeface="Arial" charset="0"/>
@@ -14280,7 +14280,7 @@
                         <a:buNone/>
                       </a:pPr>
                       <a:r>
-                        <a:rPr lang="en-US" sz="1250" b="1" dirty="0">
+                        <a:rPr lang="en-US" sz="1150" b="1" dirty="0">
                           <a:solidFill>
                             <a:srgbClr val="1E293B"/>
                           </a:solidFill>
@@ -14288,9 +14288,9 @@
                           <a:ea typeface="Arial" pitchFamily="34" charset="-122"/>
                           <a:cs typeface="Arial" pitchFamily="34" charset="-120"/>
                         </a:rPr>
-                        <a:t>معرفة سعودية مرمّزة</a:t>
+                        <a:t>خبرة سعودية مضمّنة في المنتج</a:t>
                       </a:r>
-                      <a:endParaRPr lang="en-US" sz="1250" dirty="0">
+                      <a:endParaRPr lang="en-US" sz="1150" dirty="0">
                         <a:latin typeface="Arial" charset="0"/>
                         <a:ea typeface="Arial" charset="0"/>
                         <a:cs typeface="Arial" charset="0"/>
@@ -14348,7 +14348,7 @@
                         <a:buNone/>
                       </a:pPr>
                       <a:r>
-                        <a:rPr lang="en-US" sz="1250" dirty="0">
+                        <a:rPr lang="en-US" sz="1150" dirty="0">
                           <a:solidFill>
                             <a:srgbClr val="1E293B"/>
                           </a:solidFill>
@@ -14356,9 +14356,9 @@
                           <a:ea typeface="Arial" pitchFamily="34" charset="-122"/>
                           <a:cs typeface="Arial" pitchFamily="34" charset="-120"/>
                         </a:rPr>
-                        <a:t>في رؤوس الأشخاص</a:t>
+                        <a:t>في رؤوس الأفراد</a:t>
                       </a:r>
-                      <a:endParaRPr lang="en-US" sz="1250" dirty="0">
+                      <a:endParaRPr lang="en-US" sz="1150" dirty="0">
                         <a:latin typeface="Arial" charset="0"/>
                         <a:ea typeface="Arial" charset="0"/>
                         <a:cs typeface="Arial" charset="0"/>
@@ -14416,7 +14416,7 @@
                         <a:buNone/>
                       </a:pPr>
                       <a:r>
-                        <a:rPr lang="en-US" sz="1250" dirty="0">
+                        <a:rPr lang="en-US" sz="1150" dirty="0">
                           <a:solidFill>
                             <a:srgbClr val="1E293B"/>
                           </a:solidFill>
@@ -14426,7 +14426,7 @@
                         </a:rPr>
                         <a:t>سطحية</a:t>
                       </a:r>
-                      <a:endParaRPr lang="en-US" sz="1250" dirty="0">
+                      <a:endParaRPr lang="en-US" sz="1150" dirty="0">
                         <a:latin typeface="Arial" charset="0"/>
                         <a:ea typeface="Arial" charset="0"/>
                         <a:cs typeface="Arial" charset="0"/>
@@ -14484,7 +14484,7 @@
                         <a:buNone/>
                       </a:pPr>
                       <a:r>
-                        <a:rPr lang="en-US" sz="1250" b="1" dirty="0">
+                        <a:rPr lang="en-US" sz="1150" b="1" dirty="0">
                           <a:solidFill>
                             <a:srgbClr val="10B981"/>
                           </a:solidFill>
@@ -14492,9 +14492,9 @@
                           <a:ea typeface="Arial" pitchFamily="34" charset="-122"/>
                           <a:cs typeface="Arial" pitchFamily="34" charset="-120"/>
                         </a:rPr>
-                        <a:t>✓ من خبرة معاشة</a:t>
+                        <a:t>✓ من ممارسة ميدانية لعشر سنوات</a:t>
                       </a:r>
-                      <a:endParaRPr lang="en-US" sz="1250" dirty="0">
+                      <a:endParaRPr lang="en-US" sz="1150" dirty="0">
                         <a:latin typeface="Arial" charset="0"/>
                         <a:ea typeface="Arial" charset="0"/>
                         <a:cs typeface="Arial" charset="0"/>
@@ -14584,7 +14584,7 @@
                 <a:ea typeface="Arial" pitchFamily="34" charset="-122"/>
                 <a:cs typeface="Arial" pitchFamily="34" charset="-120"/>
               </a:rPr>
-              <a:t>نكمّل أنظمة الرواتب ولا نستبدلها — ويمكن أن نبيع من خلالها لاحقًا.</a:t>
+              <a:t>نكمّل أنظمة الموارد البشرية والرواتب ولا نستبدلها — ويمكن أن تصبح قناة بيع لنا لاحقًا.</a:t>
             </a:r>
             <a:endParaRPr lang="en-US" sz="1250" dirty="0"/>
           </a:p>
